--- a/apps/DND/CAD Layout/templates/b2c.pptx
+++ b/apps/DND/CAD Layout/templates/b2c.pptx
@@ -5,11 +5,12 @@
     <p:sldMasterId id="2147483660" r:id="rId1"/>
   </p:sldMasterIdLst>
   <p:notesMasterIdLst>
-    <p:notesMasterId r:id="rId4"/>
+    <p:notesMasterId r:id="rId5"/>
   </p:notesMasterIdLst>
   <p:sldIdLst>
-    <p:sldId id="306" r:id="rId2"/>
-    <p:sldId id="287" r:id="rId3"/>
+    <p:sldId id="313" r:id="rId2"/>
+    <p:sldId id="314" r:id="rId3"/>
+    <p:sldId id="287" r:id="rId4"/>
   </p:sldIdLst>
   <p:sldSz cx="7772400" cy="11887200"/>
   <p:notesSz cx="6858000" cy="9144000"/>
@@ -224,7 +225,7 @@
           <a:p>
             <a:fld id="{FBA1B5F9-2745-4921-BE8D-322FCCFAD1D4}" type="datetimeFigureOut">
               <a:rPr lang="en-US" smtClean="0"/>
-              <a:t>7/20/2026</a:t>
+              <a:t>9/19/2026</a:t>
             </a:fld>
             <a:endParaRPr lang="en-US"/>
           </a:p>
@@ -499,7 +500,7 @@
         <p:cNvPr id="1" name="">
           <a:extLst>
             <a:ext uri="{FF2B5EF4-FFF2-40B4-BE49-F238E27FC236}">
-              <a16:creationId xmlns:a16="http://schemas.microsoft.com/office/drawing/2014/main" id="{2172F923-AA8F-C4EC-A6C2-3BD0BA24C0F2}"/>
+              <a16:creationId xmlns:a16="http://schemas.microsoft.com/office/drawing/2014/main" id="{C7591FF6-F004-0E48-CB57-28DD902148DD}"/>
             </a:ext>
           </a:extLst>
         </p:cNvPr>
@@ -519,7 +520,7 @@
           <p:cNvPr id="2" name="Slide Image Placeholder 1">
             <a:extLst>
               <a:ext uri="{FF2B5EF4-FFF2-40B4-BE49-F238E27FC236}">
-                <a16:creationId xmlns:a16="http://schemas.microsoft.com/office/drawing/2014/main" id="{417010D0-9321-3D9C-6688-3D2A3DC07D16}"/>
+                <a16:creationId xmlns:a16="http://schemas.microsoft.com/office/drawing/2014/main" id="{E384F5CF-7CAB-AA3B-DB05-3E09B2960DFB}"/>
               </a:ext>
             </a:extLst>
           </p:cNvPr>
@@ -537,7 +538,7 @@
           <p:cNvPr id="3" name="Notes Placeholder 2">
             <a:extLst>
               <a:ext uri="{FF2B5EF4-FFF2-40B4-BE49-F238E27FC236}">
-                <a16:creationId xmlns:a16="http://schemas.microsoft.com/office/drawing/2014/main" id="{A4E2D886-4041-2875-1CA1-F87DB0ED6ACA}"/>
+                <a16:creationId xmlns:a16="http://schemas.microsoft.com/office/drawing/2014/main" id="{FB1173AD-FF9A-4671-A1E4-EA2D616365EC}"/>
               </a:ext>
             </a:extLst>
           </p:cNvPr>
@@ -562,7 +563,7 @@
           <p:cNvPr id="4" name="Slide Number Placeholder 3">
             <a:extLst>
               <a:ext uri="{FF2B5EF4-FFF2-40B4-BE49-F238E27FC236}">
-                <a16:creationId xmlns:a16="http://schemas.microsoft.com/office/drawing/2014/main" id="{67ADCA48-DC29-B436-5581-A720C59BC4AF}"/>
+                <a16:creationId xmlns:a16="http://schemas.microsoft.com/office/drawing/2014/main" id="{5C22E38A-6A58-D82F-90BB-687BFD526C8B}"/>
               </a:ext>
             </a:extLst>
           </p:cNvPr>
@@ -589,7 +590,115 @@
     </p:spTree>
     <p:extLst>
       <p:ext uri="{BB962C8B-B14F-4D97-AF65-F5344CB8AC3E}">
-        <p14:creationId xmlns:p14="http://schemas.microsoft.com/office/powerpoint/2010/main" val="1666125949"/>
+        <p14:creationId xmlns:p14="http://schemas.microsoft.com/office/powerpoint/2010/main" val="1725944889"/>
+      </p:ext>
+    </p:extLst>
+  </p:cSld>
+  <p:clrMapOvr>
+    <a:masterClrMapping/>
+  </p:clrMapOvr>
+</p:notes>
+</file>
+
+<file path=ppt/notesSlides/notesSlide2.xml><?xml version="1.0" encoding="utf-8"?>
+<p:notes xmlns:a="http://schemas.openxmlformats.org/drawingml/2006/main" xmlns:r="http://schemas.openxmlformats.org/officeDocument/2006/relationships" xmlns:p="http://schemas.openxmlformats.org/presentationml/2006/main">
+  <p:cSld>
+    <p:spTree>
+      <p:nvGrpSpPr>
+        <p:cNvPr id="1" name="">
+          <a:extLst>
+            <a:ext uri="{FF2B5EF4-FFF2-40B4-BE49-F238E27FC236}">
+              <a16:creationId xmlns:a16="http://schemas.microsoft.com/office/drawing/2014/main" id="{4F861E6E-3A4E-68EA-1469-826AD7C04074}"/>
+            </a:ext>
+          </a:extLst>
+        </p:cNvPr>
+        <p:cNvGrpSpPr/>
+        <p:nvPr/>
+      </p:nvGrpSpPr>
+      <p:grpSpPr>
+        <a:xfrm>
+          <a:off x="0" y="0"/>
+          <a:ext cx="0" cy="0"/>
+          <a:chOff x="0" y="0"/>
+          <a:chExt cx="0" cy="0"/>
+        </a:xfrm>
+      </p:grpSpPr>
+      <p:sp>
+        <p:nvSpPr>
+          <p:cNvPr id="2" name="Slide Image Placeholder 1">
+            <a:extLst>
+              <a:ext uri="{FF2B5EF4-FFF2-40B4-BE49-F238E27FC236}">
+                <a16:creationId xmlns:a16="http://schemas.microsoft.com/office/drawing/2014/main" id="{25E84E2C-58CC-C6BC-7D1E-EFEF316E4028}"/>
+              </a:ext>
+            </a:extLst>
+          </p:cNvPr>
+          <p:cNvSpPr>
+            <a:spLocks noGrp="1" noRot="1" noChangeAspect="1"/>
+          </p:cNvSpPr>
+          <p:nvPr>
+            <p:ph type="sldImg"/>
+          </p:nvPr>
+        </p:nvSpPr>
+        <p:spPr/>
+      </p:sp>
+      <p:sp>
+        <p:nvSpPr>
+          <p:cNvPr id="3" name="Notes Placeholder 2">
+            <a:extLst>
+              <a:ext uri="{FF2B5EF4-FFF2-40B4-BE49-F238E27FC236}">
+                <a16:creationId xmlns:a16="http://schemas.microsoft.com/office/drawing/2014/main" id="{0945812D-0125-8008-33F6-85D0C3972E49}"/>
+              </a:ext>
+            </a:extLst>
+          </p:cNvPr>
+          <p:cNvSpPr>
+            <a:spLocks noGrp="1"/>
+          </p:cNvSpPr>
+          <p:nvPr>
+            <p:ph type="body" idx="1"/>
+          </p:nvPr>
+        </p:nvSpPr>
+        <p:spPr/>
+        <p:txBody>
+          <a:bodyPr/>
+          <a:lstStyle/>
+          <a:p>
+            <a:endParaRPr lang="en-US" dirty="0"/>
+          </a:p>
+        </p:txBody>
+      </p:sp>
+      <p:sp>
+        <p:nvSpPr>
+          <p:cNvPr id="4" name="Slide Number Placeholder 3">
+            <a:extLst>
+              <a:ext uri="{FF2B5EF4-FFF2-40B4-BE49-F238E27FC236}">
+                <a16:creationId xmlns:a16="http://schemas.microsoft.com/office/drawing/2014/main" id="{CE3612F2-4F9D-3173-D457-D5C04BE336B4}"/>
+              </a:ext>
+            </a:extLst>
+          </p:cNvPr>
+          <p:cNvSpPr>
+            <a:spLocks noGrp="1"/>
+          </p:cNvSpPr>
+          <p:nvPr>
+            <p:ph type="sldNum" sz="quarter" idx="5"/>
+          </p:nvPr>
+        </p:nvSpPr>
+        <p:spPr/>
+        <p:txBody>
+          <a:bodyPr/>
+          <a:lstStyle/>
+          <a:p>
+            <a:fld id="{6D3E04D4-8DDB-4C0B-A2CE-0EF8FFC98C03}" type="slidenum">
+              <a:rPr lang="en-US" smtClean="0"/>
+              <a:t>2</a:t>
+            </a:fld>
+            <a:endParaRPr lang="en-US"/>
+          </a:p>
+        </p:txBody>
+      </p:sp>
+    </p:spTree>
+    <p:extLst>
+      <p:ext uri="{BB962C8B-B14F-4D97-AF65-F5344CB8AC3E}">
+        <p14:creationId xmlns:p14="http://schemas.microsoft.com/office/powerpoint/2010/main" val="2982737647"/>
       </p:ext>
     </p:extLst>
   </p:cSld>
@@ -730,7 +839,7 @@
           <a:p>
             <a:fld id="{E59F97CA-245A-48BA-B134-2EEE86C5EC8A}" type="datetimeFigureOut">
               <a:rPr lang="en-US" smtClean="0"/>
-              <a:t>7/20/2026</a:t>
+              <a:t>9/19/2026</a:t>
             </a:fld>
             <a:endParaRPr lang="en-US" dirty="0"/>
           </a:p>
@@ -900,7 +1009,7 @@
           <a:p>
             <a:fld id="{E59F97CA-245A-48BA-B134-2EEE86C5EC8A}" type="datetimeFigureOut">
               <a:rPr lang="en-US" smtClean="0"/>
-              <a:t>7/20/2026</a:t>
+              <a:t>9/19/2026</a:t>
             </a:fld>
             <a:endParaRPr lang="en-US" dirty="0"/>
           </a:p>
@@ -1080,7 +1189,7 @@
           <a:p>
             <a:fld id="{E59F97CA-245A-48BA-B134-2EEE86C5EC8A}" type="datetimeFigureOut">
               <a:rPr lang="en-US" smtClean="0"/>
-              <a:t>7/20/2026</a:t>
+              <a:t>9/19/2026</a:t>
             </a:fld>
             <a:endParaRPr lang="en-US" dirty="0"/>
           </a:p>
@@ -1250,7 +1359,7 @@
           <a:p>
             <a:fld id="{E59F97CA-245A-48BA-B134-2EEE86C5EC8A}" type="datetimeFigureOut">
               <a:rPr lang="en-US" smtClean="0"/>
-              <a:t>7/20/2026</a:t>
+              <a:t>9/19/2026</a:t>
             </a:fld>
             <a:endParaRPr lang="en-US" dirty="0"/>
           </a:p>
@@ -1494,7 +1603,7 @@
           <a:p>
             <a:fld id="{E59F97CA-245A-48BA-B134-2EEE86C5EC8A}" type="datetimeFigureOut">
               <a:rPr lang="en-US" smtClean="0"/>
-              <a:t>7/20/2026</a:t>
+              <a:t>9/19/2026</a:t>
             </a:fld>
             <a:endParaRPr lang="en-US" dirty="0"/>
           </a:p>
@@ -1726,7 +1835,7 @@
           <a:p>
             <a:fld id="{E59F97CA-245A-48BA-B134-2EEE86C5EC8A}" type="datetimeFigureOut">
               <a:rPr lang="en-US" smtClean="0"/>
-              <a:t>7/20/2026</a:t>
+              <a:t>9/19/2026</a:t>
             </a:fld>
             <a:endParaRPr lang="en-US" dirty="0"/>
           </a:p>
@@ -2093,7 +2202,7 @@
           <a:p>
             <a:fld id="{E59F97CA-245A-48BA-B134-2EEE86C5EC8A}" type="datetimeFigureOut">
               <a:rPr lang="en-US" smtClean="0"/>
-              <a:t>7/20/2026</a:t>
+              <a:t>9/19/2026</a:t>
             </a:fld>
             <a:endParaRPr lang="en-US" dirty="0"/>
           </a:p>
@@ -2211,7 +2320,7 @@
           <a:p>
             <a:fld id="{E59F97CA-245A-48BA-B134-2EEE86C5EC8A}" type="datetimeFigureOut">
               <a:rPr lang="en-US" smtClean="0"/>
-              <a:t>7/20/2026</a:t>
+              <a:t>9/19/2026</a:t>
             </a:fld>
             <a:endParaRPr lang="en-US" dirty="0"/>
           </a:p>
@@ -2306,7 +2415,7 @@
           <a:p>
             <a:fld id="{E59F97CA-245A-48BA-B134-2EEE86C5EC8A}" type="datetimeFigureOut">
               <a:rPr lang="en-US" smtClean="0"/>
-              <a:t>7/20/2026</a:t>
+              <a:t>9/19/2026</a:t>
             </a:fld>
             <a:endParaRPr lang="en-US" dirty="0"/>
           </a:p>
@@ -2583,7 +2692,7 @@
           <a:p>
             <a:fld id="{E59F97CA-245A-48BA-B134-2EEE86C5EC8A}" type="datetimeFigureOut">
               <a:rPr lang="en-US" smtClean="0"/>
-              <a:t>7/20/2026</a:t>
+              <a:t>9/19/2026</a:t>
             </a:fld>
             <a:endParaRPr lang="en-US" dirty="0"/>
           </a:p>
@@ -2839,7 +2948,7 @@
           <a:p>
             <a:fld id="{E59F97CA-245A-48BA-B134-2EEE86C5EC8A}" type="datetimeFigureOut">
               <a:rPr lang="en-US" smtClean="0"/>
-              <a:t>7/20/2026</a:t>
+              <a:t>9/19/2026</a:t>
             </a:fld>
             <a:endParaRPr lang="en-US" dirty="0"/>
           </a:p>
@@ -3052,7 +3161,7 @@
           <a:p>
             <a:fld id="{E59F97CA-245A-48BA-B134-2EEE86C5EC8A}" type="datetimeFigureOut">
               <a:rPr lang="en-US" smtClean="0"/>
-              <a:t>7/20/2026</a:t>
+              <a:t>9/19/2026</a:t>
             </a:fld>
             <a:endParaRPr lang="en-US" dirty="0"/>
           </a:p>
@@ -3448,7 +3557,7 @@
         <p:cNvPr id="1" name="">
           <a:extLst>
             <a:ext uri="{FF2B5EF4-FFF2-40B4-BE49-F238E27FC236}">
-              <a16:creationId xmlns:a16="http://schemas.microsoft.com/office/drawing/2014/main" id="{AE699322-BD3F-40CD-8189-AE8775F54D18}"/>
+              <a16:creationId xmlns:a16="http://schemas.microsoft.com/office/drawing/2014/main" id="{B9510FA7-1362-3A20-43EC-9954F702ADF3}"/>
             </a:ext>
           </a:extLst>
         </p:cNvPr>
@@ -3463,87 +3572,127 @@
           <a:chExt cx="0" cy="0"/>
         </a:xfrm>
       </p:grpSpPr>
-      <p:sp>
-        <p:nvSpPr>
-          <p:cNvPr id="31" name="TextBox 30">
+      <p:pic>
+        <p:nvPicPr>
+          <p:cNvPr id="23" name="Picture 22">
             <a:extLst>
               <a:ext uri="{FF2B5EF4-FFF2-40B4-BE49-F238E27FC236}">
-                <a16:creationId xmlns:a16="http://schemas.microsoft.com/office/drawing/2014/main" id="{15EFCA06-F4B9-93A2-D21F-62275374EF5E}"/>
+                <a16:creationId xmlns:a16="http://schemas.microsoft.com/office/drawing/2014/main" id="{E90A8AE8-214E-F34E-E0D8-8824F1B2F19B}"/>
               </a:ext>
             </a:extLst>
           </p:cNvPr>
-          <p:cNvSpPr txBox="1"/>
+          <p:cNvPicPr>
+            <a:picLocks noChangeAspect="1"/>
+          </p:cNvPicPr>
           <p:nvPr/>
-        </p:nvSpPr>
-        <p:spPr>
-          <a:xfrm>
-            <a:off x="5325694" y="6262884"/>
-            <a:ext cx="2457171" cy="265907"/>
+        </p:nvPicPr>
+        <p:blipFill>
+          <a:blip r:embed="rId3">
+            <a:extLst>
+              <a:ext uri="{28A0092B-C50C-407E-A947-70E740481C1C}">
+                <a14:useLocalDpi xmlns:a14="http://schemas.microsoft.com/office/drawing/2010/main" val="0"/>
+              </a:ext>
+            </a:extLst>
+          </a:blip>
+          <a:srcRect l="69915" t="21666" b="59065"/>
+          <a:stretch/>
+        </p:blipFill>
+        <p:spPr>
+          <a:xfrm>
+            <a:off x="5775263" y="7980184"/>
+            <a:ext cx="1657235" cy="1709214"/>
+          </a:xfrm>
+          <a:prstGeom prst="rect">
+            <a:avLst/>
+          </a:prstGeom>
+        </p:spPr>
+      </p:pic>
+      <p:pic>
+        <p:nvPicPr>
+          <p:cNvPr id="6" name="Picture 5">
+            <a:extLst>
+              <a:ext uri="{FF2B5EF4-FFF2-40B4-BE49-F238E27FC236}">
+                <a16:creationId xmlns:a16="http://schemas.microsoft.com/office/drawing/2014/main" id="{DE78DE01-9625-03E1-1470-E3691EFA0097}"/>
+              </a:ext>
+            </a:extLst>
+          </p:cNvPr>
+          <p:cNvPicPr>
+            <a:picLocks noChangeAspect="1"/>
+          </p:cNvPicPr>
+          <p:nvPr/>
+        </p:nvPicPr>
+        <p:blipFill>
+          <a:blip r:embed="rId3">
+            <a:extLst>
+              <a:ext uri="{28A0092B-C50C-407E-A947-70E740481C1C}">
+                <a14:useLocalDpi xmlns:a14="http://schemas.microsoft.com/office/drawing/2010/main" val="0"/>
+              </a:ext>
+            </a:extLst>
+          </a:blip>
+          <a:srcRect b="2665"/>
+          <a:stretch/>
+        </p:blipFill>
+        <p:spPr>
+          <a:xfrm>
+            <a:off x="909908" y="1715718"/>
+            <a:ext cx="3524964" cy="5524841"/>
+          </a:xfrm>
+          <a:prstGeom prst="rect">
+            <a:avLst/>
+          </a:prstGeom>
+        </p:spPr>
+      </p:pic>
+      <p:sp>
+        <p:nvSpPr>
+          <p:cNvPr id="30" name="Rectangle 29">
+            <a:extLst>
+              <a:ext uri="{FF2B5EF4-FFF2-40B4-BE49-F238E27FC236}">
+                <a16:creationId xmlns:a16="http://schemas.microsoft.com/office/drawing/2014/main" id="{E828E354-E4F4-4599-93FF-93E2F1C0403D}"/>
+              </a:ext>
+            </a:extLst>
+          </p:cNvPr>
+          <p:cNvSpPr/>
+          <p:nvPr/>
+        </p:nvSpPr>
+        <p:spPr>
+          <a:xfrm>
+            <a:off x="2429125" y="8445899"/>
+            <a:ext cx="1507935" cy="782302"/>
           </a:xfrm>
           <a:prstGeom prst="rect">
             <a:avLst/>
           </a:prstGeom>
           <a:solidFill>
-            <a:srgbClr val="DE9E31"/>
+            <a:schemeClr val="bg1"/>
           </a:solidFill>
-        </p:spPr>
-        <p:txBody>
-          <a:bodyPr wrap="square" rtlCol="0">
-            <a:spAutoFit/>
-          </a:bodyPr>
-          <a:lstStyle/>
-          <a:p>
-            <a:r>
-              <a:rPr lang="en-US" sz="1692" baseline="30000" dirty="0">
-                <a:solidFill>
-                  <a:schemeClr val="bg1"/>
-                </a:solidFill>
-                <a:latin typeface="Tw Cen MT" panose="020B0602020104020603" pitchFamily="34" charset="0"/>
-              </a:rPr>
-              <a:t>#16. Silk Wool Mix Ply </a:t>
-            </a:r>
-          </a:p>
-        </p:txBody>
-      </p:sp>
-      <p:sp>
-        <p:nvSpPr>
-          <p:cNvPr id="34" name="TextBox 33">
-            <a:extLst>
-              <a:ext uri="{FF2B5EF4-FFF2-40B4-BE49-F238E27FC236}">
-                <a16:creationId xmlns:a16="http://schemas.microsoft.com/office/drawing/2014/main" id="{83708B15-1A95-5D35-025E-F4055DCEAC51}"/>
-              </a:ext>
-            </a:extLst>
-          </p:cNvPr>
-          <p:cNvSpPr txBox="1"/>
-          <p:nvPr/>
-        </p:nvSpPr>
-        <p:spPr>
-          <a:xfrm>
-            <a:off x="5331271" y="5952410"/>
-            <a:ext cx="2457171" cy="265907"/>
-          </a:xfrm>
-          <a:prstGeom prst="rect">
-            <a:avLst/>
-          </a:prstGeom>
-          <a:solidFill>
-            <a:srgbClr val="DC910D"/>
-          </a:solidFill>
-        </p:spPr>
-        <p:txBody>
-          <a:bodyPr wrap="square" rtlCol="0">
-            <a:spAutoFit/>
-          </a:bodyPr>
-          <a:lstStyle/>
-          <a:p>
-            <a:r>
-              <a:rPr lang="en-US" sz="1692" baseline="30000" dirty="0">
-                <a:solidFill>
-                  <a:schemeClr val="bg1"/>
-                </a:solidFill>
-                <a:latin typeface="Tw Cen MT" panose="020B0602020104020603" pitchFamily="34" charset="0"/>
-              </a:rPr>
-              <a:t>#15. Silk Wool Mix Ply </a:t>
-            </a:r>
+          <a:ln>
+            <a:solidFill>
+              <a:schemeClr val="bg1"/>
+            </a:solidFill>
+          </a:ln>
+        </p:spPr>
+        <p:style>
+          <a:lnRef idx="2">
+            <a:schemeClr val="accent1">
+              <a:shade val="15000"/>
+            </a:schemeClr>
+          </a:lnRef>
+          <a:fillRef idx="1">
+            <a:schemeClr val="accent1"/>
+          </a:fillRef>
+          <a:effectRef idx="0">
+            <a:schemeClr val="accent1"/>
+          </a:effectRef>
+          <a:fontRef idx="minor">
+            <a:schemeClr val="lt1"/>
+          </a:fontRef>
+        </p:style>
+        <p:txBody>
+          <a:bodyPr rtlCol="0" anchor="ctr"/>
+          <a:lstStyle/>
+          <a:p>
+            <a:pPr algn="ctr"/>
+            <a:endParaRPr lang="en-US"/>
           </a:p>
         </p:txBody>
       </p:sp>
@@ -3552,7 +3701,7 @@
           <p:cNvPr id="8" name="Straight Connector 7">
             <a:extLst>
               <a:ext uri="{FF2B5EF4-FFF2-40B4-BE49-F238E27FC236}">
-                <a16:creationId xmlns:a16="http://schemas.microsoft.com/office/drawing/2014/main" id="{D0B504F1-441B-A4D8-77C0-64F65CC4919F}"/>
+                <a16:creationId xmlns:a16="http://schemas.microsoft.com/office/drawing/2014/main" id="{DA6B9F19-3D83-3016-3DCE-376EEB3785FD}"/>
               </a:ext>
             </a:extLst>
           </p:cNvPr>
@@ -3595,7 +3744,7 @@
           <p:cNvPr id="12" name="TextBox 11">
             <a:extLst>
               <a:ext uri="{FF2B5EF4-FFF2-40B4-BE49-F238E27FC236}">
-                <a16:creationId xmlns:a16="http://schemas.microsoft.com/office/drawing/2014/main" id="{B426005B-2BFA-D192-DFDF-951DF1EC8CDA}"/>
+                <a16:creationId xmlns:a16="http://schemas.microsoft.com/office/drawing/2014/main" id="{4F8FA196-6771-DF0A-E54E-549BFD223BCB}"/>
               </a:ext>
             </a:extLst>
           </p:cNvPr>
@@ -3604,8 +3753,8 @@
         </p:nvSpPr>
         <p:spPr>
           <a:xfrm>
-            <a:off x="6415231" y="218716"/>
-            <a:ext cx="1977655" cy="276999"/>
+            <a:off x="6347499" y="218716"/>
+            <a:ext cx="1977655" cy="246221"/>
           </a:xfrm>
           <a:prstGeom prst="rect">
             <a:avLst/>
@@ -3619,17 +3768,17 @@
           <a:lstStyle/>
           <a:p>
             <a:r>
-              <a:rPr lang="en-US" sz="1200" b="1" dirty="0">
+              <a:rPr lang="en-US" sz="1000" dirty="0">
                 <a:solidFill>
                   <a:schemeClr val="tx1">
-                    <a:lumMod val="50000"/>
-                    <a:lumOff val="50000"/>
+                    <a:lumMod val="75000"/>
+                    <a:lumOff val="25000"/>
                   </a:schemeClr>
                 </a:solidFill>
-                <a:latin typeface="Microsoft Yi Baiti" panose="03000500000000000000" pitchFamily="66" charset="0"/>
-                <a:ea typeface="Microsoft Yi Baiti" panose="03000500000000000000" pitchFamily="66" charset="0"/>
-              </a:rPr>
-              <a:t>Date : 20/05/026</a:t>
+                <a:latin typeface="Microsoft JhengHei Light" panose="020B0304030504040204" pitchFamily="34" charset="-120"/>
+                <a:ea typeface="Microsoft JhengHei Light" panose="020B0304030504040204" pitchFamily="34" charset="-120"/>
+              </a:rPr>
+              <a:t>Date : 19/09/2026</a:t>
             </a:r>
           </a:p>
         </p:txBody>
@@ -3639,7 +3788,7 @@
           <p:cNvPr id="13" name="TextBox 12">
             <a:extLst>
               <a:ext uri="{FF2B5EF4-FFF2-40B4-BE49-F238E27FC236}">
-                <a16:creationId xmlns:a16="http://schemas.microsoft.com/office/drawing/2014/main" id="{4F486FAC-632E-5BE6-B666-67E822EE5440}"/>
+                <a16:creationId xmlns:a16="http://schemas.microsoft.com/office/drawing/2014/main" id="{516ACEFB-FEBD-47A0-1239-753E360E70DA}"/>
               </a:ext>
             </a:extLst>
           </p:cNvPr>
@@ -3648,8 +3797,8 @@
         </p:nvSpPr>
         <p:spPr>
           <a:xfrm>
-            <a:off x="6436251" y="420597"/>
-            <a:ext cx="1977655" cy="261610"/>
+            <a:off x="4024299" y="500787"/>
+            <a:ext cx="3553148" cy="246221"/>
           </a:xfrm>
           <a:prstGeom prst="rect">
             <a:avLst/>
@@ -3662,18 +3811,19 @@
           </a:bodyPr>
           <a:lstStyle/>
           <a:p>
-            <a:r>
-              <a:rPr lang="en-US" sz="1100" b="1" dirty="0">
+            <a:pPr algn="r"/>
+            <a:r>
+              <a:rPr lang="en-US" sz="1000" dirty="0">
                 <a:solidFill>
                   <a:schemeClr val="tx1">
-                    <a:lumMod val="50000"/>
-                    <a:lumOff val="50000"/>
+                    <a:lumMod val="75000"/>
+                    <a:lumOff val="25000"/>
                   </a:schemeClr>
                 </a:solidFill>
-                <a:latin typeface="Microsoft Yi Baiti" panose="03000500000000000000" pitchFamily="66" charset="0"/>
-                <a:ea typeface="Microsoft Yi Baiti" panose="03000500000000000000" pitchFamily="66" charset="0"/>
-              </a:rPr>
-              <a:t>Customized Project</a:t>
+                <a:latin typeface="Microsoft JhengHei Light" panose="020B0304030504040204" pitchFamily="34" charset="-120"/>
+                <a:ea typeface="Microsoft JhengHei Light" panose="020B0304030504040204" pitchFamily="34" charset="-120"/>
+              </a:rPr>
+              <a:t>Customized Project : Divya Somani</a:t>
             </a:r>
           </a:p>
         </p:txBody>
@@ -3683,7 +3833,7 @@
           <p:cNvPr id="17" name="TextBox 16">
             <a:extLst>
               <a:ext uri="{FF2B5EF4-FFF2-40B4-BE49-F238E27FC236}">
-                <a16:creationId xmlns:a16="http://schemas.microsoft.com/office/drawing/2014/main" id="{79DA9655-9A1A-03D8-D02F-4DDCC0F93C03}"/>
+                <a16:creationId xmlns:a16="http://schemas.microsoft.com/office/drawing/2014/main" id="{9BE82662-CE89-2CF8-AF1B-3914241E68E1}"/>
               </a:ext>
             </a:extLst>
           </p:cNvPr>
@@ -3692,8 +3842,8 @@
         </p:nvSpPr>
         <p:spPr>
           <a:xfrm>
-            <a:off x="393283" y="11402102"/>
-            <a:ext cx="2728641" cy="276999"/>
+            <a:off x="3526797" y="10933749"/>
+            <a:ext cx="3750500" cy="246221"/>
           </a:xfrm>
           <a:prstGeom prst="rect">
             <a:avLst/>
@@ -3707,15 +3857,17 @@
           <a:lstStyle/>
           <a:p>
             <a:r>
-              <a:rPr lang="en-US" sz="1200" b="1" dirty="0">
+              <a:rPr lang="en-US" sz="1000" b="1" dirty="0">
                 <a:solidFill>
                   <a:schemeClr val="tx1">
-                    <a:lumMod val="50000"/>
-                    <a:lumOff val="50000"/>
+                    <a:lumMod val="65000"/>
+                    <a:lumOff val="35000"/>
                   </a:schemeClr>
                 </a:solidFill>
-              </a:rPr>
-              <a:t>Signature : ____________________</a:t>
+                <a:latin typeface="Microsoft JhengHei Light" panose="020B0304030504040204" pitchFamily="34" charset="-120"/>
+                <a:ea typeface="Microsoft JhengHei Light" panose="020B0304030504040204" pitchFamily="34" charset="-120"/>
+              </a:rPr>
+              <a:t>Signature : ________________________________________________ </a:t>
             </a:r>
           </a:p>
         </p:txBody>
@@ -3725,7 +3877,7 @@
           <p:cNvPr id="18" name="TextBox 17">
             <a:extLst>
               <a:ext uri="{FF2B5EF4-FFF2-40B4-BE49-F238E27FC236}">
-                <a16:creationId xmlns:a16="http://schemas.microsoft.com/office/drawing/2014/main" id="{67A7E8B0-1930-3839-1189-87E9C60E4408}"/>
+                <a16:creationId xmlns:a16="http://schemas.microsoft.com/office/drawing/2014/main" id="{325972CF-3854-348E-DFC6-8351AACAB84E}"/>
               </a:ext>
             </a:extLst>
           </p:cNvPr>
@@ -3734,8 +3886,8 @@
         </p:nvSpPr>
         <p:spPr>
           <a:xfrm>
-            <a:off x="5119357" y="11435295"/>
-            <a:ext cx="2419127" cy="276999"/>
+            <a:off x="3551067" y="11218889"/>
+            <a:ext cx="3612523" cy="246221"/>
           </a:xfrm>
           <a:prstGeom prst="rect">
             <a:avLst/>
@@ -3749,15 +3901,17 @@
           <a:lstStyle/>
           <a:p>
             <a:r>
-              <a:rPr lang="en-US" sz="1200" b="1" dirty="0">
+              <a:rPr lang="en-US" sz="1000" b="1" dirty="0">
                 <a:solidFill>
                   <a:schemeClr val="tx1">
-                    <a:lumMod val="50000"/>
-                    <a:lumOff val="50000"/>
+                    <a:lumMod val="65000"/>
+                    <a:lumOff val="35000"/>
                   </a:schemeClr>
                 </a:solidFill>
-              </a:rPr>
-              <a:t>Date of Approval :_____________</a:t>
+                <a:latin typeface="Microsoft JhengHei Light" panose="020B0304030504040204" pitchFamily="34" charset="-120"/>
+                <a:ea typeface="Microsoft JhengHei Light" panose="020B0304030504040204" pitchFamily="34" charset="-120"/>
+              </a:rPr>
+              <a:t>Date of Approval :_________________________________________</a:t>
             </a:r>
           </a:p>
         </p:txBody>
@@ -3767,7 +3921,7 @@
           <p:cNvPr id="19" name="TextBox 18">
             <a:extLst>
               <a:ext uri="{FF2B5EF4-FFF2-40B4-BE49-F238E27FC236}">
-                <a16:creationId xmlns:a16="http://schemas.microsoft.com/office/drawing/2014/main" id="{58CA981C-4909-9790-2983-C2BC663C079A}"/>
+                <a16:creationId xmlns:a16="http://schemas.microsoft.com/office/drawing/2014/main" id="{B9A7EE6D-EC49-C637-4CAA-69D8CB0C2A1E}"/>
               </a:ext>
             </a:extLst>
           </p:cNvPr>
@@ -3776,8 +3930,8 @@
         </p:nvSpPr>
         <p:spPr>
           <a:xfrm>
-            <a:off x="272504" y="6802389"/>
-            <a:ext cx="2419036" cy="1672253"/>
+            <a:off x="353921" y="8002863"/>
+            <a:ext cx="2419036" cy="1911998"/>
           </a:xfrm>
           <a:prstGeom prst="rect">
             <a:avLst/>
@@ -3790,116 +3944,244 @@
           </a:bodyPr>
           <a:lstStyle/>
           <a:p>
-            <a:pPr marR="0" algn="l" rtl="0"/>
-            <a:r>
-              <a:rPr lang="en-US" sz="1400" b="0" i="0" u="none" strike="noStrike" baseline="30000" dirty="0">
-                <a:latin typeface="Arial" panose="020B0604020202020204" pitchFamily="34" charset="0"/>
+            <a:pPr marR="0" algn="l" rtl="0">
+              <a:lnSpc>
+                <a:spcPts val="1300"/>
+              </a:lnSpc>
+            </a:pPr>
+            <a:r>
+              <a:rPr lang="en-US" sz="1400" i="0" u="none" strike="noStrike" baseline="30000" dirty="0">
+                <a:solidFill>
+                  <a:schemeClr val="tx1">
+                    <a:lumMod val="65000"/>
+                    <a:lumOff val="35000"/>
+                  </a:schemeClr>
+                </a:solidFill>
+                <a:latin typeface="Microsoft JhengHei Light" panose="020B0304030504040204" pitchFamily="34" charset="-120"/>
+                <a:ea typeface="Microsoft JhengHei Light" panose="020B0304030504040204" pitchFamily="34" charset="-120"/>
                 <a:cs typeface="Arial" panose="020B0604020202020204" pitchFamily="34" charset="0"/>
               </a:rPr>
               <a:t>SIZE </a:t>
             </a:r>
           </a:p>
           <a:p>
-            <a:pPr marR="0" algn="l" rtl="0"/>
-            <a:r>
-              <a:rPr lang="en-US" sz="1400" b="0" i="0" u="none" strike="noStrike" baseline="30000" dirty="0">
-                <a:latin typeface="Arial" panose="020B0604020202020204" pitchFamily="34" charset="0"/>
+            <a:pPr marR="0" algn="l" rtl="0">
+              <a:lnSpc>
+                <a:spcPts val="1300"/>
+              </a:lnSpc>
+            </a:pPr>
+            <a:r>
+              <a:rPr lang="en-US" sz="1400" i="0" u="none" strike="noStrike" baseline="30000" dirty="0">
+                <a:solidFill>
+                  <a:schemeClr val="tx1">
+                    <a:lumMod val="65000"/>
+                    <a:lumOff val="35000"/>
+                  </a:schemeClr>
+                </a:solidFill>
+                <a:latin typeface="Microsoft JhengHei Light" panose="020B0304030504040204" pitchFamily="34" charset="-120"/>
+                <a:ea typeface="Microsoft JhengHei Light" panose="020B0304030504040204" pitchFamily="34" charset="-120"/>
                 <a:cs typeface="Arial" panose="020B0604020202020204" pitchFamily="34" charset="0"/>
               </a:rPr>
               <a:t>CUSTOMER METRICS  </a:t>
             </a:r>
           </a:p>
           <a:p>
-            <a:pPr marR="0" algn="l" rtl="0"/>
-            <a:r>
-              <a:rPr lang="en-US" sz="1400" b="0" i="0" u="none" strike="noStrike" baseline="30000" dirty="0">
-                <a:latin typeface="Arial" panose="020B0604020202020204" pitchFamily="34" charset="0"/>
+            <a:pPr marR="0" algn="l" rtl="0">
+              <a:lnSpc>
+                <a:spcPts val="1300"/>
+              </a:lnSpc>
+            </a:pPr>
+            <a:r>
+              <a:rPr lang="en-US" sz="1400" i="0" u="none" strike="noStrike" baseline="30000" dirty="0">
+                <a:solidFill>
+                  <a:schemeClr val="tx1">
+                    <a:lumMod val="65000"/>
+                    <a:lumOff val="35000"/>
+                  </a:schemeClr>
+                </a:solidFill>
+                <a:latin typeface="Microsoft JhengHei Light" panose="020B0304030504040204" pitchFamily="34" charset="-120"/>
+                <a:ea typeface="Microsoft JhengHei Light" panose="020B0304030504040204" pitchFamily="34" charset="-120"/>
                 <a:cs typeface="Arial" panose="020B0604020202020204" pitchFamily="34" charset="0"/>
               </a:rPr>
               <a:t>SHAPE </a:t>
             </a:r>
           </a:p>
           <a:p>
-            <a:pPr marR="0" algn="l" rtl="0"/>
-            <a:r>
-              <a:rPr lang="en-US" sz="1400" b="0" i="0" u="none" strike="noStrike" baseline="30000" dirty="0">
-                <a:latin typeface="Arial" panose="020B0604020202020204" pitchFamily="34" charset="0"/>
+            <a:pPr marR="0" algn="l" rtl="0">
+              <a:lnSpc>
+                <a:spcPts val="1300"/>
+              </a:lnSpc>
+            </a:pPr>
+            <a:r>
+              <a:rPr lang="en-US" sz="1400" i="0" u="none" strike="noStrike" baseline="30000" dirty="0">
+                <a:solidFill>
+                  <a:schemeClr val="tx1">
+                    <a:lumMod val="65000"/>
+                    <a:lumOff val="35000"/>
+                  </a:schemeClr>
+                </a:solidFill>
+                <a:latin typeface="Microsoft JhengHei Light" panose="020B0304030504040204" pitchFamily="34" charset="-120"/>
+                <a:ea typeface="Microsoft JhengHei Light" panose="020B0304030504040204" pitchFamily="34" charset="-120"/>
                 <a:cs typeface="Arial" panose="020B0604020202020204" pitchFamily="34" charset="0"/>
               </a:rPr>
               <a:t>RUG QUALITY  </a:t>
             </a:r>
           </a:p>
           <a:p>
-            <a:pPr marR="0" algn="l" rtl="0"/>
-            <a:r>
-              <a:rPr lang="en-US" sz="1400" b="0" i="0" u="none" strike="noStrike" baseline="30000" dirty="0">
-                <a:latin typeface="Arial" panose="020B0604020202020204" pitchFamily="34" charset="0"/>
+            <a:pPr marR="0" algn="l" rtl="0">
+              <a:lnSpc>
+                <a:spcPts val="1300"/>
+              </a:lnSpc>
+            </a:pPr>
+            <a:r>
+              <a:rPr lang="en-US" sz="1400" i="0" u="none" strike="noStrike" baseline="30000" dirty="0">
+                <a:solidFill>
+                  <a:schemeClr val="tx1">
+                    <a:lumMod val="65000"/>
+                    <a:lumOff val="35000"/>
+                  </a:schemeClr>
+                </a:solidFill>
+                <a:latin typeface="Microsoft JhengHei Light" panose="020B0304030504040204" pitchFamily="34" charset="-120"/>
+                <a:ea typeface="Microsoft JhengHei Light" panose="020B0304030504040204" pitchFamily="34" charset="-120"/>
                 <a:cs typeface="Arial" panose="020B0604020202020204" pitchFamily="34" charset="0"/>
               </a:rPr>
               <a:t>FIBRE CONTENT  </a:t>
             </a:r>
           </a:p>
           <a:p>
-            <a:pPr marR="0" algn="l" rtl="0"/>
-            <a:r>
-              <a:rPr lang="en-US" sz="1400" b="0" i="0" u="none" strike="noStrike" baseline="30000" dirty="0">
-                <a:latin typeface="Arial" panose="020B0604020202020204" pitchFamily="34" charset="0"/>
+            <a:pPr marR="0" algn="l" rtl="0">
+              <a:lnSpc>
+                <a:spcPts val="1300"/>
+              </a:lnSpc>
+            </a:pPr>
+            <a:r>
+              <a:rPr lang="en-US" sz="1400" i="0" u="none" strike="noStrike" baseline="30000" dirty="0">
+                <a:solidFill>
+                  <a:schemeClr val="tx1">
+                    <a:lumMod val="65000"/>
+                    <a:lumOff val="35000"/>
+                  </a:schemeClr>
+                </a:solidFill>
+                <a:latin typeface="Microsoft JhengHei Light" panose="020B0304030504040204" pitchFamily="34" charset="-120"/>
+                <a:ea typeface="Microsoft JhengHei Light" panose="020B0304030504040204" pitchFamily="34" charset="-120"/>
                 <a:cs typeface="Arial" panose="020B0604020202020204" pitchFamily="34" charset="0"/>
               </a:rPr>
               <a:t>DYEING TECHNIQUE </a:t>
             </a:r>
           </a:p>
           <a:p>
-            <a:pPr marR="0" algn="l" rtl="0"/>
-            <a:r>
-              <a:rPr lang="en-US" sz="1400" b="0" i="0" u="none" strike="noStrike" baseline="30000" dirty="0">
-                <a:latin typeface="Arial" panose="020B0604020202020204" pitchFamily="34" charset="0"/>
+            <a:pPr marR="0" algn="l" rtl="0">
+              <a:lnSpc>
+                <a:spcPts val="1300"/>
+              </a:lnSpc>
+            </a:pPr>
+            <a:r>
+              <a:rPr lang="en-US" sz="1400" i="0" u="none" strike="noStrike" baseline="30000" dirty="0">
+                <a:solidFill>
+                  <a:schemeClr val="tx1">
+                    <a:lumMod val="65000"/>
+                    <a:lumOff val="35000"/>
+                  </a:schemeClr>
+                </a:solidFill>
+                <a:latin typeface="Microsoft JhengHei Light" panose="020B0304030504040204" pitchFamily="34" charset="-120"/>
+                <a:ea typeface="Microsoft JhengHei Light" panose="020B0304030504040204" pitchFamily="34" charset="-120"/>
                 <a:cs typeface="Arial" panose="020B0604020202020204" pitchFamily="34" charset="0"/>
               </a:rPr>
               <a:t>FINISH EDGE </a:t>
             </a:r>
           </a:p>
           <a:p>
-            <a:pPr marR="0" algn="l" rtl="0"/>
-            <a:r>
-              <a:rPr lang="en-US" sz="1400" b="0" i="0" u="none" strike="noStrike" baseline="30000" dirty="0">
-                <a:latin typeface="Arial" panose="020B0604020202020204" pitchFamily="34" charset="0"/>
+            <a:pPr marR="0" algn="l" rtl="0">
+              <a:lnSpc>
+                <a:spcPts val="1300"/>
+              </a:lnSpc>
+            </a:pPr>
+            <a:r>
+              <a:rPr lang="en-US" sz="1400" i="0" u="none" strike="noStrike" baseline="30000" dirty="0">
+                <a:solidFill>
+                  <a:schemeClr val="tx1">
+                    <a:lumMod val="65000"/>
+                    <a:lumOff val="35000"/>
+                  </a:schemeClr>
+                </a:solidFill>
+                <a:latin typeface="Microsoft JhengHei Light" panose="020B0304030504040204" pitchFamily="34" charset="-120"/>
+                <a:ea typeface="Microsoft JhengHei Light" panose="020B0304030504040204" pitchFamily="34" charset="-120"/>
                 <a:cs typeface="Arial" panose="020B0604020202020204" pitchFamily="34" charset="0"/>
               </a:rPr>
               <a:t>FINISH PILE HEIGHT  </a:t>
             </a:r>
           </a:p>
           <a:p>
-            <a:pPr marR="0" algn="l" rtl="0"/>
-            <a:r>
-              <a:rPr lang="en-US" sz="1400" b="0" i="0" u="none" strike="noStrike" baseline="30000" dirty="0">
-                <a:latin typeface="Arial" panose="020B0604020202020204" pitchFamily="34" charset="0"/>
+            <a:pPr marR="0" algn="l" rtl="0">
+              <a:lnSpc>
+                <a:spcPts val="1300"/>
+              </a:lnSpc>
+            </a:pPr>
+            <a:r>
+              <a:rPr lang="en-US" sz="1400" i="0" u="none" strike="noStrike" baseline="30000" dirty="0">
+                <a:solidFill>
+                  <a:schemeClr val="tx1">
+                    <a:lumMod val="65000"/>
+                    <a:lumOff val="35000"/>
+                  </a:schemeClr>
+                </a:solidFill>
+                <a:latin typeface="Microsoft JhengHei Light" panose="020B0304030504040204" pitchFamily="34" charset="-120"/>
+                <a:ea typeface="Microsoft JhengHei Light" panose="020B0304030504040204" pitchFamily="34" charset="-120"/>
                 <a:cs typeface="Arial" panose="020B0604020202020204" pitchFamily="34" charset="0"/>
               </a:rPr>
               <a:t>FINISH PILE TYPE </a:t>
             </a:r>
           </a:p>
           <a:p>
-            <a:pPr marR="0" algn="l" rtl="0"/>
-            <a:r>
-              <a:rPr lang="en-US" sz="1400" b="0" i="0" u="none" strike="noStrike" baseline="30000" dirty="0">
-                <a:latin typeface="Arial" panose="020B0604020202020204" pitchFamily="34" charset="0"/>
+            <a:pPr marR="0" algn="l" rtl="0">
+              <a:lnSpc>
+                <a:spcPts val="1300"/>
+              </a:lnSpc>
+            </a:pPr>
+            <a:r>
+              <a:rPr lang="en-US" sz="1400" i="0" u="none" strike="noStrike" baseline="30000" dirty="0">
+                <a:solidFill>
+                  <a:schemeClr val="tx1">
+                    <a:lumMod val="65000"/>
+                    <a:lumOff val="35000"/>
+                  </a:schemeClr>
+                </a:solidFill>
+                <a:latin typeface="Microsoft JhengHei Light" panose="020B0304030504040204" pitchFamily="34" charset="-120"/>
+                <a:ea typeface="Microsoft JhengHei Light" panose="020B0304030504040204" pitchFamily="34" charset="-120"/>
                 <a:cs typeface="Arial" panose="020B0604020202020204" pitchFamily="34" charset="0"/>
               </a:rPr>
               <a:t>FINISH BACKING </a:t>
             </a:r>
           </a:p>
           <a:p>
-            <a:pPr marR="0" algn="l" rtl="0"/>
+            <a:pPr marR="0" algn="l" rtl="0">
+              <a:lnSpc>
+                <a:spcPts val="1300"/>
+              </a:lnSpc>
+            </a:pPr>
             <a:r>
               <a:rPr lang="en-US" sz="1400" baseline="30000" dirty="0">
-                <a:latin typeface="Arial" panose="020B0604020202020204" pitchFamily="34" charset="0"/>
+                <a:solidFill>
+                  <a:schemeClr val="tx1">
+                    <a:lumMod val="65000"/>
+                    <a:lumOff val="35000"/>
+                  </a:schemeClr>
+                </a:solidFill>
+                <a:latin typeface="Microsoft JhengHei Light" panose="020B0304030504040204" pitchFamily="34" charset="-120"/>
+                <a:ea typeface="Microsoft JhengHei Light" panose="020B0304030504040204" pitchFamily="34" charset="-120"/>
                 <a:cs typeface="Arial" panose="020B0604020202020204" pitchFamily="34" charset="0"/>
               </a:rPr>
               <a:t>FINISH WASH </a:t>
             </a:r>
-            <a:endParaRPr lang="en-US" sz="1400" b="0" i="0" u="none" strike="noStrike" baseline="30000" dirty="0">
-              <a:latin typeface="Arial" panose="020B0604020202020204" pitchFamily="34" charset="0"/>
+            <a:endParaRPr lang="en-US" sz="1400" i="0" u="none" strike="noStrike" baseline="30000" dirty="0">
+              <a:solidFill>
+                <a:schemeClr val="tx1">
+                  <a:lumMod val="65000"/>
+                  <a:lumOff val="35000"/>
+                </a:schemeClr>
+              </a:solidFill>
+              <a:latin typeface="Microsoft JhengHei Light" panose="020B0304030504040204" pitchFamily="34" charset="-120"/>
+              <a:ea typeface="Microsoft JhengHei Light" panose="020B0304030504040204" pitchFamily="34" charset="-120"/>
               <a:cs typeface="Arial" panose="020B0604020202020204" pitchFamily="34" charset="0"/>
             </a:endParaRPr>
           </a:p>
@@ -3910,7 +4192,7 @@
           <p:cNvPr id="14" name="Group 13">
             <a:extLst>
               <a:ext uri="{FF2B5EF4-FFF2-40B4-BE49-F238E27FC236}">
-                <a16:creationId xmlns:a16="http://schemas.microsoft.com/office/drawing/2014/main" id="{C2E6B869-E6DA-A8EF-79CE-06E7A4746DBB}"/>
+                <a16:creationId xmlns:a16="http://schemas.microsoft.com/office/drawing/2014/main" id="{3861C252-2281-5F93-F3D3-456CCA5BA249}"/>
               </a:ext>
             </a:extLst>
           </p:cNvPr>
@@ -3919,8 +4201,8 @@
         </p:nvGrpSpPr>
         <p:grpSpPr>
           <a:xfrm>
-            <a:off x="208336" y="1555603"/>
-            <a:ext cx="4875404" cy="4787635"/>
+            <a:off x="896651" y="1675602"/>
+            <a:ext cx="3658415" cy="5652052"/>
             <a:chOff x="251699" y="2183122"/>
             <a:chExt cx="4789373" cy="3867260"/>
           </a:xfrm>
@@ -3930,7 +4212,7 @@
             <p:cNvPr id="51" name="Straight Arrow Connector 50">
               <a:extLst>
                 <a:ext uri="{FF2B5EF4-FFF2-40B4-BE49-F238E27FC236}">
-                  <a16:creationId xmlns:a16="http://schemas.microsoft.com/office/drawing/2014/main" id="{9B247519-8027-1AFF-CEDF-82803F31EA1C}"/>
+                  <a16:creationId xmlns:a16="http://schemas.microsoft.com/office/drawing/2014/main" id="{9AA91D59-C9B9-C5E6-F38E-E3A39CF9A40F}"/>
                 </a:ext>
               </a:extLst>
             </p:cNvPr>
@@ -3950,8 +4232,8 @@
             <a:ln w="12700">
               <a:solidFill>
                 <a:schemeClr val="tx1">
-                  <a:lumMod val="50000"/>
-                  <a:lumOff val="50000"/>
+                  <a:lumMod val="65000"/>
+                  <a:lumOff val="35000"/>
                 </a:schemeClr>
               </a:solidFill>
               <a:headEnd type="triangle"/>
@@ -3978,7 +4260,7 @@
             <p:cNvPr id="22" name="Straight Arrow Connector 21">
               <a:extLst>
                 <a:ext uri="{FF2B5EF4-FFF2-40B4-BE49-F238E27FC236}">
-                  <a16:creationId xmlns:a16="http://schemas.microsoft.com/office/drawing/2014/main" id="{176B014C-967C-163C-7F98-A469FB2F6C88}"/>
+                  <a16:creationId xmlns:a16="http://schemas.microsoft.com/office/drawing/2014/main" id="{B089C1C5-2167-FFE9-35B6-CA0DCE16277B}"/>
                 </a:ext>
               </a:extLst>
             </p:cNvPr>
@@ -3998,8 +4280,8 @@
             <a:ln w="12700">
               <a:solidFill>
                 <a:schemeClr val="tx1">
-                  <a:lumMod val="50000"/>
-                  <a:lumOff val="50000"/>
+                  <a:lumMod val="65000"/>
+                  <a:lumOff val="35000"/>
                 </a:schemeClr>
               </a:solidFill>
               <a:headEnd type="triangle"/>
@@ -4024,10 +4306,10 @@
       </p:grpSp>
       <p:sp>
         <p:nvSpPr>
-          <p:cNvPr id="40" name="TextBox 39">
+          <p:cNvPr id="41" name="TextBox 40">
             <a:extLst>
               <a:ext uri="{FF2B5EF4-FFF2-40B4-BE49-F238E27FC236}">
-                <a16:creationId xmlns:a16="http://schemas.microsoft.com/office/drawing/2014/main" id="{619D86BA-BFCC-4508-6418-76642A4FBAB7}"/>
+                <a16:creationId xmlns:a16="http://schemas.microsoft.com/office/drawing/2014/main" id="{CEDB045E-E75B-834F-0268-0699454C56AC}"/>
               </a:ext>
             </a:extLst>
           </p:cNvPr>
@@ -4036,8 +4318,8 @@
         </p:nvSpPr>
         <p:spPr>
           <a:xfrm>
-            <a:off x="5368595" y="1354394"/>
-            <a:ext cx="2377054" cy="230832"/>
+            <a:off x="1793124" y="8002864"/>
+            <a:ext cx="2117540" cy="1911998"/>
           </a:xfrm>
           <a:prstGeom prst="rect">
             <a:avLst/>
@@ -4050,192 +4332,306 @@
           </a:bodyPr>
           <a:lstStyle/>
           <a:p>
-            <a:pPr algn="ctr"/>
-            <a:r>
-              <a:rPr lang="en-US" sz="900" dirty="0">
-                <a:solidFill>
-                  <a:schemeClr val="bg1"/>
-                </a:solidFill>
-                <a:highlight>
-                  <a:srgbClr val="000080"/>
-                </a:highlight>
-                <a:latin typeface="Arial" panose="020B0604020202020204" pitchFamily="34" charset="0"/>
-                <a:ea typeface="Microsoft Yi Baiti" panose="03000500000000000000" pitchFamily="66" charset="0"/>
+            <a:pPr marR="0" algn="l" rtl="0">
+              <a:lnSpc>
+                <a:spcPts val="1300"/>
+              </a:lnSpc>
+            </a:pPr>
+            <a:r>
+              <a:rPr lang="en-US" sz="1400" baseline="30000" dirty="0">
+                <a:solidFill>
+                  <a:schemeClr val="tx1">
+                    <a:lumMod val="65000"/>
+                    <a:lumOff val="35000"/>
+                  </a:schemeClr>
+                </a:solidFill>
+                <a:latin typeface="Microsoft JhengHei Light" panose="020B0304030504040204" pitchFamily="34" charset="-120"/>
+                <a:ea typeface="Microsoft JhengHei Light" panose="020B0304030504040204" pitchFamily="34" charset="-120"/>
                 <a:cs typeface="Arial" panose="020B0604020202020204" pitchFamily="34" charset="0"/>
               </a:rPr>
-              <a:t>JRC +ARS  reference  </a:t>
-            </a:r>
-          </a:p>
-        </p:txBody>
-      </p:sp>
-      <p:sp>
-        <p:nvSpPr>
-          <p:cNvPr id="41" name="TextBox 40">
-            <a:extLst>
-              <a:ext uri="{FF2B5EF4-FFF2-40B4-BE49-F238E27FC236}">
-                <a16:creationId xmlns:a16="http://schemas.microsoft.com/office/drawing/2014/main" id="{50BC6EEA-3605-83E5-99BD-91C7A9B92FD0}"/>
-              </a:ext>
-            </a:extLst>
-          </p:cNvPr>
-          <p:cNvSpPr txBox="1"/>
-          <p:nvPr/>
-        </p:nvSpPr>
-        <p:spPr>
-          <a:xfrm>
-            <a:off x="1711707" y="6802390"/>
-            <a:ext cx="2117540" cy="1672253"/>
-          </a:xfrm>
-          <a:prstGeom prst="rect">
-            <a:avLst/>
-          </a:prstGeom>
-          <a:noFill/>
-        </p:spPr>
-        <p:txBody>
-          <a:bodyPr wrap="square" rtlCol="0">
-            <a:spAutoFit/>
-          </a:bodyPr>
-          <a:lstStyle/>
-          <a:p>
-            <a:pPr marR="0" algn="l" rtl="0"/>
-            <a:r>
-              <a:rPr lang="en-US" sz="1400" baseline="30000" dirty="0">
-                <a:latin typeface="Arial" panose="020B0604020202020204" pitchFamily="34" charset="0"/>
-                <a:cs typeface="Arial" panose="020B0604020202020204" pitchFamily="34" charset="0"/>
-              </a:rPr>
-              <a:t>: 5’ Feet X 5 Feet </a:t>
+              <a:t>: 5’FEET X 8’FEET </a:t>
             </a:r>
             <a:br>
               <a:rPr lang="en-US" sz="1400" baseline="30000" dirty="0">
-                <a:latin typeface="Arial" panose="020B0604020202020204" pitchFamily="34" charset="0"/>
+                <a:solidFill>
+                  <a:schemeClr val="tx1">
+                    <a:lumMod val="65000"/>
+                    <a:lumOff val="35000"/>
+                  </a:schemeClr>
+                </a:solidFill>
+                <a:latin typeface="Microsoft JhengHei Light" panose="020B0304030504040204" pitchFamily="34" charset="-120"/>
+                <a:ea typeface="Microsoft JhengHei Light" panose="020B0304030504040204" pitchFamily="34" charset="-120"/>
                 <a:cs typeface="Arial" panose="020B0604020202020204" pitchFamily="34" charset="0"/>
               </a:rPr>
             </a:br>
             <a:r>
               <a:rPr lang="en-US" sz="1400" baseline="30000" dirty="0">
-                <a:latin typeface="Arial" panose="020B0604020202020204" pitchFamily="34" charset="0"/>
+                <a:solidFill>
+                  <a:schemeClr val="tx1">
+                    <a:lumMod val="65000"/>
+                    <a:lumOff val="35000"/>
+                  </a:schemeClr>
+                </a:solidFill>
+                <a:latin typeface="Microsoft JhengHei Light" panose="020B0304030504040204" pitchFamily="34" charset="-120"/>
+                <a:ea typeface="Microsoft JhengHei Light" panose="020B0304030504040204" pitchFamily="34" charset="-120"/>
                 <a:cs typeface="Arial" panose="020B0604020202020204" pitchFamily="34" charset="0"/>
               </a:rPr>
-              <a:t>: CMS </a:t>
+              <a:t>: FEET</a:t>
             </a:r>
             <a:br>
               <a:rPr lang="en-US" sz="1400" baseline="30000" dirty="0">
-                <a:latin typeface="Arial" panose="020B0604020202020204" pitchFamily="34" charset="0"/>
+                <a:solidFill>
+                  <a:schemeClr val="tx1">
+                    <a:lumMod val="65000"/>
+                    <a:lumOff val="35000"/>
+                  </a:schemeClr>
+                </a:solidFill>
+                <a:latin typeface="Microsoft JhengHei Light" panose="020B0304030504040204" pitchFamily="34" charset="-120"/>
+                <a:ea typeface="Microsoft JhengHei Light" panose="020B0304030504040204" pitchFamily="34" charset="-120"/>
                 <a:cs typeface="Arial" panose="020B0604020202020204" pitchFamily="34" charset="0"/>
               </a:rPr>
             </a:br>
             <a:r>
               <a:rPr lang="en-US" sz="1400" baseline="30000" dirty="0">
-                <a:latin typeface="Arial" panose="020B0604020202020204" pitchFamily="34" charset="0"/>
+                <a:solidFill>
+                  <a:schemeClr val="tx1">
+                    <a:lumMod val="65000"/>
+                    <a:lumOff val="35000"/>
+                  </a:schemeClr>
+                </a:solidFill>
+                <a:latin typeface="Microsoft JhengHei Light" panose="020B0304030504040204" pitchFamily="34" charset="-120"/>
+                <a:ea typeface="Microsoft JhengHei Light" panose="020B0304030504040204" pitchFamily="34" charset="-120"/>
                 <a:cs typeface="Arial" panose="020B0604020202020204" pitchFamily="34" charset="0"/>
               </a:rPr>
-              <a:t>: RCT</a:t>
+              <a:t>: RCT </a:t>
             </a:r>
             <a:br>
               <a:rPr lang="en-US" sz="1400" baseline="30000" dirty="0">
-                <a:latin typeface="Arial" panose="020B0604020202020204" pitchFamily="34" charset="0"/>
+                <a:solidFill>
+                  <a:schemeClr val="tx1">
+                    <a:lumMod val="65000"/>
+                    <a:lumOff val="35000"/>
+                  </a:schemeClr>
+                </a:solidFill>
+                <a:latin typeface="Microsoft JhengHei Light" panose="020B0304030504040204" pitchFamily="34" charset="-120"/>
+                <a:ea typeface="Microsoft JhengHei Light" panose="020B0304030504040204" pitchFamily="34" charset="-120"/>
                 <a:cs typeface="Arial" panose="020B0604020202020204" pitchFamily="34" charset="0"/>
               </a:rPr>
             </a:br>
             <a:r>
               <a:rPr lang="en-US" sz="1400" baseline="30000" dirty="0">
-                <a:latin typeface="Arial" panose="020B0604020202020204" pitchFamily="34" charset="0"/>
+                <a:solidFill>
+                  <a:schemeClr val="tx1">
+                    <a:lumMod val="65000"/>
+                    <a:lumOff val="35000"/>
+                  </a:schemeClr>
+                </a:solidFill>
+                <a:latin typeface="Microsoft JhengHei Light" panose="020B0304030504040204" pitchFamily="34" charset="-120"/>
+                <a:ea typeface="Microsoft JhengHei Light" panose="020B0304030504040204" pitchFamily="34" charset="-120"/>
                 <a:cs typeface="Arial" panose="020B0604020202020204" pitchFamily="34" charset="0"/>
               </a:rPr>
-              <a:t>: Hand Knotted 11/11 </a:t>
+              <a:t>: Hand Knotted 14/14 MS PS </a:t>
             </a:r>
             <a:br>
               <a:rPr lang="en-US" sz="1400" baseline="30000" dirty="0">
-                <a:latin typeface="Arial" panose="020B0604020202020204" pitchFamily="34" charset="0"/>
+                <a:solidFill>
+                  <a:schemeClr val="tx1">
+                    <a:lumMod val="65000"/>
+                    <a:lumOff val="35000"/>
+                  </a:schemeClr>
+                </a:solidFill>
+                <a:latin typeface="Microsoft JhengHei Light" panose="020B0304030504040204" pitchFamily="34" charset="-120"/>
+                <a:ea typeface="Microsoft JhengHei Light" panose="020B0304030504040204" pitchFamily="34" charset="-120"/>
                 <a:cs typeface="Arial" panose="020B0604020202020204" pitchFamily="34" charset="0"/>
               </a:rPr>
             </a:br>
             <a:r>
               <a:rPr lang="en-US" sz="1400" baseline="30000" dirty="0">
-                <a:latin typeface="Arial" panose="020B0604020202020204" pitchFamily="34" charset="0"/>
+                <a:solidFill>
+                  <a:schemeClr val="tx1">
+                    <a:lumMod val="65000"/>
+                    <a:lumOff val="35000"/>
+                  </a:schemeClr>
+                </a:solidFill>
+                <a:latin typeface="Microsoft JhengHei Light" panose="020B0304030504040204" pitchFamily="34" charset="-120"/>
+                <a:ea typeface="Microsoft JhengHei Light" panose="020B0304030504040204" pitchFamily="34" charset="-120"/>
                 <a:cs typeface="Arial" panose="020B0604020202020204" pitchFamily="34" charset="0"/>
               </a:rPr>
-              <a:t>: Silk &amp; NZ Wool </a:t>
+              <a:t>: Silk</a:t>
             </a:r>
             <a:br>
               <a:rPr lang="en-US" sz="1400" baseline="30000" dirty="0">
-                <a:latin typeface="Arial" panose="020B0604020202020204" pitchFamily="34" charset="0"/>
+                <a:solidFill>
+                  <a:schemeClr val="tx1">
+                    <a:lumMod val="65000"/>
+                    <a:lumOff val="35000"/>
+                  </a:schemeClr>
+                </a:solidFill>
+                <a:latin typeface="Microsoft JhengHei Light" panose="020B0304030504040204" pitchFamily="34" charset="-120"/>
+                <a:ea typeface="Microsoft JhengHei Light" panose="020B0304030504040204" pitchFamily="34" charset="-120"/>
                 <a:cs typeface="Arial" panose="020B0604020202020204" pitchFamily="34" charset="0"/>
               </a:rPr>
             </a:br>
             <a:r>
               <a:rPr lang="en-US" sz="1400" baseline="30000" dirty="0">
-                <a:latin typeface="Arial" panose="020B0604020202020204" pitchFamily="34" charset="0"/>
+                <a:solidFill>
+                  <a:schemeClr val="tx1">
+                    <a:lumMod val="65000"/>
+                    <a:lumOff val="35000"/>
+                  </a:schemeClr>
+                </a:solidFill>
+                <a:latin typeface="Microsoft JhengHei Light" panose="020B0304030504040204" pitchFamily="34" charset="-120"/>
+                <a:ea typeface="Microsoft JhengHei Light" panose="020B0304030504040204" pitchFamily="34" charset="-120"/>
                 <a:cs typeface="Arial" panose="020B0604020202020204" pitchFamily="34" charset="0"/>
               </a:rPr>
               <a:t>: </a:t>
             </a:r>
             <a:r>
-              <a:rPr lang="en-US" sz="1400" b="0" i="0" u="none" strike="noStrike" baseline="30000" dirty="0">
-                <a:latin typeface="Arial" panose="020B0604020202020204" pitchFamily="34" charset="0"/>
+              <a:rPr lang="en-US" sz="1400" i="0" u="none" strike="noStrike" baseline="30000" dirty="0">
+                <a:solidFill>
+                  <a:schemeClr val="tx1">
+                    <a:lumMod val="65000"/>
+                    <a:lumOff val="35000"/>
+                  </a:schemeClr>
+                </a:solidFill>
+                <a:latin typeface="Microsoft JhengHei Light" panose="020B0304030504040204" pitchFamily="34" charset="-120"/>
+                <a:ea typeface="Microsoft JhengHei Light" panose="020B0304030504040204" pitchFamily="34" charset="-120"/>
                 <a:cs typeface="Arial" panose="020B0604020202020204" pitchFamily="34" charset="0"/>
               </a:rPr>
               <a:t>Standard</a:t>
             </a:r>
           </a:p>
           <a:p>
-            <a:pPr marR="0" algn="l" rtl="0"/>
-            <a:r>
-              <a:rPr lang="en-US" sz="1400" b="0" i="0" u="none" strike="noStrike" baseline="30000" dirty="0">
-                <a:latin typeface="Arial" panose="020B0604020202020204" pitchFamily="34" charset="0"/>
+            <a:pPr marR="0" algn="l" rtl="0">
+              <a:lnSpc>
+                <a:spcPts val="1300"/>
+              </a:lnSpc>
+            </a:pPr>
+            <a:r>
+              <a:rPr lang="en-US" sz="1400" i="0" u="none" strike="noStrike" baseline="30000" dirty="0">
+                <a:solidFill>
+                  <a:schemeClr val="tx1">
+                    <a:lumMod val="65000"/>
+                    <a:lumOff val="35000"/>
+                  </a:schemeClr>
+                </a:solidFill>
+                <a:latin typeface="Microsoft JhengHei Light" panose="020B0304030504040204" pitchFamily="34" charset="-120"/>
+                <a:ea typeface="Microsoft JhengHei Light" panose="020B0304030504040204" pitchFamily="34" charset="-120"/>
                 <a:cs typeface="Arial" panose="020B0604020202020204" pitchFamily="34" charset="0"/>
               </a:rPr>
               <a:t>: 4 side binding </a:t>
             </a:r>
           </a:p>
           <a:p>
-            <a:pPr marR="0" algn="l" rtl="0"/>
+            <a:pPr marR="0" algn="l" rtl="0">
+              <a:lnSpc>
+                <a:spcPts val="1300"/>
+              </a:lnSpc>
+            </a:pPr>
             <a:r>
               <a:rPr lang="en-US" sz="1400" baseline="30000" dirty="0">
-                <a:latin typeface="Arial" panose="020B0604020202020204" pitchFamily="34" charset="0"/>
+                <a:solidFill>
+                  <a:schemeClr val="tx1">
+                    <a:lumMod val="65000"/>
+                    <a:lumOff val="35000"/>
+                  </a:schemeClr>
+                </a:solidFill>
+                <a:latin typeface="Microsoft JhengHei Light" panose="020B0304030504040204" pitchFamily="34" charset="-120"/>
+                <a:ea typeface="Microsoft JhengHei Light" panose="020B0304030504040204" pitchFamily="34" charset="-120"/>
                 <a:cs typeface="Arial" panose="020B0604020202020204" pitchFamily="34" charset="0"/>
               </a:rPr>
               <a:t>: Standard</a:t>
             </a:r>
-            <a:endParaRPr lang="en-US" sz="1400" b="0" i="0" u="none" strike="noStrike" baseline="30000" dirty="0">
-              <a:latin typeface="Arial" panose="020B0604020202020204" pitchFamily="34" charset="0"/>
+            <a:endParaRPr lang="en-US" sz="1400" i="0" u="none" strike="noStrike" baseline="30000" dirty="0">
+              <a:solidFill>
+                <a:schemeClr val="tx1">
+                  <a:lumMod val="65000"/>
+                  <a:lumOff val="35000"/>
+                </a:schemeClr>
+              </a:solidFill>
+              <a:latin typeface="Microsoft JhengHei Light" panose="020B0304030504040204" pitchFamily="34" charset="-120"/>
+              <a:ea typeface="Microsoft JhengHei Light" panose="020B0304030504040204" pitchFamily="34" charset="-120"/>
               <a:cs typeface="Arial" panose="020B0604020202020204" pitchFamily="34" charset="0"/>
             </a:endParaRPr>
           </a:p>
           <a:p>
-            <a:pPr marR="0" algn="l" rtl="0"/>
-            <a:r>
-              <a:rPr lang="en-US" sz="1400" b="0" i="0" u="none" strike="noStrike" baseline="30000" dirty="0">
-                <a:latin typeface="Arial" panose="020B0604020202020204" pitchFamily="34" charset="0"/>
+            <a:pPr marR="0" algn="l" rtl="0">
+              <a:lnSpc>
+                <a:spcPts val="1300"/>
+              </a:lnSpc>
+            </a:pPr>
+            <a:r>
+              <a:rPr lang="en-US" sz="1400" i="0" u="none" strike="noStrike" baseline="30000" dirty="0">
+                <a:solidFill>
+                  <a:schemeClr val="tx1">
+                    <a:lumMod val="65000"/>
+                    <a:lumOff val="35000"/>
+                  </a:schemeClr>
+                </a:solidFill>
+                <a:latin typeface="Microsoft JhengHei Light" panose="020B0304030504040204" pitchFamily="34" charset="-120"/>
+                <a:ea typeface="Microsoft JhengHei Light" panose="020B0304030504040204" pitchFamily="34" charset="-120"/>
                 <a:cs typeface="Arial" panose="020B0604020202020204" pitchFamily="34" charset="0"/>
               </a:rPr>
               <a:t>: Cut Pile</a:t>
             </a:r>
             <a:br>
               <a:rPr lang="en-US" sz="1400" baseline="30000" dirty="0">
-                <a:latin typeface="Arial" panose="020B0604020202020204" pitchFamily="34" charset="0"/>
+                <a:solidFill>
+                  <a:schemeClr val="tx1">
+                    <a:lumMod val="65000"/>
+                    <a:lumOff val="35000"/>
+                  </a:schemeClr>
+                </a:solidFill>
+                <a:latin typeface="Microsoft JhengHei Light" panose="020B0304030504040204" pitchFamily="34" charset="-120"/>
+                <a:ea typeface="Microsoft JhengHei Light" panose="020B0304030504040204" pitchFamily="34" charset="-120"/>
                 <a:cs typeface="Arial" panose="020B0604020202020204" pitchFamily="34" charset="0"/>
               </a:rPr>
             </a:br>
             <a:r>
               <a:rPr lang="en-US" sz="1400" baseline="30000" dirty="0">
-                <a:latin typeface="Arial" panose="020B0604020202020204" pitchFamily="34" charset="0"/>
+                <a:solidFill>
+                  <a:schemeClr val="tx1">
+                    <a:lumMod val="65000"/>
+                    <a:lumOff val="35000"/>
+                  </a:schemeClr>
+                </a:solidFill>
+                <a:latin typeface="Microsoft JhengHei Light" panose="020B0304030504040204" pitchFamily="34" charset="-120"/>
+                <a:ea typeface="Microsoft JhengHei Light" panose="020B0304030504040204" pitchFamily="34" charset="-120"/>
                 <a:cs typeface="Arial" panose="020B0604020202020204" pitchFamily="34" charset="0"/>
               </a:rPr>
-              <a:t>: No </a:t>
-            </a:r>
-            <a:r>
-              <a:rPr lang="en-US" sz="1400" b="0" i="0" u="none" strike="noStrike" baseline="30000" dirty="0">
-                <a:latin typeface="Arial" panose="020B0604020202020204" pitchFamily="34" charset="0"/>
+              <a:t>: NO </a:t>
+            </a:r>
+            <a:r>
+              <a:rPr lang="en-US" sz="1400" i="0" u="none" strike="noStrike" baseline="30000" dirty="0">
+                <a:solidFill>
+                  <a:schemeClr val="tx1">
+                    <a:lumMod val="65000"/>
+                    <a:lumOff val="35000"/>
+                  </a:schemeClr>
+                </a:solidFill>
+                <a:latin typeface="Microsoft JhengHei Light" panose="020B0304030504040204" pitchFamily="34" charset="-120"/>
+                <a:ea typeface="Microsoft JhengHei Light" panose="020B0304030504040204" pitchFamily="34" charset="-120"/>
                 <a:cs typeface="Arial" panose="020B0604020202020204" pitchFamily="34" charset="0"/>
               </a:rPr>
               <a:t>Backing </a:t>
             </a:r>
           </a:p>
           <a:p>
-            <a:pPr marR="0" algn="l" rtl="0"/>
-            <a:r>
-              <a:rPr lang="en-US" sz="1400" b="0" i="0" u="none" strike="noStrike" baseline="30000" dirty="0">
-                <a:latin typeface="Arial" panose="020B0604020202020204" pitchFamily="34" charset="0"/>
+            <a:pPr marR="0" algn="l" rtl="0">
+              <a:lnSpc>
+                <a:spcPts val="1300"/>
+              </a:lnSpc>
+            </a:pPr>
+            <a:r>
+              <a:rPr lang="en-US" sz="1400" i="0" u="none" strike="noStrike" baseline="30000" dirty="0">
+                <a:solidFill>
+                  <a:schemeClr val="tx1">
+                    <a:lumMod val="65000"/>
+                    <a:lumOff val="35000"/>
+                  </a:schemeClr>
+                </a:solidFill>
+                <a:latin typeface="Microsoft JhengHei Light" panose="020B0304030504040204" pitchFamily="34" charset="-120"/>
+                <a:ea typeface="Microsoft JhengHei Light" panose="020B0304030504040204" pitchFamily="34" charset="-120"/>
                 <a:cs typeface="Arial" panose="020B0604020202020204" pitchFamily="34" charset="0"/>
               </a:rPr>
               <a:t>: Standard</a:t>
@@ -4248,7 +4644,7 @@
           <p:cNvPr id="5" name="Picture 4">
             <a:extLst>
               <a:ext uri="{FF2B5EF4-FFF2-40B4-BE49-F238E27FC236}">
-                <a16:creationId xmlns:a16="http://schemas.microsoft.com/office/drawing/2014/main" id="{C334F198-D384-A917-C7B1-6487B42E2BF7}"/>
+                <a16:creationId xmlns:a16="http://schemas.microsoft.com/office/drawing/2014/main" id="{7888C10A-1D46-1C64-F8B4-A19FE22715A5}"/>
               </a:ext>
             </a:extLst>
           </p:cNvPr>
@@ -4258,7 +4654,7 @@
           <p:nvPr/>
         </p:nvPicPr>
         <p:blipFill rotWithShape="1">
-          <a:blip r:embed="rId3">
+          <a:blip r:embed="rId4">
             <a:extLst>
               <a:ext uri="{28A0092B-C50C-407E-A947-70E740481C1C}">
                 <a14:useLocalDpi xmlns:a14="http://schemas.microsoft.com/office/drawing/2010/main" val="0"/>
@@ -4271,7 +4667,7 @@
         <p:spPr>
           <a:xfrm>
             <a:off x="272504" y="206421"/>
-            <a:ext cx="1977655" cy="303711"/>
+            <a:ext cx="2008477" cy="308444"/>
           </a:xfrm>
           <a:prstGeom prst="rect">
             <a:avLst/>
@@ -4283,7 +4679,7 @@
           <p:cNvPr id="36" name="Straight Connector 35">
             <a:extLst>
               <a:ext uri="{FF2B5EF4-FFF2-40B4-BE49-F238E27FC236}">
-                <a16:creationId xmlns:a16="http://schemas.microsoft.com/office/drawing/2014/main" id="{A5359B23-35DC-36B6-19D9-A3340D44DF61}"/>
+                <a16:creationId xmlns:a16="http://schemas.microsoft.com/office/drawing/2014/main" id="{30CD1004-2156-FA15-CFE2-B20B44A116D6}"/>
               </a:ext>
             </a:extLst>
           </p:cNvPr>
@@ -4326,7 +4722,7 @@
           <p:cNvPr id="37" name="TextBox 36">
             <a:extLst>
               <a:ext uri="{FF2B5EF4-FFF2-40B4-BE49-F238E27FC236}">
-                <a16:creationId xmlns:a16="http://schemas.microsoft.com/office/drawing/2014/main" id="{372980F0-E12E-EDC9-8464-F0376A337D7E}"/>
+                <a16:creationId xmlns:a16="http://schemas.microsoft.com/office/drawing/2014/main" id="{BD7E49F9-D4C4-A437-D900-FFB90511D1E0}"/>
               </a:ext>
             </a:extLst>
           </p:cNvPr>
@@ -4336,7 +4732,7 @@
         <p:spPr>
           <a:xfrm>
             <a:off x="243953" y="775433"/>
-            <a:ext cx="4804071" cy="230832"/>
+            <a:ext cx="5659821" cy="400110"/>
           </a:xfrm>
           <a:prstGeom prst="rect">
             <a:avLst/>
@@ -4350,7 +4746,7 @@
           <a:lstStyle/>
           <a:p>
             <a:r>
-              <a:rPr lang="en-US" sz="900" b="1" u="sng">
+              <a:rPr lang="en-US" sz="1000" b="1" u="sng" dirty="0">
                 <a:solidFill>
                   <a:srgbClr val="C00000"/>
                 </a:solidFill>
@@ -4358,16 +4754,21 @@
                 <a:ea typeface="Microsoft JhengHei" panose="020B0604030504040204" pitchFamily="34" charset="-120"/>
                 <a:cs typeface="Arial" panose="020B0604020202020204" pitchFamily="34" charset="0"/>
               </a:rPr>
-              <a:t>PD-12926-ND</a:t>
-            </a:r>
-            <a:endParaRPr lang="en-US" sz="900" b="1" u="sng" dirty="0">
-              <a:solidFill>
-                <a:srgbClr val="C00000"/>
-              </a:solidFill>
-              <a:latin typeface="Microsoft JhengHei" panose="020B0604030504040204" pitchFamily="34" charset="-120"/>
-              <a:ea typeface="Microsoft JhengHei" panose="020B0604030504040204" pitchFamily="34" charset="-120"/>
-              <a:cs typeface="Arial" panose="020B0604020202020204" pitchFamily="34" charset="0"/>
-            </a:endParaRPr>
+              <a:t>PD-14229-ASL-05 Apple Green 0201-15 Gold Brown 0502-15-Revision</a:t>
+            </a:r>
+          </a:p>
+          <a:p>
+            <a:r>
+              <a:rPr lang="en-US" sz="1000" b="1" u="sng" dirty="0">
+                <a:solidFill>
+                  <a:srgbClr val="C00000"/>
+                </a:solidFill>
+                <a:latin typeface="Microsoft JhengHei" panose="020B0604030504040204" pitchFamily="34" charset="-120"/>
+                <a:ea typeface="Microsoft JhengHei" panose="020B0604030504040204" pitchFamily="34" charset="-120"/>
+                <a:cs typeface="Arial" panose="020B0604020202020204" pitchFamily="34" charset="0"/>
+              </a:rPr>
+              <a:t>Option-1</a:t>
+            </a:r>
           </a:p>
         </p:txBody>
       </p:sp>
@@ -4376,7 +4777,7 @@
           <p:cNvPr id="38" name="TextBox 37">
             <a:extLst>
               <a:ext uri="{FF2B5EF4-FFF2-40B4-BE49-F238E27FC236}">
-                <a16:creationId xmlns:a16="http://schemas.microsoft.com/office/drawing/2014/main" id="{A2822D69-FCEE-3AE7-DD69-488445954DDD}"/>
+                <a16:creationId xmlns:a16="http://schemas.microsoft.com/office/drawing/2014/main" id="{8BF37D16-C8FE-AC90-45CF-953F47E1B060}"/>
               </a:ext>
             </a:extLst>
           </p:cNvPr>
@@ -4386,7 +4787,7 @@
         <p:spPr>
           <a:xfrm>
             <a:off x="243953" y="522581"/>
-            <a:ext cx="4479052" cy="276999"/>
+            <a:ext cx="4479052" cy="307777"/>
           </a:xfrm>
           <a:prstGeom prst="rect">
             <a:avLst/>
@@ -4400,7 +4801,7 @@
           <a:lstStyle/>
           <a:p>
             <a:r>
-              <a:rPr lang="en-US" sz="1200" b="1" u="sng" dirty="0">
+              <a:rPr lang="en-US" sz="1400" b="1" u="sng" dirty="0">
                 <a:solidFill>
                   <a:schemeClr val="tx1">
                     <a:lumMod val="50000"/>
@@ -4410,17 +4811,17 @@
                 <a:latin typeface="Microsoft JhengHei Light" panose="020B0304030504040204" pitchFamily="34" charset="-120"/>
                 <a:ea typeface="Microsoft JhengHei Light" panose="020B0304030504040204" pitchFamily="34" charset="-120"/>
               </a:rPr>
-              <a:t>Construction : Hand Knotted – 11/11</a:t>
-            </a:r>
-          </a:p>
-        </p:txBody>
-      </p:sp>
-      <p:sp>
-        <p:nvSpPr>
-          <p:cNvPr id="2" name="TextBox 1">
+              <a:t>Construction : Hand Knotted 14/14 MS PS</a:t>
+            </a:r>
+          </a:p>
+        </p:txBody>
+      </p:sp>
+      <p:sp>
+        <p:nvSpPr>
+          <p:cNvPr id="33" name="TextBox 32">
             <a:extLst>
               <a:ext uri="{FF2B5EF4-FFF2-40B4-BE49-F238E27FC236}">
-                <a16:creationId xmlns:a16="http://schemas.microsoft.com/office/drawing/2014/main" id="{440FF66E-38A1-1BCA-166C-72B5771755AF}"/>
+                <a16:creationId xmlns:a16="http://schemas.microsoft.com/office/drawing/2014/main" id="{0477C164-98A9-6AA4-7D81-6AABBF31DD3A}"/>
               </a:ext>
             </a:extLst>
           </p:cNvPr>
@@ -4428,41 +4829,463 @@
           <p:nvPr/>
         </p:nvSpPr>
         <p:spPr>
-          <a:xfrm>
-            <a:off x="5328536" y="1980765"/>
-            <a:ext cx="2457171" cy="265907"/>
+          <a:xfrm rot="16200000">
+            <a:off x="3785370" y="3803959"/>
+            <a:ext cx="1939846" cy="246221"/>
+          </a:xfrm>
+          <a:prstGeom prst="rect">
+            <a:avLst/>
+          </a:prstGeom>
+          <a:noFill/>
+        </p:spPr>
+        <p:txBody>
+          <a:bodyPr wrap="square" rtlCol="0">
+            <a:spAutoFit/>
+          </a:bodyPr>
+          <a:lstStyle/>
+          <a:p>
+            <a:r>
+              <a:rPr lang="en-US" sz="1000" dirty="0">
+                <a:solidFill>
+                  <a:schemeClr val="tx1">
+                    <a:lumMod val="65000"/>
+                    <a:lumOff val="35000"/>
+                  </a:schemeClr>
+                </a:solidFill>
+                <a:latin typeface="Microsoft JhengHei" panose="020B0604030504040204" pitchFamily="34" charset="-120"/>
+                <a:ea typeface="Microsoft JhengHei" panose="020B0604030504040204" pitchFamily="34" charset="-120"/>
+                <a:cs typeface="Arial" panose="020B0604020202020204" pitchFamily="34" charset="0"/>
+              </a:rPr>
+              <a:t>8’FEET</a:t>
+            </a:r>
+          </a:p>
+        </p:txBody>
+      </p:sp>
+      <p:sp>
+        <p:nvSpPr>
+          <p:cNvPr id="42" name="TextBox 41">
+            <a:extLst>
+              <a:ext uri="{FF2B5EF4-FFF2-40B4-BE49-F238E27FC236}">
+                <a16:creationId xmlns:a16="http://schemas.microsoft.com/office/drawing/2014/main" id="{E61157BD-3E97-E5E7-484C-9FDA9EDD8308}"/>
+              </a:ext>
+            </a:extLst>
+          </p:cNvPr>
+          <p:cNvSpPr txBox="1"/>
+          <p:nvPr/>
+        </p:nvSpPr>
+        <p:spPr>
+          <a:xfrm>
+            <a:off x="2398814" y="7367070"/>
+            <a:ext cx="1939846" cy="246221"/>
+          </a:xfrm>
+          <a:prstGeom prst="rect">
+            <a:avLst/>
+          </a:prstGeom>
+          <a:noFill/>
+        </p:spPr>
+        <p:txBody>
+          <a:bodyPr wrap="square" rtlCol="0">
+            <a:spAutoFit/>
+          </a:bodyPr>
+          <a:lstStyle/>
+          <a:p>
+            <a:r>
+              <a:rPr lang="en-US" sz="1000" dirty="0">
+                <a:solidFill>
+                  <a:schemeClr val="tx1">
+                    <a:lumMod val="65000"/>
+                    <a:lumOff val="35000"/>
+                  </a:schemeClr>
+                </a:solidFill>
+                <a:latin typeface="Microsoft JhengHei" panose="020B0604030504040204" pitchFamily="34" charset="-120"/>
+                <a:ea typeface="Microsoft JhengHei" panose="020B0604030504040204" pitchFamily="34" charset="-120"/>
+                <a:cs typeface="Arial" panose="020B0604020202020204" pitchFamily="34" charset="0"/>
+              </a:rPr>
+              <a:t>5’FEET</a:t>
+            </a:r>
+          </a:p>
+        </p:txBody>
+      </p:sp>
+      <p:sp>
+        <p:nvSpPr>
+          <p:cNvPr id="43" name="Rectangle 42">
+            <a:extLst>
+              <a:ext uri="{FF2B5EF4-FFF2-40B4-BE49-F238E27FC236}">
+                <a16:creationId xmlns:a16="http://schemas.microsoft.com/office/drawing/2014/main" id="{48632D9C-3A6C-9CB8-E21E-F766AE2986BB}"/>
+              </a:ext>
+            </a:extLst>
+          </p:cNvPr>
+          <p:cNvSpPr/>
+          <p:nvPr/>
+        </p:nvSpPr>
+        <p:spPr>
+          <a:xfrm>
+            <a:off x="3304674" y="10843918"/>
+            <a:ext cx="4129847" cy="824565"/>
+          </a:xfrm>
+          <a:prstGeom prst="rect">
+            <a:avLst/>
+          </a:prstGeom>
+          <a:noFill/>
+          <a:ln>
+            <a:solidFill>
+              <a:schemeClr val="tx1">
+                <a:lumMod val="50000"/>
+                <a:lumOff val="50000"/>
+              </a:schemeClr>
+            </a:solidFill>
+          </a:ln>
+        </p:spPr>
+        <p:style>
+          <a:lnRef idx="2">
+            <a:schemeClr val="accent1">
+              <a:shade val="15000"/>
+            </a:schemeClr>
+          </a:lnRef>
+          <a:fillRef idx="1">
+            <a:schemeClr val="accent1"/>
+          </a:fillRef>
+          <a:effectRef idx="0">
+            <a:schemeClr val="accent1"/>
+          </a:effectRef>
+          <a:fontRef idx="minor">
+            <a:schemeClr val="lt1"/>
+          </a:fontRef>
+        </p:style>
+        <p:txBody>
+          <a:bodyPr rtlCol="0" anchor="ctr"/>
+          <a:lstStyle/>
+          <a:p>
+            <a:pPr algn="ctr"/>
+            <a:endParaRPr lang="en-US">
+              <a:solidFill>
+                <a:schemeClr val="tx1">
+                  <a:lumMod val="65000"/>
+                  <a:lumOff val="35000"/>
+                </a:schemeClr>
+              </a:solidFill>
+            </a:endParaRPr>
+          </a:p>
+        </p:txBody>
+      </p:sp>
+      <p:sp>
+        <p:nvSpPr>
+          <p:cNvPr id="44" name="TextBox 43">
+            <a:extLst>
+              <a:ext uri="{FF2B5EF4-FFF2-40B4-BE49-F238E27FC236}">
+                <a16:creationId xmlns:a16="http://schemas.microsoft.com/office/drawing/2014/main" id="{D43BE813-9FA2-159C-8F5C-69E11782D78E}"/>
+              </a:ext>
+            </a:extLst>
+          </p:cNvPr>
+          <p:cNvSpPr txBox="1"/>
+          <p:nvPr/>
+        </p:nvSpPr>
+        <p:spPr>
+          <a:xfrm>
+            <a:off x="3250904" y="10568810"/>
+            <a:ext cx="3750500" cy="246221"/>
+          </a:xfrm>
+          <a:prstGeom prst="rect">
+            <a:avLst/>
+          </a:prstGeom>
+          <a:noFill/>
+        </p:spPr>
+        <p:txBody>
+          <a:bodyPr wrap="square" rtlCol="0">
+            <a:spAutoFit/>
+          </a:bodyPr>
+          <a:lstStyle/>
+          <a:p>
+            <a:r>
+              <a:rPr lang="en-US" sz="1000" b="1" dirty="0">
+                <a:solidFill>
+                  <a:schemeClr val="tx1">
+                    <a:lumMod val="65000"/>
+                    <a:lumOff val="35000"/>
+                  </a:schemeClr>
+                </a:solidFill>
+                <a:latin typeface="Microsoft JhengHei Light" panose="020B0304030504040204" pitchFamily="34" charset="-120"/>
+                <a:ea typeface="Microsoft JhengHei Light" panose="020B0304030504040204" pitchFamily="34" charset="-120"/>
+              </a:rPr>
+              <a:t>Approval Box :-</a:t>
+            </a:r>
+          </a:p>
+        </p:txBody>
+      </p:sp>
+      <p:grpSp>
+        <p:nvGrpSpPr>
+          <p:cNvPr id="28" name="Group 27">
+            <a:extLst>
+              <a:ext uri="{FF2B5EF4-FFF2-40B4-BE49-F238E27FC236}">
+                <a16:creationId xmlns:a16="http://schemas.microsoft.com/office/drawing/2014/main" id="{38722D28-06C5-D59A-D036-96C65DE0F2DB}"/>
+              </a:ext>
+            </a:extLst>
+          </p:cNvPr>
+          <p:cNvGrpSpPr/>
+          <p:nvPr/>
+        </p:nvGrpSpPr>
+        <p:grpSpPr>
+          <a:xfrm>
+            <a:off x="5611362" y="7977051"/>
+            <a:ext cx="1923699" cy="1796084"/>
+            <a:chOff x="251699" y="2183122"/>
+            <a:chExt cx="4789373" cy="3867260"/>
+          </a:xfrm>
+        </p:grpSpPr>
+        <p:cxnSp>
+          <p:nvCxnSpPr>
+            <p:cNvPr id="29" name="Straight Arrow Connector 28">
+              <a:extLst>
+                <a:ext uri="{FF2B5EF4-FFF2-40B4-BE49-F238E27FC236}">
+                  <a16:creationId xmlns:a16="http://schemas.microsoft.com/office/drawing/2014/main" id="{D94C4F0F-A48A-F98D-D629-4C074D35B8C7}"/>
+                </a:ext>
+              </a:extLst>
+            </p:cNvPr>
+            <p:cNvCxnSpPr>
+              <a:cxnSpLocks/>
+            </p:cNvCxnSpPr>
+            <p:nvPr/>
+          </p:nvCxnSpPr>
+          <p:spPr>
+            <a:xfrm>
+              <a:off x="251699" y="6050382"/>
+              <a:ext cx="4684761" cy="0"/>
+            </a:xfrm>
+            <a:prstGeom prst="straightConnector1">
+              <a:avLst/>
+            </a:prstGeom>
+            <a:ln w="12700">
+              <a:solidFill>
+                <a:schemeClr val="tx1">
+                  <a:lumMod val="65000"/>
+                  <a:lumOff val="35000"/>
+                </a:schemeClr>
+              </a:solidFill>
+              <a:headEnd type="triangle"/>
+              <a:tailEnd type="triangle"/>
+            </a:ln>
+          </p:spPr>
+          <p:style>
+            <a:lnRef idx="1">
+              <a:schemeClr val="accent1"/>
+            </a:lnRef>
+            <a:fillRef idx="0">
+              <a:schemeClr val="accent1"/>
+            </a:fillRef>
+            <a:effectRef idx="0">
+              <a:schemeClr val="accent1"/>
+            </a:effectRef>
+            <a:fontRef idx="minor">
+              <a:schemeClr val="tx1"/>
+            </a:fontRef>
+          </p:style>
+        </p:cxnSp>
+        <p:cxnSp>
+          <p:nvCxnSpPr>
+            <p:cNvPr id="32" name="Straight Arrow Connector 31">
+              <a:extLst>
+                <a:ext uri="{FF2B5EF4-FFF2-40B4-BE49-F238E27FC236}">
+                  <a16:creationId xmlns:a16="http://schemas.microsoft.com/office/drawing/2014/main" id="{08ADAA08-53BC-2E46-92A9-FC05EDEAF0E5}"/>
+                </a:ext>
+              </a:extLst>
+            </p:cNvPr>
+            <p:cNvCxnSpPr>
+              <a:cxnSpLocks/>
+            </p:cNvCxnSpPr>
+            <p:nvPr/>
+          </p:nvCxnSpPr>
+          <p:spPr>
+            <a:xfrm flipH="1">
+              <a:off x="5023105" y="2183122"/>
+              <a:ext cx="17967" cy="3824646"/>
+            </a:xfrm>
+            <a:prstGeom prst="straightConnector1">
+              <a:avLst/>
+            </a:prstGeom>
+            <a:ln w="12700">
+              <a:solidFill>
+                <a:schemeClr val="tx1">
+                  <a:lumMod val="65000"/>
+                  <a:lumOff val="35000"/>
+                </a:schemeClr>
+              </a:solidFill>
+              <a:headEnd type="triangle"/>
+              <a:tailEnd type="triangle"/>
+            </a:ln>
+          </p:spPr>
+          <p:style>
+            <a:lnRef idx="1">
+              <a:schemeClr val="accent1"/>
+            </a:lnRef>
+            <a:fillRef idx="0">
+              <a:schemeClr val="accent1"/>
+            </a:fillRef>
+            <a:effectRef idx="0">
+              <a:schemeClr val="accent1"/>
+            </a:effectRef>
+            <a:fontRef idx="minor">
+              <a:schemeClr val="tx1"/>
+            </a:fontRef>
+          </p:style>
+        </p:cxnSp>
+      </p:grpSp>
+      <p:sp>
+        <p:nvSpPr>
+          <p:cNvPr id="34" name="TextBox 33">
+            <a:extLst>
+              <a:ext uri="{FF2B5EF4-FFF2-40B4-BE49-F238E27FC236}">
+                <a16:creationId xmlns:a16="http://schemas.microsoft.com/office/drawing/2014/main" id="{47FA400A-DC33-D9AE-7B2E-050FC44CA19C}"/>
+              </a:ext>
+            </a:extLst>
+          </p:cNvPr>
+          <p:cNvSpPr txBox="1"/>
+          <p:nvPr/>
+        </p:nvSpPr>
+        <p:spPr>
+          <a:xfrm rot="16200000">
+            <a:off x="6685378" y="8141762"/>
+            <a:ext cx="1939846" cy="246221"/>
+          </a:xfrm>
+          <a:prstGeom prst="rect">
+            <a:avLst/>
+          </a:prstGeom>
+          <a:noFill/>
+        </p:spPr>
+        <p:txBody>
+          <a:bodyPr wrap="square" rtlCol="0">
+            <a:spAutoFit/>
+          </a:bodyPr>
+          <a:lstStyle/>
+          <a:p>
+            <a:r>
+              <a:rPr lang="en-US" sz="1000" dirty="0">
+                <a:solidFill>
+                  <a:schemeClr val="tx1">
+                    <a:lumMod val="65000"/>
+                    <a:lumOff val="35000"/>
+                  </a:schemeClr>
+                </a:solidFill>
+                <a:latin typeface="Microsoft JhengHei" panose="020B0604030504040204" pitchFamily="34" charset="-120"/>
+                <a:ea typeface="Microsoft JhengHei" panose="020B0604030504040204" pitchFamily="34" charset="-120"/>
+                <a:cs typeface="Arial" panose="020B0604020202020204" pitchFamily="34" charset="0"/>
+              </a:rPr>
+              <a:t>45 CMS </a:t>
+            </a:r>
+          </a:p>
+        </p:txBody>
+      </p:sp>
+      <p:sp>
+        <p:nvSpPr>
+          <p:cNvPr id="35" name="TextBox 34">
+            <a:extLst>
+              <a:ext uri="{FF2B5EF4-FFF2-40B4-BE49-F238E27FC236}">
+                <a16:creationId xmlns:a16="http://schemas.microsoft.com/office/drawing/2014/main" id="{9312154D-28C6-3CD4-88E8-67CF5A16B039}"/>
+              </a:ext>
+            </a:extLst>
+          </p:cNvPr>
+          <p:cNvSpPr txBox="1"/>
+          <p:nvPr/>
+        </p:nvSpPr>
+        <p:spPr>
+          <a:xfrm>
+            <a:off x="6089898" y="9801579"/>
+            <a:ext cx="1939846" cy="246221"/>
+          </a:xfrm>
+          <a:prstGeom prst="rect">
+            <a:avLst/>
+          </a:prstGeom>
+          <a:noFill/>
+        </p:spPr>
+        <p:txBody>
+          <a:bodyPr wrap="square" rtlCol="0">
+            <a:spAutoFit/>
+          </a:bodyPr>
+          <a:lstStyle/>
+          <a:p>
+            <a:r>
+              <a:rPr lang="en-US" sz="1000" dirty="0">
+                <a:solidFill>
+                  <a:schemeClr val="tx1">
+                    <a:lumMod val="65000"/>
+                    <a:lumOff val="35000"/>
+                  </a:schemeClr>
+                </a:solidFill>
+                <a:latin typeface="Microsoft JhengHei" panose="020B0604030504040204" pitchFamily="34" charset="-120"/>
+                <a:ea typeface="Microsoft JhengHei" panose="020B0604030504040204" pitchFamily="34" charset="-120"/>
+                <a:cs typeface="Arial" panose="020B0604020202020204" pitchFamily="34" charset="0"/>
+              </a:rPr>
+              <a:t>45 CMS </a:t>
+            </a:r>
+          </a:p>
+        </p:txBody>
+      </p:sp>
+      <p:sp>
+        <p:nvSpPr>
+          <p:cNvPr id="4" name="TextBox 3">
+            <a:extLst>
+              <a:ext uri="{FF2B5EF4-FFF2-40B4-BE49-F238E27FC236}">
+                <a16:creationId xmlns:a16="http://schemas.microsoft.com/office/drawing/2014/main" id="{770E821E-2DC1-B62A-2ECE-1AF1B30E2E6C}"/>
+              </a:ext>
+            </a:extLst>
+          </p:cNvPr>
+          <p:cNvSpPr txBox="1"/>
+          <p:nvPr/>
+        </p:nvSpPr>
+        <p:spPr>
+          <a:xfrm>
+            <a:off x="5328536" y="4558543"/>
+            <a:ext cx="2457171" cy="235962"/>
           </a:xfrm>
           <a:prstGeom prst="rect">
             <a:avLst/>
           </a:prstGeom>
           <a:solidFill>
-            <a:srgbClr val="094680"/>
+            <a:srgbClr val="829697"/>
           </a:solidFill>
         </p:spPr>
         <p:txBody>
           <a:bodyPr wrap="square" rtlCol="0">
             <a:spAutoFit/>
           </a:bodyPr>
-          <a:lstStyle/>
-          <a:p>
-            <a:r>
-              <a:rPr lang="en-US" sz="1692" baseline="30000" dirty="0">
+          <a:lstStyle>
+            <a:defPPr>
+              <a:defRPr lang="en-US"/>
+            </a:defPPr>
+            <a:lvl1pPr>
+              <a:defRPr sz="1692" baseline="30000">
+                <a:latin typeface="Microsoft JhengHei" panose="020B0604030504040204" pitchFamily="34" charset="-120"/>
+                <a:ea typeface="Microsoft JhengHei" panose="020B0604030504040204" pitchFamily="34" charset="-120"/>
+              </a:defRPr>
+            </a:lvl1pPr>
+          </a:lstStyle>
+          <a:p>
+            <a:r>
+              <a:rPr lang="en-US" sz="1400" dirty="0">
                 <a:solidFill>
                   <a:schemeClr val="bg1"/>
                 </a:solidFill>
-                <a:latin typeface="Tw Cen MT" panose="020B0602020104020603" pitchFamily="34" charset="0"/>
-              </a:rPr>
-              <a:t>#2. Silk Wool Mix Ply </a:t>
-            </a:r>
-          </a:p>
-        </p:txBody>
-      </p:sp>
-      <p:sp>
-        <p:nvSpPr>
-          <p:cNvPr id="4" name="TextBox 3">
+              </a:rPr>
+              <a:t>#11. 1112</a:t>
+            </a:r>
+            <a:r>
+              <a:rPr lang="en-US" sz="1400" baseline="30000" dirty="0">
+                <a:solidFill>
+                  <a:schemeClr val="bg1"/>
+                </a:solidFill>
+                <a:latin typeface="Microsoft JhengHei" panose="020B0604030504040204" pitchFamily="34" charset="-120"/>
+                <a:ea typeface="Microsoft JhengHei" panose="020B0604030504040204" pitchFamily="34" charset="-120"/>
+              </a:rPr>
+              <a:t>- Silk Cut Pile</a:t>
+            </a:r>
+          </a:p>
+        </p:txBody>
+      </p:sp>
+      <p:sp>
+        <p:nvSpPr>
+          <p:cNvPr id="11" name="TextBox 10">
             <a:extLst>
               <a:ext uri="{FF2B5EF4-FFF2-40B4-BE49-F238E27FC236}">
-                <a16:creationId xmlns:a16="http://schemas.microsoft.com/office/drawing/2014/main" id="{3AD566B0-4E24-A172-CF5A-C4F9FA68B136}"/>
+                <a16:creationId xmlns:a16="http://schemas.microsoft.com/office/drawing/2014/main" id="{D9146DF7-2FD4-5BE5-22D4-6B3385EC556F}"/>
               </a:ext>
             </a:extLst>
           </p:cNvPr>
@@ -4471,14 +5294,14 @@
         </p:nvSpPr>
         <p:spPr>
           <a:xfrm>
-            <a:off x="5318071" y="1670291"/>
-            <a:ext cx="2457171" cy="265907"/>
+            <a:off x="5327219" y="4282203"/>
+            <a:ext cx="2457171" cy="235962"/>
           </a:xfrm>
           <a:prstGeom prst="rect">
             <a:avLst/>
           </a:prstGeom>
           <a:solidFill>
-            <a:srgbClr val="09255F"/>
+            <a:srgbClr val="914637"/>
           </a:solidFill>
         </p:spPr>
         <p:txBody>
@@ -4488,23 +5311,24 @@
           <a:lstStyle/>
           <a:p>
             <a:r>
-              <a:rPr lang="en-US" sz="1692" baseline="30000" dirty="0">
+              <a:rPr lang="en-US" sz="1400" baseline="30000" dirty="0">
                 <a:solidFill>
                   <a:schemeClr val="bg1"/>
                 </a:solidFill>
-                <a:latin typeface="Tw Cen MT" panose="020B0602020104020603" pitchFamily="34" charset="0"/>
-              </a:rPr>
-              <a:t>#1. Silk Wool Mix Ply </a:t>
-            </a:r>
-          </a:p>
-        </p:txBody>
-      </p:sp>
-      <p:sp>
-        <p:nvSpPr>
-          <p:cNvPr id="35" name="TextBox 34">
+                <a:latin typeface="Microsoft JhengHei" panose="020B0604030504040204" pitchFamily="34" charset="-120"/>
+                <a:ea typeface="Microsoft JhengHei" panose="020B0604030504040204" pitchFamily="34" charset="-120"/>
+              </a:rPr>
+              <a:t>#10. 607- Silk Cut Pile</a:t>
+            </a:r>
+          </a:p>
+        </p:txBody>
+      </p:sp>
+      <p:sp>
+        <p:nvSpPr>
+          <p:cNvPr id="27" name="TextBox 26">
             <a:extLst>
               <a:ext uri="{FF2B5EF4-FFF2-40B4-BE49-F238E27FC236}">
-                <a16:creationId xmlns:a16="http://schemas.microsoft.com/office/drawing/2014/main" id="{B970869D-1663-BDAD-72EB-FC7FD5699B38}"/>
+                <a16:creationId xmlns:a16="http://schemas.microsoft.com/office/drawing/2014/main" id="{8961FB35-9348-BE87-7A59-4B157AD100F8}"/>
               </a:ext>
             </a:extLst>
           </p:cNvPr>
@@ -4513,8 +5337,8 @@
         </p:nvSpPr>
         <p:spPr>
           <a:xfrm>
-            <a:off x="2380908" y="11071125"/>
-            <a:ext cx="2377054" cy="230832"/>
+            <a:off x="5368595" y="1337767"/>
+            <a:ext cx="2377054" cy="246221"/>
           </a:xfrm>
           <a:prstGeom prst="rect">
             <a:avLst/>
@@ -4529,28 +5353,28 @@
           <a:p>
             <a:pPr algn="ctr"/>
             <a:r>
-              <a:rPr lang="en-US" sz="900" dirty="0">
+              <a:rPr lang="en-US" sz="1000" dirty="0">
                 <a:solidFill>
                   <a:schemeClr val="bg1"/>
                 </a:solidFill>
                 <a:highlight>
                   <a:srgbClr val="000080"/>
                 </a:highlight>
-                <a:latin typeface="Arial" panose="020B0604020202020204" pitchFamily="34" charset="0"/>
-                <a:ea typeface="Microsoft Yi Baiti" panose="03000500000000000000" pitchFamily="66" charset="0"/>
+                <a:latin typeface="Microsoft JhengHei" panose="020B0604030504040204" pitchFamily="34" charset="-120"/>
+                <a:ea typeface="Microsoft JhengHei" panose="020B0604030504040204" pitchFamily="34" charset="-120"/>
                 <a:cs typeface="Arial" panose="020B0604020202020204" pitchFamily="34" charset="0"/>
               </a:rPr>
-              <a:t>Rug Image / Design Intent</a:t>
-            </a:r>
-          </a:p>
-        </p:txBody>
-      </p:sp>
-      <p:sp>
-        <p:nvSpPr>
-          <p:cNvPr id="46" name="TextBox 45">
+              <a:t>JRC +ARS  reference  </a:t>
+            </a:r>
+          </a:p>
+        </p:txBody>
+      </p:sp>
+      <p:sp>
+        <p:nvSpPr>
+          <p:cNvPr id="39" name="TextBox 38">
             <a:extLst>
               <a:ext uri="{FF2B5EF4-FFF2-40B4-BE49-F238E27FC236}">
-                <a16:creationId xmlns:a16="http://schemas.microsoft.com/office/drawing/2014/main" id="{FCCC239B-C7C2-CA98-DFA6-BE790371D4E7}"/>
+                <a16:creationId xmlns:a16="http://schemas.microsoft.com/office/drawing/2014/main" id="{DD723D9C-152D-0599-C5D1-5BAF01C7E051}"/>
               </a:ext>
             </a:extLst>
           </p:cNvPr>
@@ -4559,8 +5383,51 @@
         </p:nvSpPr>
         <p:spPr>
           <a:xfrm>
-            <a:off x="5161429" y="9458654"/>
-            <a:ext cx="1939846" cy="230832"/>
+            <a:off x="5332431" y="1736392"/>
+            <a:ext cx="2457171" cy="235962"/>
+          </a:xfrm>
+          <a:prstGeom prst="rect">
+            <a:avLst/>
+          </a:prstGeom>
+          <a:solidFill>
+            <a:srgbClr val="666666"/>
+          </a:solidFill>
+        </p:spPr>
+        <p:txBody>
+          <a:bodyPr wrap="square" rtlCol="0">
+            <a:spAutoFit/>
+          </a:bodyPr>
+          <a:lstStyle/>
+          <a:p>
+            <a:r>
+              <a:rPr lang="en-US" sz="1400" baseline="30000" dirty="0">
+                <a:solidFill>
+                  <a:schemeClr val="bg1"/>
+                </a:solidFill>
+                <a:latin typeface="Microsoft JhengHei" panose="020B0604030504040204" pitchFamily="34" charset="-120"/>
+                <a:ea typeface="Microsoft JhengHei" panose="020B0604030504040204" pitchFamily="34" charset="-120"/>
+              </a:rPr>
+              <a:t>#1. 194- Silk Cut Pile</a:t>
+            </a:r>
+          </a:p>
+        </p:txBody>
+      </p:sp>
+      <p:sp>
+        <p:nvSpPr>
+          <p:cNvPr id="48" name="TextBox 47">
+            <a:extLst>
+              <a:ext uri="{FF2B5EF4-FFF2-40B4-BE49-F238E27FC236}">
+                <a16:creationId xmlns:a16="http://schemas.microsoft.com/office/drawing/2014/main" id="{28DBE376-5310-F3EA-6E51-7E10B51E5042}"/>
+              </a:ext>
+            </a:extLst>
+          </p:cNvPr>
+          <p:cNvSpPr txBox="1"/>
+          <p:nvPr/>
+        </p:nvSpPr>
+        <p:spPr>
+          <a:xfrm>
+            <a:off x="5377443" y="7081433"/>
+            <a:ext cx="1939846" cy="246221"/>
           </a:xfrm>
           <a:prstGeom prst="rect">
             <a:avLst/>
@@ -4574,28 +5441,505 @@
           <a:lstStyle/>
           <a:p>
             <a:r>
-              <a:rPr lang="en-US" sz="900" b="1" u="sng" dirty="0">
+              <a:rPr lang="en-US" sz="1000" b="1" u="sng" dirty="0">
                 <a:solidFill>
                   <a:srgbClr val="C00000"/>
                 </a:solidFill>
+                <a:latin typeface="Microsoft JhengHei" panose="020B0604030504040204" pitchFamily="34" charset="-120"/>
+                <a:ea typeface="Microsoft JhengHei" panose="020B0604030504040204" pitchFamily="34" charset="-120"/>
+                <a:cs typeface="Arial" panose="020B0604020202020204" pitchFamily="34" charset="0"/>
+              </a:rPr>
+              <a:t>Pile height –7 MM -8 MM</a:t>
+            </a:r>
+          </a:p>
+        </p:txBody>
+      </p:sp>
+      <p:sp>
+        <p:nvSpPr>
+          <p:cNvPr id="50" name="TextBox 49">
+            <a:extLst>
+              <a:ext uri="{FF2B5EF4-FFF2-40B4-BE49-F238E27FC236}">
+                <a16:creationId xmlns:a16="http://schemas.microsoft.com/office/drawing/2014/main" id="{3D4C9C97-3D03-27B2-B526-160AA7B1CCB4}"/>
+              </a:ext>
+            </a:extLst>
+          </p:cNvPr>
+          <p:cNvSpPr txBox="1"/>
+          <p:nvPr/>
+        </p:nvSpPr>
+        <p:spPr>
+          <a:xfrm>
+            <a:off x="5333748" y="2012732"/>
+            <a:ext cx="2457171" cy="235962"/>
+          </a:xfrm>
+          <a:prstGeom prst="rect">
+            <a:avLst/>
+          </a:prstGeom>
+          <a:solidFill>
+            <a:srgbClr val="B8A982"/>
+          </a:solidFill>
+        </p:spPr>
+        <p:txBody>
+          <a:bodyPr wrap="square" rtlCol="0">
+            <a:spAutoFit/>
+          </a:bodyPr>
+          <a:lstStyle>
+            <a:defPPr>
+              <a:defRPr lang="en-US"/>
+            </a:defPPr>
+            <a:lvl1pPr>
+              <a:defRPr sz="1692" baseline="30000">
+                <a:latin typeface="Microsoft JhengHei" panose="020B0604030504040204" pitchFamily="34" charset="-120"/>
+                <a:ea typeface="Microsoft JhengHei" panose="020B0604030504040204" pitchFamily="34" charset="-120"/>
+              </a:defRPr>
+            </a:lvl1pPr>
+          </a:lstStyle>
+          <a:p>
+            <a:r>
+              <a:rPr lang="en-US" sz="1400" dirty="0">
+                <a:solidFill>
+                  <a:schemeClr val="bg1"/>
+                </a:solidFill>
+              </a:rPr>
+              <a:t>#2. 804</a:t>
+            </a:r>
+            <a:r>
+              <a:rPr lang="en-US" sz="1400" baseline="30000" dirty="0">
+                <a:solidFill>
+                  <a:schemeClr val="bg1"/>
+                </a:solidFill>
+                <a:latin typeface="Microsoft JhengHei" panose="020B0604030504040204" pitchFamily="34" charset="-120"/>
+                <a:ea typeface="Microsoft JhengHei" panose="020B0604030504040204" pitchFamily="34" charset="-120"/>
+              </a:rPr>
+              <a:t>- Silk Cut Pile</a:t>
+            </a:r>
+          </a:p>
+        </p:txBody>
+      </p:sp>
+      <p:sp>
+        <p:nvSpPr>
+          <p:cNvPr id="53" name="TextBox 52">
+            <a:extLst>
+              <a:ext uri="{FF2B5EF4-FFF2-40B4-BE49-F238E27FC236}">
+                <a16:creationId xmlns:a16="http://schemas.microsoft.com/office/drawing/2014/main" id="{6B729C32-916B-5BF2-6023-4B3A250F9936}"/>
+              </a:ext>
+            </a:extLst>
+          </p:cNvPr>
+          <p:cNvSpPr txBox="1"/>
+          <p:nvPr/>
+        </p:nvSpPr>
+        <p:spPr>
+          <a:xfrm>
+            <a:off x="5330692" y="2289230"/>
+            <a:ext cx="2457171" cy="235962"/>
+          </a:xfrm>
+          <a:prstGeom prst="rect">
+            <a:avLst/>
+          </a:prstGeom>
+          <a:solidFill>
+            <a:srgbClr val="C9C4B3"/>
+          </a:solidFill>
+        </p:spPr>
+        <p:txBody>
+          <a:bodyPr wrap="square" rtlCol="0">
+            <a:spAutoFit/>
+          </a:bodyPr>
+          <a:lstStyle/>
+          <a:p>
+            <a:r>
+              <a:rPr lang="en-US" sz="1400" baseline="30000" dirty="0">
+                <a:solidFill>
+                  <a:schemeClr val="bg1"/>
+                </a:solidFill>
+                <a:latin typeface="Microsoft JhengHei" panose="020B0604030504040204" pitchFamily="34" charset="-120"/>
+                <a:ea typeface="Microsoft JhengHei" panose="020B0604030504040204" pitchFamily="34" charset="-120"/>
+              </a:rPr>
+              <a:t>#3. 911- Silk Cut Pile</a:t>
+            </a:r>
+          </a:p>
+        </p:txBody>
+      </p:sp>
+      <p:sp>
+        <p:nvSpPr>
+          <p:cNvPr id="55" name="TextBox 54">
+            <a:extLst>
+              <a:ext uri="{FF2B5EF4-FFF2-40B4-BE49-F238E27FC236}">
+                <a16:creationId xmlns:a16="http://schemas.microsoft.com/office/drawing/2014/main" id="{19F7988E-6ADA-4EA3-6101-07AC9BCFE472}"/>
+              </a:ext>
+            </a:extLst>
+          </p:cNvPr>
+          <p:cNvSpPr txBox="1"/>
+          <p:nvPr/>
+        </p:nvSpPr>
+        <p:spPr>
+          <a:xfrm>
+            <a:off x="5332009" y="2576587"/>
+            <a:ext cx="2457171" cy="235962"/>
+          </a:xfrm>
+          <a:prstGeom prst="rect">
+            <a:avLst/>
+          </a:prstGeom>
+          <a:solidFill>
+            <a:srgbClr val="D1B369"/>
+          </a:solidFill>
+        </p:spPr>
+        <p:txBody>
+          <a:bodyPr wrap="square" rtlCol="0">
+            <a:spAutoFit/>
+          </a:bodyPr>
+          <a:lstStyle>
+            <a:defPPr>
+              <a:defRPr lang="en-US"/>
+            </a:defPPr>
+            <a:lvl1pPr>
+              <a:defRPr sz="1692" baseline="30000">
+                <a:latin typeface="Microsoft JhengHei" panose="020B0604030504040204" pitchFamily="34" charset="-120"/>
+                <a:ea typeface="Microsoft JhengHei" panose="020B0604030504040204" pitchFamily="34" charset="-120"/>
+              </a:defRPr>
+            </a:lvl1pPr>
+          </a:lstStyle>
+          <a:p>
+            <a:r>
+              <a:rPr lang="en-US" sz="1400" dirty="0">
+                <a:solidFill>
+                  <a:schemeClr val="bg1"/>
+                </a:solidFill>
+              </a:rPr>
+              <a:t>#4. 809</a:t>
+            </a:r>
+            <a:r>
+              <a:rPr lang="en-US" sz="1400" baseline="30000" dirty="0">
+                <a:solidFill>
+                  <a:schemeClr val="bg1"/>
+                </a:solidFill>
+                <a:latin typeface="Microsoft JhengHei" panose="020B0604030504040204" pitchFamily="34" charset="-120"/>
+                <a:ea typeface="Microsoft JhengHei" panose="020B0604030504040204" pitchFamily="34" charset="-120"/>
+              </a:rPr>
+              <a:t>- Silk Cut Pile</a:t>
+            </a:r>
+          </a:p>
+        </p:txBody>
+      </p:sp>
+      <p:sp>
+        <p:nvSpPr>
+          <p:cNvPr id="59" name="TextBox 58">
+            <a:extLst>
+              <a:ext uri="{FF2B5EF4-FFF2-40B4-BE49-F238E27FC236}">
+                <a16:creationId xmlns:a16="http://schemas.microsoft.com/office/drawing/2014/main" id="{BD57C06B-6512-1E55-A162-6F4374E5F7A6}"/>
+              </a:ext>
+            </a:extLst>
+          </p:cNvPr>
+          <p:cNvSpPr txBox="1"/>
+          <p:nvPr/>
+        </p:nvSpPr>
+        <p:spPr>
+          <a:xfrm>
+            <a:off x="5329234" y="2861954"/>
+            <a:ext cx="2457171" cy="235962"/>
+          </a:xfrm>
+          <a:prstGeom prst="rect">
+            <a:avLst/>
+          </a:prstGeom>
+          <a:solidFill>
+            <a:srgbClr val="B59143"/>
+          </a:solidFill>
+        </p:spPr>
+        <p:txBody>
+          <a:bodyPr wrap="square" rtlCol="0">
+            <a:spAutoFit/>
+          </a:bodyPr>
+          <a:lstStyle/>
+          <a:p>
+            <a:r>
+              <a:rPr lang="en-US" sz="1400" baseline="30000" dirty="0">
+                <a:solidFill>
+                  <a:schemeClr val="bg1"/>
+                </a:solidFill>
+                <a:latin typeface="Microsoft JhengHei" panose="020B0604030504040204" pitchFamily="34" charset="-120"/>
+                <a:ea typeface="Microsoft JhengHei" panose="020B0604030504040204" pitchFamily="34" charset="-120"/>
+              </a:rPr>
+              <a:t>#5. 754- Silk Cut Pile</a:t>
+            </a:r>
+          </a:p>
+        </p:txBody>
+      </p:sp>
+      <p:sp>
+        <p:nvSpPr>
+          <p:cNvPr id="61" name="TextBox 60">
+            <a:extLst>
+              <a:ext uri="{FF2B5EF4-FFF2-40B4-BE49-F238E27FC236}">
+                <a16:creationId xmlns:a16="http://schemas.microsoft.com/office/drawing/2014/main" id="{622671BA-277B-F483-C766-CC29059DF1BD}"/>
+              </a:ext>
+            </a:extLst>
+          </p:cNvPr>
+          <p:cNvSpPr txBox="1"/>
+          <p:nvPr/>
+        </p:nvSpPr>
+        <p:spPr>
+          <a:xfrm>
+            <a:off x="5330551" y="3149312"/>
+            <a:ext cx="2457171" cy="235962"/>
+          </a:xfrm>
+          <a:prstGeom prst="rect">
+            <a:avLst/>
+          </a:prstGeom>
+          <a:solidFill>
+            <a:srgbClr val="947A63"/>
+          </a:solidFill>
+        </p:spPr>
+        <p:txBody>
+          <a:bodyPr wrap="square" rtlCol="0">
+            <a:spAutoFit/>
+          </a:bodyPr>
+          <a:lstStyle>
+            <a:defPPr>
+              <a:defRPr lang="en-US"/>
+            </a:defPPr>
+            <a:lvl1pPr>
+              <a:defRPr sz="1692" baseline="30000">
+                <a:latin typeface="Microsoft JhengHei" panose="020B0604030504040204" pitchFamily="34" charset="-120"/>
+                <a:ea typeface="Microsoft JhengHei" panose="020B0604030504040204" pitchFamily="34" charset="-120"/>
+              </a:defRPr>
+            </a:lvl1pPr>
+          </a:lstStyle>
+          <a:p>
+            <a:r>
+              <a:rPr lang="en-US" sz="1400" dirty="0">
+                <a:solidFill>
+                  <a:schemeClr val="bg1"/>
+                </a:solidFill>
+              </a:rPr>
+              <a:t>#6. 511</a:t>
+            </a:r>
+            <a:r>
+              <a:rPr lang="en-US" sz="1400" baseline="30000" dirty="0">
+                <a:solidFill>
+                  <a:schemeClr val="bg1"/>
+                </a:solidFill>
+                <a:latin typeface="Microsoft JhengHei" panose="020B0604030504040204" pitchFamily="34" charset="-120"/>
+                <a:ea typeface="Microsoft JhengHei" panose="020B0604030504040204" pitchFamily="34" charset="-120"/>
+              </a:rPr>
+              <a:t>- Silk Cut Pile</a:t>
+            </a:r>
+          </a:p>
+        </p:txBody>
+      </p:sp>
+      <p:sp>
+        <p:nvSpPr>
+          <p:cNvPr id="63" name="TextBox 62">
+            <a:extLst>
+              <a:ext uri="{FF2B5EF4-FFF2-40B4-BE49-F238E27FC236}">
+                <a16:creationId xmlns:a16="http://schemas.microsoft.com/office/drawing/2014/main" id="{B7A7C7DD-B122-030D-3838-7450BED717B2}"/>
+              </a:ext>
+            </a:extLst>
+          </p:cNvPr>
+          <p:cNvSpPr txBox="1"/>
+          <p:nvPr/>
+        </p:nvSpPr>
+        <p:spPr>
+          <a:xfrm>
+            <a:off x="5327495" y="3436826"/>
+            <a:ext cx="2457171" cy="235962"/>
+          </a:xfrm>
+          <a:prstGeom prst="rect">
+            <a:avLst/>
+          </a:prstGeom>
+          <a:solidFill>
+            <a:srgbClr val="6E4B3C"/>
+          </a:solidFill>
+        </p:spPr>
+        <p:txBody>
+          <a:bodyPr wrap="square" rtlCol="0">
+            <a:spAutoFit/>
+          </a:bodyPr>
+          <a:lstStyle/>
+          <a:p>
+            <a:r>
+              <a:rPr lang="en-US" sz="1400" baseline="30000" dirty="0">
+                <a:solidFill>
+                  <a:schemeClr val="bg1"/>
+                </a:solidFill>
+                <a:latin typeface="Microsoft JhengHei" panose="020B0604030504040204" pitchFamily="34" charset="-120"/>
+                <a:ea typeface="Microsoft JhengHei" panose="020B0604030504040204" pitchFamily="34" charset="-120"/>
+              </a:rPr>
+              <a:t>#7. 510- Silk Cut Pile</a:t>
+            </a:r>
+          </a:p>
+        </p:txBody>
+      </p:sp>
+      <p:sp>
+        <p:nvSpPr>
+          <p:cNvPr id="65" name="TextBox 64">
+            <a:extLst>
+              <a:ext uri="{FF2B5EF4-FFF2-40B4-BE49-F238E27FC236}">
+                <a16:creationId xmlns:a16="http://schemas.microsoft.com/office/drawing/2014/main" id="{FA15CBDB-06A4-66F0-E351-5B7F2AB3CED2}"/>
+              </a:ext>
+            </a:extLst>
+          </p:cNvPr>
+          <p:cNvSpPr txBox="1"/>
+          <p:nvPr/>
+        </p:nvSpPr>
+        <p:spPr>
+          <a:xfrm>
+            <a:off x="5328812" y="3724183"/>
+            <a:ext cx="2457171" cy="235962"/>
+          </a:xfrm>
+          <a:prstGeom prst="rect">
+            <a:avLst/>
+          </a:prstGeom>
+          <a:solidFill>
+            <a:srgbClr val="BC8874"/>
+          </a:solidFill>
+        </p:spPr>
+        <p:txBody>
+          <a:bodyPr wrap="square" rtlCol="0">
+            <a:spAutoFit/>
+          </a:bodyPr>
+          <a:lstStyle>
+            <a:defPPr>
+              <a:defRPr lang="en-US"/>
+            </a:defPPr>
+            <a:lvl1pPr>
+              <a:defRPr sz="1692" baseline="30000">
+                <a:latin typeface="Microsoft JhengHei" panose="020B0604030504040204" pitchFamily="34" charset="-120"/>
+                <a:ea typeface="Microsoft JhengHei" panose="020B0604030504040204" pitchFamily="34" charset="-120"/>
+              </a:defRPr>
+            </a:lvl1pPr>
+          </a:lstStyle>
+          <a:p>
+            <a:r>
+              <a:rPr lang="en-US" sz="1400" dirty="0">
+                <a:solidFill>
+                  <a:schemeClr val="bg1"/>
+                </a:solidFill>
+              </a:rPr>
+              <a:t>#8. 2652</a:t>
+            </a:r>
+            <a:r>
+              <a:rPr lang="en-US" sz="1400" baseline="30000" dirty="0">
+                <a:solidFill>
+                  <a:schemeClr val="bg1"/>
+                </a:solidFill>
+                <a:latin typeface="Microsoft JhengHei" panose="020B0604030504040204" pitchFamily="34" charset="-120"/>
+                <a:ea typeface="Microsoft JhengHei" panose="020B0604030504040204" pitchFamily="34" charset="-120"/>
+              </a:rPr>
+              <a:t>- Silk Cut Pile</a:t>
+            </a:r>
+          </a:p>
+        </p:txBody>
+      </p:sp>
+      <p:sp>
+        <p:nvSpPr>
+          <p:cNvPr id="67" name="TextBox 66">
+            <a:extLst>
+              <a:ext uri="{FF2B5EF4-FFF2-40B4-BE49-F238E27FC236}">
+                <a16:creationId xmlns:a16="http://schemas.microsoft.com/office/drawing/2014/main" id="{6029032F-E422-D58B-C0E7-00E1950F7BDD}"/>
+              </a:ext>
+            </a:extLst>
+          </p:cNvPr>
+          <p:cNvSpPr txBox="1"/>
+          <p:nvPr/>
+        </p:nvSpPr>
+        <p:spPr>
+          <a:xfrm>
+            <a:off x="5332269" y="4003049"/>
+            <a:ext cx="2457171" cy="235962"/>
+          </a:xfrm>
+          <a:prstGeom prst="rect">
+            <a:avLst/>
+          </a:prstGeom>
+          <a:solidFill>
+            <a:srgbClr val="A76350"/>
+          </a:solidFill>
+        </p:spPr>
+        <p:txBody>
+          <a:bodyPr wrap="square" rtlCol="0">
+            <a:spAutoFit/>
+          </a:bodyPr>
+          <a:lstStyle>
+            <a:defPPr>
+              <a:defRPr lang="en-US"/>
+            </a:defPPr>
+            <a:lvl1pPr>
+              <a:defRPr sz="1692" baseline="30000">
+                <a:latin typeface="Microsoft JhengHei" panose="020B0604030504040204" pitchFamily="34" charset="-120"/>
+                <a:ea typeface="Microsoft JhengHei" panose="020B0604030504040204" pitchFamily="34" charset="-120"/>
+              </a:defRPr>
+            </a:lvl1pPr>
+          </a:lstStyle>
+          <a:p>
+            <a:r>
+              <a:rPr lang="en-US" sz="1400" dirty="0">
+                <a:solidFill>
+                  <a:schemeClr val="bg1"/>
+                </a:solidFill>
+              </a:rPr>
+              <a:t>#9. 620</a:t>
+            </a:r>
+            <a:r>
+              <a:rPr lang="en-US" sz="1400" baseline="30000" dirty="0">
+                <a:solidFill>
+                  <a:schemeClr val="bg1"/>
+                </a:solidFill>
+                <a:latin typeface="Microsoft JhengHei" panose="020B0604030504040204" pitchFamily="34" charset="-120"/>
+                <a:ea typeface="Microsoft JhengHei" panose="020B0604030504040204" pitchFamily="34" charset="-120"/>
+              </a:rPr>
+              <a:t>- Silk Cut Pile</a:t>
+            </a:r>
+          </a:p>
+        </p:txBody>
+      </p:sp>
+      <p:sp>
+        <p:nvSpPr>
+          <p:cNvPr id="69" name="TextBox 68">
+            <a:extLst>
+              <a:ext uri="{FF2B5EF4-FFF2-40B4-BE49-F238E27FC236}">
+                <a16:creationId xmlns:a16="http://schemas.microsoft.com/office/drawing/2014/main" id="{48DF097D-FEDE-C645-7ECE-3CC054554450}"/>
+              </a:ext>
+            </a:extLst>
+          </p:cNvPr>
+          <p:cNvSpPr txBox="1"/>
+          <p:nvPr/>
+        </p:nvSpPr>
+        <p:spPr>
+          <a:xfrm>
+            <a:off x="3183308" y="7879459"/>
+            <a:ext cx="2377054" cy="230832"/>
+          </a:xfrm>
+          <a:prstGeom prst="rect">
+            <a:avLst/>
+          </a:prstGeom>
+          <a:noFill/>
+        </p:spPr>
+        <p:txBody>
+          <a:bodyPr wrap="square" rtlCol="0">
+            <a:spAutoFit/>
+          </a:bodyPr>
+          <a:lstStyle/>
+          <a:p>
+            <a:pPr algn="ctr"/>
+            <a:r>
+              <a:rPr lang="en-US" sz="900" dirty="0">
+                <a:solidFill>
+                  <a:schemeClr val="bg1"/>
+                </a:solidFill>
                 <a:highlight>
-                  <a:srgbClr val="E8E0D8"/>
+                  <a:srgbClr val="000080"/>
                 </a:highlight>
                 <a:latin typeface="Microsoft JhengHei" panose="020B0604030504040204" pitchFamily="34" charset="-120"/>
                 <a:ea typeface="Microsoft JhengHei" panose="020B0604030504040204" pitchFamily="34" charset="-120"/>
                 <a:cs typeface="Arial" panose="020B0604020202020204" pitchFamily="34" charset="0"/>
               </a:rPr>
-              <a:t>Pile Height – 7-8 MM </a:t>
-            </a:r>
-          </a:p>
-        </p:txBody>
-      </p:sp>
-      <p:sp>
-        <p:nvSpPr>
-          <p:cNvPr id="32" name="TextBox 31">
+              <a:t>Rug Image / Design Intent</a:t>
+            </a:r>
+          </a:p>
+        </p:txBody>
+      </p:sp>
+      <p:sp>
+        <p:nvSpPr>
+          <p:cNvPr id="2" name="TextBox 1">
             <a:extLst>
               <a:ext uri="{FF2B5EF4-FFF2-40B4-BE49-F238E27FC236}">
-                <a16:creationId xmlns:a16="http://schemas.microsoft.com/office/drawing/2014/main" id="{A9CDD6AD-0BC5-0C7A-8EF0-83827C3CC1FB}"/>
+                <a16:creationId xmlns:a16="http://schemas.microsoft.com/office/drawing/2014/main" id="{77D37A0D-1F5A-7C9E-DE76-B125102C5DA4}"/>
               </a:ext>
             </a:extLst>
           </p:cNvPr>
@@ -4604,8 +5948,8 @@
         </p:nvSpPr>
         <p:spPr>
           <a:xfrm>
-            <a:off x="5161429" y="687481"/>
-            <a:ext cx="2377055" cy="230832"/>
+            <a:off x="213386" y="10319944"/>
+            <a:ext cx="3037518" cy="1169551"/>
           </a:xfrm>
           <a:prstGeom prst="rect">
             <a:avLst/>
@@ -4618,9 +5962,8 @@
           </a:bodyPr>
           <a:lstStyle/>
           <a:p>
-            <a:pPr algn="r"/>
-            <a:r>
-              <a:rPr lang="en-US" sz="900" b="1" u="sng" dirty="0">
+            <a:r>
+              <a:rPr lang="en-US" sz="1000" b="1" u="sng" dirty="0">
                 <a:solidFill>
                   <a:srgbClr val="C00000"/>
                 </a:solidFill>
@@ -4628,144 +5971,17 @@
                 <a:ea typeface="Microsoft JhengHei" panose="020B0604030504040204" pitchFamily="34" charset="-120"/>
                 <a:cs typeface="Arial" panose="020B0604020202020204" pitchFamily="34" charset="0"/>
               </a:rPr>
-              <a:t>Sands Solution</a:t>
-            </a:r>
-          </a:p>
-        </p:txBody>
-      </p:sp>
-      <p:sp>
-        <p:nvSpPr>
-          <p:cNvPr id="33" name="TextBox 32">
-            <a:extLst>
-              <a:ext uri="{FF2B5EF4-FFF2-40B4-BE49-F238E27FC236}">
-                <a16:creationId xmlns:a16="http://schemas.microsoft.com/office/drawing/2014/main" id="{4D9ADF02-6C8B-C4F6-A02A-508D03408E73}"/>
-              </a:ext>
-            </a:extLst>
-          </p:cNvPr>
-          <p:cNvSpPr txBox="1"/>
-          <p:nvPr/>
-        </p:nvSpPr>
-        <p:spPr>
-          <a:xfrm rot="16200000">
-            <a:off x="4223145" y="3098021"/>
-            <a:ext cx="1939846" cy="230832"/>
-          </a:xfrm>
-          <a:prstGeom prst="rect">
-            <a:avLst/>
-          </a:prstGeom>
-          <a:noFill/>
-        </p:spPr>
-        <p:txBody>
-          <a:bodyPr wrap="square" rtlCol="0">
-            <a:spAutoFit/>
-          </a:bodyPr>
-          <a:lstStyle/>
-          <a:p>
-            <a:r>
-              <a:rPr lang="en-US" sz="900" dirty="0">
-                <a:solidFill>
-                  <a:schemeClr val="tx1">
-                    <a:lumMod val="65000"/>
-                    <a:lumOff val="35000"/>
-                  </a:schemeClr>
-                </a:solidFill>
-                <a:latin typeface="Microsoft JhengHei" panose="020B0604030504040204" pitchFamily="34" charset="-120"/>
-                <a:ea typeface="Microsoft JhengHei" panose="020B0604030504040204" pitchFamily="34" charset="-120"/>
-                <a:cs typeface="Arial" panose="020B0604020202020204" pitchFamily="34" charset="0"/>
-              </a:rPr>
-              <a:t>5 Feet </a:t>
-            </a:r>
-          </a:p>
-        </p:txBody>
-      </p:sp>
-      <p:sp>
-        <p:nvSpPr>
-          <p:cNvPr id="42" name="TextBox 41">
-            <a:extLst>
-              <a:ext uri="{FF2B5EF4-FFF2-40B4-BE49-F238E27FC236}">
-                <a16:creationId xmlns:a16="http://schemas.microsoft.com/office/drawing/2014/main" id="{82AD0667-E4DC-AFE0-F9CB-EE766AAB13F0}"/>
-              </a:ext>
-            </a:extLst>
-          </p:cNvPr>
-          <p:cNvSpPr txBox="1"/>
-          <p:nvPr/>
-        </p:nvSpPr>
-        <p:spPr>
-          <a:xfrm>
-            <a:off x="2538774" y="6377456"/>
-            <a:ext cx="1939846" cy="230832"/>
-          </a:xfrm>
-          <a:prstGeom prst="rect">
-            <a:avLst/>
-          </a:prstGeom>
-          <a:noFill/>
-        </p:spPr>
-        <p:txBody>
-          <a:bodyPr wrap="square" rtlCol="0">
-            <a:spAutoFit/>
-          </a:bodyPr>
-          <a:lstStyle/>
-          <a:p>
-            <a:r>
-              <a:rPr lang="en-US" sz="900" dirty="0">
-                <a:solidFill>
-                  <a:schemeClr val="tx1">
-                    <a:lumMod val="65000"/>
-                    <a:lumOff val="35000"/>
-                  </a:schemeClr>
-                </a:solidFill>
-                <a:latin typeface="Microsoft JhengHei" panose="020B0604030504040204" pitchFamily="34" charset="-120"/>
-                <a:ea typeface="Microsoft JhengHei" panose="020B0604030504040204" pitchFamily="34" charset="-120"/>
-                <a:cs typeface="Arial" panose="020B0604020202020204" pitchFamily="34" charset="0"/>
-              </a:rPr>
-              <a:t>5’Feet </a:t>
+              <a:t>IMPORTANT: Jaipur Rugs renderings are provided to illustrate pattern and color placement only. Color should be evaluated using actual yarn samples, as digital renderings cannot accurately represent final dyed yarns or handmade production variations.</a:t>
             </a:r>
           </a:p>
         </p:txBody>
       </p:sp>
       <p:pic>
         <p:nvPicPr>
-          <p:cNvPr id="6" name="Picture 5">
+          <p:cNvPr id="7" name="Picture 6">
             <a:extLst>
               <a:ext uri="{FF2B5EF4-FFF2-40B4-BE49-F238E27FC236}">
-                <a16:creationId xmlns:a16="http://schemas.microsoft.com/office/drawing/2014/main" id="{6421F718-5E8F-E8B1-B58A-F26C8C64CD78}"/>
-              </a:ext>
-            </a:extLst>
-          </p:cNvPr>
-          <p:cNvPicPr>
-            <a:picLocks noChangeAspect="1"/>
-          </p:cNvPicPr>
-          <p:nvPr/>
-        </p:nvPicPr>
-        <p:blipFill>
-          <a:blip r:embed="rId4">
-            <a:extLst>
-              <a:ext uri="{28A0092B-C50C-407E-A947-70E740481C1C}">
-                <a14:useLocalDpi xmlns:a14="http://schemas.microsoft.com/office/drawing/2010/main" val="0"/>
-              </a:ext>
-            </a:extLst>
-          </a:blip>
-          <a:srcRect l="24000" t="15240" r="23529" b="5327"/>
-          <a:stretch>
-            <a:fillRect/>
-          </a:stretch>
-        </p:blipFill>
-        <p:spPr>
-          <a:xfrm>
-            <a:off x="154652" y="8816435"/>
-            <a:ext cx="2967271" cy="2526744"/>
-          </a:xfrm>
-          <a:prstGeom prst="rect">
-            <a:avLst/>
-          </a:prstGeom>
-        </p:spPr>
-      </p:pic>
-      <p:pic>
-        <p:nvPicPr>
-          <p:cNvPr id="10" name="Picture 9">
-            <a:extLst>
-              <a:ext uri="{FF2B5EF4-FFF2-40B4-BE49-F238E27FC236}">
-                <a16:creationId xmlns:a16="http://schemas.microsoft.com/office/drawing/2014/main" id="{9F5C99CE-3450-2829-78BC-17A56A118572}"/>
+                <a16:creationId xmlns:a16="http://schemas.microsoft.com/office/drawing/2014/main" id="{2F82225B-F33B-00E5-A6D1-B005028DA178}"/>
               </a:ext>
             </a:extLst>
           </p:cNvPr>
@@ -4788,8 +6004,8 @@
         </p:blipFill>
         <p:spPr>
           <a:xfrm>
-            <a:off x="272504" y="1535563"/>
-            <a:ext cx="4736829" cy="4736829"/>
+            <a:off x="3432980" y="8233696"/>
+            <a:ext cx="2227370" cy="1633405"/>
           </a:xfrm>
           <a:prstGeom prst="rect">
             <a:avLst/>
@@ -4798,10 +6014,10 @@
       </p:pic>
       <p:sp>
         <p:nvSpPr>
-          <p:cNvPr id="11" name="TextBox 10">
+          <p:cNvPr id="9" name="TextBox 8">
             <a:extLst>
               <a:ext uri="{FF2B5EF4-FFF2-40B4-BE49-F238E27FC236}">
-                <a16:creationId xmlns:a16="http://schemas.microsoft.com/office/drawing/2014/main" id="{3C656EBA-1709-CBD3-4A2C-C1A703F82420}"/>
+                <a16:creationId xmlns:a16="http://schemas.microsoft.com/office/drawing/2014/main" id="{6A83422B-72E6-43E6-B1D5-7A88F21BD565}"/>
               </a:ext>
             </a:extLst>
           </p:cNvPr>
@@ -4810,40 +6026,59 @@
         </p:nvSpPr>
         <p:spPr>
           <a:xfrm>
-            <a:off x="5329966" y="2587999"/>
-            <a:ext cx="2457171" cy="265907"/>
+            <a:off x="5328536" y="5671338"/>
+            <a:ext cx="2457171" cy="235962"/>
           </a:xfrm>
           <a:prstGeom prst="rect">
             <a:avLst/>
           </a:prstGeom>
           <a:solidFill>
-            <a:srgbClr val="5A889A"/>
+            <a:srgbClr val="3C4425"/>
           </a:solidFill>
         </p:spPr>
         <p:txBody>
           <a:bodyPr wrap="square" rtlCol="0">
             <a:spAutoFit/>
           </a:bodyPr>
-          <a:lstStyle/>
-          <a:p>
-            <a:r>
-              <a:rPr lang="en-US" sz="1692" baseline="30000" dirty="0">
+          <a:lstStyle>
+            <a:defPPr>
+              <a:defRPr lang="en-US"/>
+            </a:defPPr>
+            <a:lvl1pPr>
+              <a:defRPr sz="1692" baseline="30000">
+                <a:latin typeface="Microsoft JhengHei" panose="020B0604030504040204" pitchFamily="34" charset="-120"/>
+                <a:ea typeface="Microsoft JhengHei" panose="020B0604030504040204" pitchFamily="34" charset="-120"/>
+              </a:defRPr>
+            </a:lvl1pPr>
+          </a:lstStyle>
+          <a:p>
+            <a:r>
+              <a:rPr lang="en-US" sz="1400" dirty="0">
                 <a:solidFill>
                   <a:schemeClr val="bg1"/>
                 </a:solidFill>
-                <a:latin typeface="Tw Cen MT" panose="020B0602020104020603" pitchFamily="34" charset="0"/>
-              </a:rPr>
-              <a:t>#4. Silk Wool Mix Ply </a:t>
-            </a:r>
-          </a:p>
-        </p:txBody>
-      </p:sp>
-      <p:sp>
-        <p:nvSpPr>
-          <p:cNvPr id="15" name="TextBox 14">
+              </a:rPr>
+              <a:t>#15. 315</a:t>
+            </a:r>
+            <a:r>
+              <a:rPr lang="en-US" sz="1400" baseline="30000" dirty="0">
+                <a:solidFill>
+                  <a:schemeClr val="bg1"/>
+                </a:solidFill>
+                <a:latin typeface="Microsoft JhengHei" panose="020B0604030504040204" pitchFamily="34" charset="-120"/>
+                <a:ea typeface="Microsoft JhengHei" panose="020B0604030504040204" pitchFamily="34" charset="-120"/>
+              </a:rPr>
+              <a:t>- Silk Cut Pile</a:t>
+            </a:r>
+          </a:p>
+        </p:txBody>
+      </p:sp>
+      <p:sp>
+        <p:nvSpPr>
+          <p:cNvPr id="10" name="TextBox 9">
             <a:extLst>
               <a:ext uri="{FF2B5EF4-FFF2-40B4-BE49-F238E27FC236}">
-                <a16:creationId xmlns:a16="http://schemas.microsoft.com/office/drawing/2014/main" id="{6A8493C4-D6BF-21FC-57BB-F76855DC954E}"/>
+                <a16:creationId xmlns:a16="http://schemas.microsoft.com/office/drawing/2014/main" id="{2308A93F-C3FA-146A-85C3-A7B3DFFB74B1}"/>
               </a:ext>
             </a:extLst>
           </p:cNvPr>
@@ -4852,14 +6087,14 @@
         </p:nvSpPr>
         <p:spPr>
           <a:xfrm>
-            <a:off x="5319501" y="2277525"/>
-            <a:ext cx="2457171" cy="265907"/>
+            <a:off x="5327219" y="5394998"/>
+            <a:ext cx="2457171" cy="235962"/>
           </a:xfrm>
           <a:prstGeom prst="rect">
             <a:avLst/>
           </a:prstGeom>
           <a:solidFill>
-            <a:srgbClr val="116599"/>
+            <a:srgbClr val="888F57"/>
           </a:solidFill>
         </p:spPr>
         <p:txBody>
@@ -4869,23 +6104,24 @@
           <a:lstStyle/>
           <a:p>
             <a:r>
-              <a:rPr lang="en-US" sz="1692" baseline="30000" dirty="0">
+              <a:rPr lang="en-US" sz="1400" baseline="30000" dirty="0">
                 <a:solidFill>
                   <a:schemeClr val="bg1"/>
                 </a:solidFill>
-                <a:latin typeface="Tw Cen MT" panose="020B0602020104020603" pitchFamily="34" charset="0"/>
-              </a:rPr>
-              <a:t>#3. Silk Wool Mix Ply </a:t>
-            </a:r>
-          </a:p>
-        </p:txBody>
-      </p:sp>
-      <p:sp>
-        <p:nvSpPr>
-          <p:cNvPr id="16" name="TextBox 15">
+                <a:latin typeface="Microsoft JhengHei" panose="020B0604030504040204" pitchFamily="34" charset="-120"/>
+                <a:ea typeface="Microsoft JhengHei" panose="020B0604030504040204" pitchFamily="34" charset="-120"/>
+              </a:rPr>
+              <a:t>#14. 202- Silk Cut Pile</a:t>
+            </a:r>
+          </a:p>
+        </p:txBody>
+      </p:sp>
+      <p:sp>
+        <p:nvSpPr>
+          <p:cNvPr id="15" name="TextBox 14">
             <a:extLst>
               <a:ext uri="{FF2B5EF4-FFF2-40B4-BE49-F238E27FC236}">
-                <a16:creationId xmlns:a16="http://schemas.microsoft.com/office/drawing/2014/main" id="{28BBCB3C-0D7E-7A77-FF36-21046543AAE4}"/>
+                <a16:creationId xmlns:a16="http://schemas.microsoft.com/office/drawing/2014/main" id="{7BC6F2C0-E70F-6F45-3809-6853C5E1A534}"/>
               </a:ext>
             </a:extLst>
           </p:cNvPr>
@@ -4894,40 +6130,59 @@
         </p:nvSpPr>
         <p:spPr>
           <a:xfrm>
-            <a:off x="5324309" y="3196217"/>
-            <a:ext cx="2457171" cy="265907"/>
+            <a:off x="5328812" y="4836978"/>
+            <a:ext cx="2457171" cy="235962"/>
           </a:xfrm>
           <a:prstGeom prst="rect">
             <a:avLst/>
           </a:prstGeom>
           <a:solidFill>
-            <a:srgbClr val="790A27"/>
+            <a:srgbClr val="3C5E7A"/>
           </a:solidFill>
         </p:spPr>
         <p:txBody>
           <a:bodyPr wrap="square" rtlCol="0">
             <a:spAutoFit/>
           </a:bodyPr>
-          <a:lstStyle/>
-          <a:p>
-            <a:r>
-              <a:rPr lang="en-US" sz="1692" baseline="30000" dirty="0">
+          <a:lstStyle>
+            <a:defPPr>
+              <a:defRPr lang="en-US"/>
+            </a:defPPr>
+            <a:lvl1pPr>
+              <a:defRPr sz="1692" baseline="30000">
+                <a:latin typeface="Microsoft JhengHei" panose="020B0604030504040204" pitchFamily="34" charset="-120"/>
+                <a:ea typeface="Microsoft JhengHei" panose="020B0604030504040204" pitchFamily="34" charset="-120"/>
+              </a:defRPr>
+            </a:lvl1pPr>
+          </a:lstStyle>
+          <a:p>
+            <a:r>
+              <a:rPr lang="en-US" sz="1400" dirty="0">
                 <a:solidFill>
                   <a:schemeClr val="bg1"/>
                 </a:solidFill>
-                <a:latin typeface="Tw Cen MT" panose="020B0602020104020603" pitchFamily="34" charset="0"/>
-              </a:rPr>
-              <a:t>#6. Silk Wool Mix Ply </a:t>
-            </a:r>
-          </a:p>
-        </p:txBody>
-      </p:sp>
-      <p:sp>
-        <p:nvSpPr>
-          <p:cNvPr id="20" name="TextBox 19">
+              </a:rPr>
+              <a:t>#12. 2173-</a:t>
+            </a:r>
+            <a:r>
+              <a:rPr lang="en-US" sz="1400" baseline="30000" dirty="0">
+                <a:solidFill>
+                  <a:schemeClr val="bg1"/>
+                </a:solidFill>
+                <a:latin typeface="Microsoft JhengHei" panose="020B0604030504040204" pitchFamily="34" charset="-120"/>
+                <a:ea typeface="Microsoft JhengHei" panose="020B0604030504040204" pitchFamily="34" charset="-120"/>
+              </a:rPr>
+              <a:t> Silk Cut Pile</a:t>
+            </a:r>
+          </a:p>
+        </p:txBody>
+      </p:sp>
+      <p:sp>
+        <p:nvSpPr>
+          <p:cNvPr id="16" name="TextBox 15">
             <a:extLst>
               <a:ext uri="{FF2B5EF4-FFF2-40B4-BE49-F238E27FC236}">
-                <a16:creationId xmlns:a16="http://schemas.microsoft.com/office/drawing/2014/main" id="{84B624C4-1C6B-904A-4FDF-DFD0FC4CF680}"/>
+                <a16:creationId xmlns:a16="http://schemas.microsoft.com/office/drawing/2014/main" id="{70D6EBE3-D5E5-A516-2455-B0C915E2AF73}"/>
               </a:ext>
             </a:extLst>
           </p:cNvPr>
@@ -4936,747 +6191,49 @@
         </p:nvSpPr>
         <p:spPr>
           <a:xfrm>
-            <a:off x="5329886" y="2885743"/>
-            <a:ext cx="2457171" cy="265907"/>
+            <a:off x="5322744" y="5115844"/>
+            <a:ext cx="2457171" cy="235962"/>
           </a:xfrm>
           <a:prstGeom prst="rect">
             <a:avLst/>
           </a:prstGeom>
           <a:solidFill>
-            <a:srgbClr val="77A5B0"/>
+            <a:srgbClr val="6B4B61"/>
           </a:solidFill>
         </p:spPr>
         <p:txBody>
           <a:bodyPr wrap="square" rtlCol="0">
             <a:spAutoFit/>
           </a:bodyPr>
-          <a:lstStyle/>
-          <a:p>
-            <a:r>
-              <a:rPr lang="en-US" sz="1692" baseline="30000" dirty="0">
+          <a:lstStyle>
+            <a:defPPr>
+              <a:defRPr lang="en-US"/>
+            </a:defPPr>
+            <a:lvl1pPr>
+              <a:defRPr sz="1692" baseline="30000">
+                <a:latin typeface="Microsoft JhengHei" panose="020B0604030504040204" pitchFamily="34" charset="-120"/>
+                <a:ea typeface="Microsoft JhengHei" panose="020B0604030504040204" pitchFamily="34" charset="-120"/>
+              </a:defRPr>
+            </a:lvl1pPr>
+          </a:lstStyle>
+          <a:p>
+            <a:r>
+              <a:rPr lang="en-US" sz="1400" dirty="0">
                 <a:solidFill>
                   <a:schemeClr val="bg1"/>
                 </a:solidFill>
-                <a:latin typeface="Tw Cen MT" panose="020B0602020104020603" pitchFamily="34" charset="0"/>
-              </a:rPr>
-              <a:t>#5. Silk Wool Mix Ply </a:t>
-            </a:r>
-          </a:p>
-        </p:txBody>
-      </p:sp>
-      <p:sp>
-        <p:nvSpPr>
-          <p:cNvPr id="23" name="TextBox 22">
-            <a:extLst>
-              <a:ext uri="{FF2B5EF4-FFF2-40B4-BE49-F238E27FC236}">
-                <a16:creationId xmlns:a16="http://schemas.microsoft.com/office/drawing/2014/main" id="{4AFD8119-6912-5516-2CA3-EC214E8E3C30}"/>
-              </a:ext>
-            </a:extLst>
-          </p:cNvPr>
-          <p:cNvSpPr txBox="1"/>
-          <p:nvPr/>
-        </p:nvSpPr>
-        <p:spPr>
-          <a:xfrm>
-            <a:off x="5325739" y="3803451"/>
-            <a:ext cx="2457171" cy="265907"/>
-          </a:xfrm>
-          <a:prstGeom prst="rect">
-            <a:avLst/>
-          </a:prstGeom>
-          <a:solidFill>
-            <a:srgbClr val="9B3549"/>
-          </a:solidFill>
-        </p:spPr>
-        <p:txBody>
-          <a:bodyPr wrap="square" rtlCol="0">
-            <a:spAutoFit/>
-          </a:bodyPr>
-          <a:lstStyle/>
-          <a:p>
-            <a:r>
-              <a:rPr lang="en-US" sz="1692" baseline="30000" dirty="0">
+              </a:rPr>
+              <a:t>#13. 622</a:t>
+            </a:r>
+            <a:r>
+              <a:rPr lang="en-US" sz="1400" baseline="30000" dirty="0">
                 <a:solidFill>
                   <a:schemeClr val="bg1"/>
                 </a:solidFill>
-                <a:latin typeface="Tw Cen MT" panose="020B0602020104020603" pitchFamily="34" charset="0"/>
-              </a:rPr>
-              <a:t>#8. Silk Wool Mix Ply </a:t>
-            </a:r>
-          </a:p>
-        </p:txBody>
-      </p:sp>
-      <p:sp>
-        <p:nvSpPr>
-          <p:cNvPr id="24" name="TextBox 23">
-            <a:extLst>
-              <a:ext uri="{FF2B5EF4-FFF2-40B4-BE49-F238E27FC236}">
-                <a16:creationId xmlns:a16="http://schemas.microsoft.com/office/drawing/2014/main" id="{B77CE086-7F46-F642-2401-47511F3EAD8F}"/>
-              </a:ext>
-            </a:extLst>
-          </p:cNvPr>
-          <p:cNvSpPr txBox="1"/>
-          <p:nvPr/>
-        </p:nvSpPr>
-        <p:spPr>
-          <a:xfrm>
-            <a:off x="5331316" y="3492977"/>
-            <a:ext cx="2457171" cy="265907"/>
-          </a:xfrm>
-          <a:prstGeom prst="rect">
-            <a:avLst/>
-          </a:prstGeom>
-          <a:solidFill>
-            <a:srgbClr val="892037"/>
-          </a:solidFill>
-        </p:spPr>
-        <p:txBody>
-          <a:bodyPr wrap="square" rtlCol="0">
-            <a:spAutoFit/>
-          </a:bodyPr>
-          <a:lstStyle/>
-          <a:p>
-            <a:r>
-              <a:rPr lang="en-US" sz="1692" baseline="30000" dirty="0">
-                <a:solidFill>
-                  <a:schemeClr val="bg1"/>
-                </a:solidFill>
-                <a:latin typeface="Tw Cen MT" panose="020B0602020104020603" pitchFamily="34" charset="0"/>
-              </a:rPr>
-              <a:t>#7. Silk Wool Mix Ply </a:t>
-            </a:r>
-          </a:p>
-        </p:txBody>
-      </p:sp>
-      <p:sp>
-        <p:nvSpPr>
-          <p:cNvPr id="25" name="TextBox 24">
-            <a:extLst>
-              <a:ext uri="{FF2B5EF4-FFF2-40B4-BE49-F238E27FC236}">
-                <a16:creationId xmlns:a16="http://schemas.microsoft.com/office/drawing/2014/main" id="{7DAD4DCC-77E5-E11B-9804-3ECB3E30D5D7}"/>
-              </a:ext>
-            </a:extLst>
-          </p:cNvPr>
-          <p:cNvSpPr txBox="1"/>
-          <p:nvPr/>
-        </p:nvSpPr>
-        <p:spPr>
-          <a:xfrm>
-            <a:off x="5328491" y="4440198"/>
-            <a:ext cx="2457171" cy="265907"/>
-          </a:xfrm>
-          <a:prstGeom prst="rect">
-            <a:avLst/>
-          </a:prstGeom>
-          <a:solidFill>
-            <a:srgbClr val="C27A82"/>
-          </a:solidFill>
-        </p:spPr>
-        <p:txBody>
-          <a:bodyPr wrap="square" rtlCol="0">
-            <a:spAutoFit/>
-          </a:bodyPr>
-          <a:lstStyle/>
-          <a:p>
-            <a:r>
-              <a:rPr lang="en-US" sz="1692" baseline="30000" dirty="0">
-                <a:solidFill>
-                  <a:schemeClr val="bg1"/>
-                </a:solidFill>
-                <a:latin typeface="Tw Cen MT" panose="020B0602020104020603" pitchFamily="34" charset="0"/>
-              </a:rPr>
-              <a:t>#10. Silk Wool Mix Ply </a:t>
-            </a:r>
-          </a:p>
-        </p:txBody>
-      </p:sp>
-      <p:sp>
-        <p:nvSpPr>
-          <p:cNvPr id="26" name="TextBox 25">
-            <a:extLst>
-              <a:ext uri="{FF2B5EF4-FFF2-40B4-BE49-F238E27FC236}">
-                <a16:creationId xmlns:a16="http://schemas.microsoft.com/office/drawing/2014/main" id="{DC38A023-3C29-9EA9-52C0-BE5D20F595D8}"/>
-              </a:ext>
-            </a:extLst>
-          </p:cNvPr>
-          <p:cNvSpPr txBox="1"/>
-          <p:nvPr/>
-        </p:nvSpPr>
-        <p:spPr>
-          <a:xfrm>
-            <a:off x="5318026" y="4129724"/>
-            <a:ext cx="2457171" cy="265907"/>
-          </a:xfrm>
-          <a:prstGeom prst="rect">
-            <a:avLst/>
-          </a:prstGeom>
-          <a:solidFill>
-            <a:srgbClr val="AF505B"/>
-          </a:solidFill>
-        </p:spPr>
-        <p:txBody>
-          <a:bodyPr wrap="square" rtlCol="0">
-            <a:spAutoFit/>
-          </a:bodyPr>
-          <a:lstStyle/>
-          <a:p>
-            <a:r>
-              <a:rPr lang="en-US" sz="1692" baseline="30000" dirty="0">
-                <a:solidFill>
-                  <a:schemeClr val="bg1"/>
-                </a:solidFill>
-                <a:latin typeface="Tw Cen MT" panose="020B0602020104020603" pitchFamily="34" charset="0"/>
-              </a:rPr>
-              <a:t>#9. Silk Wool Mix Ply </a:t>
-            </a:r>
-          </a:p>
-        </p:txBody>
-      </p:sp>
-      <p:sp>
-        <p:nvSpPr>
-          <p:cNvPr id="27" name="TextBox 26">
-            <a:extLst>
-              <a:ext uri="{FF2B5EF4-FFF2-40B4-BE49-F238E27FC236}">
-                <a16:creationId xmlns:a16="http://schemas.microsoft.com/office/drawing/2014/main" id="{3120F403-F1EF-3C05-F2E6-7F5126346E90}"/>
-              </a:ext>
-            </a:extLst>
-          </p:cNvPr>
-          <p:cNvSpPr txBox="1"/>
-          <p:nvPr/>
-        </p:nvSpPr>
-        <p:spPr>
-          <a:xfrm>
-            <a:off x="5329921" y="5047432"/>
-            <a:ext cx="2457171" cy="265907"/>
-          </a:xfrm>
-          <a:prstGeom prst="rect">
-            <a:avLst/>
-          </a:prstGeom>
-          <a:solidFill>
-            <a:srgbClr val="C41129"/>
-          </a:solidFill>
-        </p:spPr>
-        <p:txBody>
-          <a:bodyPr wrap="square" rtlCol="0">
-            <a:spAutoFit/>
-          </a:bodyPr>
-          <a:lstStyle/>
-          <a:p>
-            <a:r>
-              <a:rPr lang="en-US" sz="1692" baseline="30000" dirty="0">
-                <a:solidFill>
-                  <a:schemeClr val="bg1"/>
-                </a:solidFill>
-                <a:latin typeface="Tw Cen MT" panose="020B0602020104020603" pitchFamily="34" charset="0"/>
-              </a:rPr>
-              <a:t>#12. Silk Wool Mix Ply </a:t>
-            </a:r>
-          </a:p>
-        </p:txBody>
-      </p:sp>
-      <p:sp>
-        <p:nvSpPr>
-          <p:cNvPr id="28" name="TextBox 27">
-            <a:extLst>
-              <a:ext uri="{FF2B5EF4-FFF2-40B4-BE49-F238E27FC236}">
-                <a16:creationId xmlns:a16="http://schemas.microsoft.com/office/drawing/2014/main" id="{41CB9AEE-81E4-3691-557D-4B5A4FB820C0}"/>
-              </a:ext>
-            </a:extLst>
-          </p:cNvPr>
-          <p:cNvSpPr txBox="1"/>
-          <p:nvPr/>
-        </p:nvSpPr>
-        <p:spPr>
-          <a:xfrm>
-            <a:off x="5319456" y="4736958"/>
-            <a:ext cx="2457171" cy="265907"/>
-          </a:xfrm>
-          <a:prstGeom prst="rect">
-            <a:avLst/>
-          </a:prstGeom>
-          <a:solidFill>
-            <a:srgbClr val="E0650E"/>
-          </a:solidFill>
-        </p:spPr>
-        <p:txBody>
-          <a:bodyPr wrap="square" rtlCol="0">
-            <a:spAutoFit/>
-          </a:bodyPr>
-          <a:lstStyle/>
-          <a:p>
-            <a:r>
-              <a:rPr lang="en-US" sz="1692" baseline="30000" dirty="0">
-                <a:solidFill>
-                  <a:schemeClr val="bg1"/>
-                </a:solidFill>
-                <a:latin typeface="Tw Cen MT" panose="020B0602020104020603" pitchFamily="34" charset="0"/>
-              </a:rPr>
-              <a:t>#11. Silk Wool Mix Ply </a:t>
-            </a:r>
-          </a:p>
-        </p:txBody>
-      </p:sp>
-      <p:sp>
-        <p:nvSpPr>
-          <p:cNvPr id="29" name="TextBox 28">
-            <a:extLst>
-              <a:ext uri="{FF2B5EF4-FFF2-40B4-BE49-F238E27FC236}">
-                <a16:creationId xmlns:a16="http://schemas.microsoft.com/office/drawing/2014/main" id="{E3BC7C75-E641-23AD-946C-C7A7883CEAF8}"/>
-              </a:ext>
-            </a:extLst>
-          </p:cNvPr>
-          <p:cNvSpPr txBox="1"/>
-          <p:nvPr/>
-        </p:nvSpPr>
-        <p:spPr>
-          <a:xfrm>
-            <a:off x="5324264" y="5655650"/>
-            <a:ext cx="2457171" cy="265907"/>
-          </a:xfrm>
-          <a:prstGeom prst="rect">
-            <a:avLst/>
-          </a:prstGeom>
-          <a:solidFill>
-            <a:srgbClr val="F25F73"/>
-          </a:solidFill>
-        </p:spPr>
-        <p:txBody>
-          <a:bodyPr wrap="square" rtlCol="0">
-            <a:spAutoFit/>
-          </a:bodyPr>
-          <a:lstStyle/>
-          <a:p>
-            <a:r>
-              <a:rPr lang="en-US" sz="1692" baseline="30000" dirty="0">
-                <a:solidFill>
-                  <a:schemeClr val="bg1"/>
-                </a:solidFill>
-                <a:latin typeface="Tw Cen MT" panose="020B0602020104020603" pitchFamily="34" charset="0"/>
-              </a:rPr>
-              <a:t>#14. Silk Wool Mix Ply </a:t>
-            </a:r>
-          </a:p>
-        </p:txBody>
-      </p:sp>
-      <p:sp>
-        <p:nvSpPr>
-          <p:cNvPr id="30" name="TextBox 29">
-            <a:extLst>
-              <a:ext uri="{FF2B5EF4-FFF2-40B4-BE49-F238E27FC236}">
-                <a16:creationId xmlns:a16="http://schemas.microsoft.com/office/drawing/2014/main" id="{9C727967-1111-9904-6483-CA39EBFC8435}"/>
-              </a:ext>
-            </a:extLst>
-          </p:cNvPr>
-          <p:cNvSpPr txBox="1"/>
-          <p:nvPr/>
-        </p:nvSpPr>
-        <p:spPr>
-          <a:xfrm>
-            <a:off x="5329841" y="5345176"/>
-            <a:ext cx="2457171" cy="265907"/>
-          </a:xfrm>
-          <a:prstGeom prst="rect">
-            <a:avLst/>
-          </a:prstGeom>
-          <a:solidFill>
-            <a:srgbClr val="E8434B"/>
-          </a:solidFill>
-        </p:spPr>
-        <p:txBody>
-          <a:bodyPr wrap="square" rtlCol="0">
-            <a:spAutoFit/>
-          </a:bodyPr>
-          <a:lstStyle/>
-          <a:p>
-            <a:r>
-              <a:rPr lang="en-US" sz="1692" baseline="30000" dirty="0">
-                <a:solidFill>
-                  <a:schemeClr val="bg1"/>
-                </a:solidFill>
-                <a:latin typeface="Tw Cen MT" panose="020B0602020104020603" pitchFamily="34" charset="0"/>
-              </a:rPr>
-              <a:t>#13. Silk Wool Mix Ply </a:t>
-            </a:r>
-          </a:p>
-        </p:txBody>
-      </p:sp>
-      <p:sp>
-        <p:nvSpPr>
-          <p:cNvPr id="39" name="TextBox 38">
-            <a:extLst>
-              <a:ext uri="{FF2B5EF4-FFF2-40B4-BE49-F238E27FC236}">
-                <a16:creationId xmlns:a16="http://schemas.microsoft.com/office/drawing/2014/main" id="{00C35F60-78A3-9D24-D4E1-6FE72F2391D2}"/>
-              </a:ext>
-            </a:extLst>
-          </p:cNvPr>
-          <p:cNvSpPr txBox="1"/>
-          <p:nvPr/>
-        </p:nvSpPr>
-        <p:spPr>
-          <a:xfrm>
-            <a:off x="5327089" y="8702814"/>
-            <a:ext cx="2457171" cy="265907"/>
-          </a:xfrm>
-          <a:prstGeom prst="rect">
-            <a:avLst/>
-          </a:prstGeom>
-          <a:solidFill>
-            <a:srgbClr val="585D69"/>
-          </a:solidFill>
-        </p:spPr>
-        <p:txBody>
-          <a:bodyPr wrap="square" rtlCol="0">
-            <a:spAutoFit/>
-          </a:bodyPr>
-          <a:lstStyle/>
-          <a:p>
-            <a:r>
-              <a:rPr lang="en-US" sz="1692" baseline="30000" dirty="0">
-                <a:solidFill>
-                  <a:schemeClr val="bg1"/>
-                </a:solidFill>
-                <a:latin typeface="Tw Cen MT" panose="020B0602020104020603" pitchFamily="34" charset="0"/>
-              </a:rPr>
-              <a:t>#24. Silk Wool Mix Ply </a:t>
-            </a:r>
-          </a:p>
-        </p:txBody>
-      </p:sp>
-      <p:sp>
-        <p:nvSpPr>
-          <p:cNvPr id="43" name="TextBox 42">
-            <a:extLst>
-              <a:ext uri="{FF2B5EF4-FFF2-40B4-BE49-F238E27FC236}">
-                <a16:creationId xmlns:a16="http://schemas.microsoft.com/office/drawing/2014/main" id="{9EF7FF85-B4E1-4B99-0C52-08B40BD9E9A7}"/>
-              </a:ext>
-            </a:extLst>
-          </p:cNvPr>
-          <p:cNvSpPr txBox="1"/>
-          <p:nvPr/>
-        </p:nvSpPr>
-        <p:spPr>
-          <a:xfrm>
-            <a:off x="5332666" y="8392340"/>
-            <a:ext cx="2457171" cy="265907"/>
-          </a:xfrm>
-          <a:prstGeom prst="rect">
-            <a:avLst/>
-          </a:prstGeom>
-          <a:solidFill>
-            <a:srgbClr val="736927"/>
-          </a:solidFill>
-        </p:spPr>
-        <p:txBody>
-          <a:bodyPr wrap="square" rtlCol="0">
-            <a:spAutoFit/>
-          </a:bodyPr>
-          <a:lstStyle/>
-          <a:p>
-            <a:r>
-              <a:rPr lang="en-US" sz="1692" baseline="30000" dirty="0">
-                <a:solidFill>
-                  <a:schemeClr val="bg1"/>
-                </a:solidFill>
-                <a:latin typeface="Tw Cen MT" panose="020B0602020104020603" pitchFamily="34" charset="0"/>
-              </a:rPr>
-              <a:t>#23. Silk Wool Mix Ply </a:t>
-            </a:r>
-          </a:p>
-        </p:txBody>
-      </p:sp>
-      <p:sp>
-        <p:nvSpPr>
-          <p:cNvPr id="44" name="TextBox 43">
-            <a:extLst>
-              <a:ext uri="{FF2B5EF4-FFF2-40B4-BE49-F238E27FC236}">
-                <a16:creationId xmlns:a16="http://schemas.microsoft.com/office/drawing/2014/main" id="{9D97560C-97A1-DF21-912F-F401F1324C4A}"/>
-              </a:ext>
-            </a:extLst>
-          </p:cNvPr>
-          <p:cNvSpPr txBox="1"/>
-          <p:nvPr/>
-        </p:nvSpPr>
-        <p:spPr>
-          <a:xfrm>
-            <a:off x="5329886" y="6880128"/>
-            <a:ext cx="2457171" cy="265907"/>
-          </a:xfrm>
-          <a:prstGeom prst="rect">
-            <a:avLst/>
-          </a:prstGeom>
-          <a:solidFill>
-            <a:srgbClr val="F2C04C"/>
-          </a:solidFill>
-        </p:spPr>
-        <p:txBody>
-          <a:bodyPr wrap="square" rtlCol="0">
-            <a:spAutoFit/>
-          </a:bodyPr>
-          <a:lstStyle/>
-          <a:p>
-            <a:r>
-              <a:rPr lang="en-US" sz="1692" baseline="30000" dirty="0">
-                <a:solidFill>
-                  <a:schemeClr val="bg1"/>
-                </a:solidFill>
-                <a:latin typeface="Tw Cen MT" panose="020B0602020104020603" pitchFamily="34" charset="0"/>
-              </a:rPr>
-              <a:t>#18. Silk Wool Mix Ply </a:t>
-            </a:r>
-          </a:p>
-        </p:txBody>
-      </p:sp>
-      <p:sp>
-        <p:nvSpPr>
-          <p:cNvPr id="45" name="TextBox 44">
-            <a:extLst>
-              <a:ext uri="{FF2B5EF4-FFF2-40B4-BE49-F238E27FC236}">
-                <a16:creationId xmlns:a16="http://schemas.microsoft.com/office/drawing/2014/main" id="{8319C4F7-86A1-6D4D-CE31-E567C66732D3}"/>
-              </a:ext>
-            </a:extLst>
-          </p:cNvPr>
-          <p:cNvSpPr txBox="1"/>
-          <p:nvPr/>
-        </p:nvSpPr>
-        <p:spPr>
-          <a:xfrm>
-            <a:off x="5319421" y="6569654"/>
-            <a:ext cx="2457171" cy="265907"/>
-          </a:xfrm>
-          <a:prstGeom prst="rect">
-            <a:avLst/>
-          </a:prstGeom>
-          <a:solidFill>
-            <a:srgbClr val="F5AE0C"/>
-          </a:solidFill>
-        </p:spPr>
-        <p:txBody>
-          <a:bodyPr wrap="square" rtlCol="0">
-            <a:spAutoFit/>
-          </a:bodyPr>
-          <a:lstStyle/>
-          <a:p>
-            <a:r>
-              <a:rPr lang="en-US" sz="1692" baseline="30000" dirty="0">
-                <a:solidFill>
-                  <a:schemeClr val="bg1"/>
-                </a:solidFill>
-                <a:latin typeface="Tw Cen MT" panose="020B0602020104020603" pitchFamily="34" charset="0"/>
-              </a:rPr>
-              <a:t>#17. Silk Wool Mix Ply </a:t>
-            </a:r>
-          </a:p>
-        </p:txBody>
-      </p:sp>
-      <p:sp>
-        <p:nvSpPr>
-          <p:cNvPr id="47" name="TextBox 46">
-            <a:extLst>
-              <a:ext uri="{FF2B5EF4-FFF2-40B4-BE49-F238E27FC236}">
-                <a16:creationId xmlns:a16="http://schemas.microsoft.com/office/drawing/2014/main" id="{DB8C6CBC-E733-0B27-9BB8-06F3093D5F63}"/>
-              </a:ext>
-            </a:extLst>
-          </p:cNvPr>
-          <p:cNvSpPr txBox="1"/>
-          <p:nvPr/>
-        </p:nvSpPr>
-        <p:spPr>
-          <a:xfrm>
-            <a:off x="5331316" y="7487362"/>
-            <a:ext cx="2457171" cy="265907"/>
-          </a:xfrm>
-          <a:prstGeom prst="rect">
-            <a:avLst/>
-          </a:prstGeom>
-          <a:solidFill>
-            <a:srgbClr val="B26017"/>
-          </a:solidFill>
-        </p:spPr>
-        <p:txBody>
-          <a:bodyPr wrap="square" rtlCol="0">
-            <a:spAutoFit/>
-          </a:bodyPr>
-          <a:lstStyle/>
-          <a:p>
-            <a:r>
-              <a:rPr lang="en-US" sz="1692" baseline="30000" dirty="0">
-                <a:solidFill>
-                  <a:schemeClr val="bg1"/>
-                </a:solidFill>
-                <a:latin typeface="Tw Cen MT" panose="020B0602020104020603" pitchFamily="34" charset="0"/>
-              </a:rPr>
-              <a:t>#20. Silk Wool Mix Ply </a:t>
-            </a:r>
-          </a:p>
-        </p:txBody>
-      </p:sp>
-      <p:sp>
-        <p:nvSpPr>
-          <p:cNvPr id="48" name="TextBox 47">
-            <a:extLst>
-              <a:ext uri="{FF2B5EF4-FFF2-40B4-BE49-F238E27FC236}">
-                <a16:creationId xmlns:a16="http://schemas.microsoft.com/office/drawing/2014/main" id="{09D3A41F-FC4F-F099-C06F-1D2EC62BA79C}"/>
-              </a:ext>
-            </a:extLst>
-          </p:cNvPr>
-          <p:cNvSpPr txBox="1"/>
-          <p:nvPr/>
-        </p:nvSpPr>
-        <p:spPr>
-          <a:xfrm>
-            <a:off x="5320851" y="7176888"/>
-            <a:ext cx="2457171" cy="265907"/>
-          </a:xfrm>
-          <a:prstGeom prst="rect">
-            <a:avLst/>
-          </a:prstGeom>
-          <a:solidFill>
-            <a:srgbClr val="DFD7D5"/>
-          </a:solidFill>
-        </p:spPr>
-        <p:txBody>
-          <a:bodyPr wrap="square" rtlCol="0">
-            <a:spAutoFit/>
-          </a:bodyPr>
-          <a:lstStyle/>
-          <a:p>
-            <a:r>
-              <a:rPr lang="en-US" sz="1692" baseline="30000" dirty="0">
-                <a:solidFill>
-                  <a:schemeClr val="tx1">
-                    <a:lumMod val="65000"/>
-                    <a:lumOff val="35000"/>
-                  </a:schemeClr>
-                </a:solidFill>
-                <a:latin typeface="Tw Cen MT" panose="020B0602020104020603" pitchFamily="34" charset="0"/>
-              </a:rPr>
-              <a:t>#19. Silk Wool Mix Ply </a:t>
-            </a:r>
-          </a:p>
-        </p:txBody>
-      </p:sp>
-      <p:sp>
-        <p:nvSpPr>
-          <p:cNvPr id="49" name="TextBox 48">
-            <a:extLst>
-              <a:ext uri="{FF2B5EF4-FFF2-40B4-BE49-F238E27FC236}">
-                <a16:creationId xmlns:a16="http://schemas.microsoft.com/office/drawing/2014/main" id="{281BDFC1-07D6-C1F6-5C5D-407D0E6BB776}"/>
-              </a:ext>
-            </a:extLst>
-          </p:cNvPr>
-          <p:cNvSpPr txBox="1"/>
-          <p:nvPr/>
-        </p:nvSpPr>
-        <p:spPr>
-          <a:xfrm>
-            <a:off x="5325659" y="8095580"/>
-            <a:ext cx="2457171" cy="265907"/>
-          </a:xfrm>
-          <a:prstGeom prst="rect">
-            <a:avLst/>
-          </a:prstGeom>
-          <a:solidFill>
-            <a:srgbClr val="EBBFB3"/>
-          </a:solidFill>
-        </p:spPr>
-        <p:txBody>
-          <a:bodyPr wrap="square" rtlCol="0">
-            <a:spAutoFit/>
-          </a:bodyPr>
-          <a:lstStyle/>
-          <a:p>
-            <a:r>
-              <a:rPr lang="en-US" sz="1692" baseline="30000" dirty="0">
-                <a:solidFill>
-                  <a:schemeClr val="bg1"/>
-                </a:solidFill>
-                <a:latin typeface="Tw Cen MT" panose="020B0602020104020603" pitchFamily="34" charset="0"/>
-              </a:rPr>
-              <a:t>#22. Silk Wool Mix Ply </a:t>
-            </a:r>
-          </a:p>
-        </p:txBody>
-      </p:sp>
-      <p:sp>
-        <p:nvSpPr>
-          <p:cNvPr id="50" name="TextBox 49">
-            <a:extLst>
-              <a:ext uri="{FF2B5EF4-FFF2-40B4-BE49-F238E27FC236}">
-                <a16:creationId xmlns:a16="http://schemas.microsoft.com/office/drawing/2014/main" id="{CFC84978-4877-EB52-38AF-739D855E849D}"/>
-              </a:ext>
-            </a:extLst>
-          </p:cNvPr>
-          <p:cNvSpPr txBox="1"/>
-          <p:nvPr/>
-        </p:nvSpPr>
-        <p:spPr>
-          <a:xfrm>
-            <a:off x="5331236" y="7785106"/>
-            <a:ext cx="2457171" cy="265907"/>
-          </a:xfrm>
-          <a:prstGeom prst="rect">
-            <a:avLst/>
-          </a:prstGeom>
-          <a:solidFill>
-            <a:srgbClr val="482C39"/>
-          </a:solidFill>
-        </p:spPr>
-        <p:txBody>
-          <a:bodyPr wrap="square" rtlCol="0">
-            <a:spAutoFit/>
-          </a:bodyPr>
-          <a:lstStyle/>
-          <a:p>
-            <a:r>
-              <a:rPr lang="en-US" sz="1692" baseline="30000" dirty="0">
-                <a:solidFill>
-                  <a:schemeClr val="bg1"/>
-                </a:solidFill>
-                <a:latin typeface="Tw Cen MT" panose="020B0602020104020603" pitchFamily="34" charset="0"/>
-              </a:rPr>
-              <a:t>#21. Silk Wool Mix Ply </a:t>
-            </a:r>
-          </a:p>
-        </p:txBody>
-      </p:sp>
-      <p:sp>
-        <p:nvSpPr>
-          <p:cNvPr id="9" name="TextBox 8">
-            <a:extLst>
-              <a:ext uri="{FF2B5EF4-FFF2-40B4-BE49-F238E27FC236}">
-                <a16:creationId xmlns:a16="http://schemas.microsoft.com/office/drawing/2014/main" id="{70FAF990-CF36-8495-A041-993191EC7E7A}"/>
-              </a:ext>
-            </a:extLst>
-          </p:cNvPr>
-          <p:cNvSpPr txBox="1"/>
-          <p:nvPr/>
-        </p:nvSpPr>
-        <p:spPr>
-          <a:xfrm>
-            <a:off x="5327667" y="9012984"/>
-            <a:ext cx="2457171" cy="265907"/>
-          </a:xfrm>
-          <a:prstGeom prst="rect">
-            <a:avLst/>
-          </a:prstGeom>
-          <a:solidFill>
-            <a:srgbClr val="D5A3A3"/>
-          </a:solidFill>
-        </p:spPr>
-        <p:txBody>
-          <a:bodyPr wrap="square" rtlCol="0">
-            <a:spAutoFit/>
-          </a:bodyPr>
-          <a:lstStyle/>
-          <a:p>
-            <a:r>
-              <a:rPr lang="en-US" sz="1692" baseline="30000" dirty="0">
-                <a:solidFill>
-                  <a:schemeClr val="bg1"/>
-                </a:solidFill>
-                <a:latin typeface="Tw Cen MT" panose="020B0602020104020603" pitchFamily="34" charset="0"/>
-              </a:rPr>
-              <a:t>#25. Silk Wool Mix Ply </a:t>
+                <a:latin typeface="Microsoft JhengHei" panose="020B0604030504040204" pitchFamily="34" charset="-120"/>
+                <a:ea typeface="Microsoft JhengHei" panose="020B0604030504040204" pitchFamily="34" charset="-120"/>
+              </a:rPr>
+              <a:t>- Silk Cut Pile</a:t>
             </a:r>
           </a:p>
         </p:txBody>
@@ -5684,7 +6241,7 @@
     </p:spTree>
     <p:extLst>
       <p:ext uri="{BB962C8B-B14F-4D97-AF65-F5344CB8AC3E}">
-        <p14:creationId xmlns:p14="http://schemas.microsoft.com/office/powerpoint/2010/main" val="2224158874"/>
+        <p14:creationId xmlns:p14="http://schemas.microsoft.com/office/powerpoint/2010/main" val="3481404878"/>
       </p:ext>
     </p:extLst>
   </p:cSld>
@@ -5695,6 +6252,2708 @@
 </file>
 
 <file path=ppt/slides/slide2.xml><?xml version="1.0" encoding="utf-8"?>
+<p:sld xmlns:a="http://schemas.openxmlformats.org/drawingml/2006/main" xmlns:r="http://schemas.openxmlformats.org/officeDocument/2006/relationships" xmlns:p="http://schemas.openxmlformats.org/presentationml/2006/main">
+  <p:cSld>
+    <p:spTree>
+      <p:nvGrpSpPr>
+        <p:cNvPr id="1" name="">
+          <a:extLst>
+            <a:ext uri="{FF2B5EF4-FFF2-40B4-BE49-F238E27FC236}">
+              <a16:creationId xmlns:a16="http://schemas.microsoft.com/office/drawing/2014/main" id="{8F944929-F30F-D2AF-640D-3783E4075D84}"/>
+            </a:ext>
+          </a:extLst>
+        </p:cNvPr>
+        <p:cNvGrpSpPr/>
+        <p:nvPr/>
+      </p:nvGrpSpPr>
+      <p:grpSpPr>
+        <a:xfrm>
+          <a:off x="0" y="0"/>
+          <a:ext cx="0" cy="0"/>
+          <a:chOff x="0" y="0"/>
+          <a:chExt cx="0" cy="0"/>
+        </a:xfrm>
+      </p:grpSpPr>
+      <p:pic>
+        <p:nvPicPr>
+          <p:cNvPr id="21" name="Picture 20">
+            <a:extLst>
+              <a:ext uri="{FF2B5EF4-FFF2-40B4-BE49-F238E27FC236}">
+                <a16:creationId xmlns:a16="http://schemas.microsoft.com/office/drawing/2014/main" id="{188B0CCC-B9DE-0DC8-1974-2BF33B5DCDAD}"/>
+              </a:ext>
+            </a:extLst>
+          </p:cNvPr>
+          <p:cNvPicPr>
+            <a:picLocks noChangeAspect="1"/>
+          </p:cNvPicPr>
+          <p:nvPr/>
+        </p:nvPicPr>
+        <p:blipFill>
+          <a:blip r:embed="rId3">
+            <a:extLst>
+              <a:ext uri="{28A0092B-C50C-407E-A947-70E740481C1C}">
+                <a14:useLocalDpi xmlns:a14="http://schemas.microsoft.com/office/drawing/2010/main" val="0"/>
+              </a:ext>
+            </a:extLst>
+          </a:blip>
+          <a:srcRect l="70070" t="24477" b="56867"/>
+          <a:stretch/>
+        </p:blipFill>
+        <p:spPr>
+          <a:xfrm>
+            <a:off x="5756396" y="8002378"/>
+            <a:ext cx="1678126" cy="1684294"/>
+          </a:xfrm>
+          <a:prstGeom prst="rect">
+            <a:avLst/>
+          </a:prstGeom>
+        </p:spPr>
+      </p:pic>
+      <p:pic>
+        <p:nvPicPr>
+          <p:cNvPr id="20" name="Picture 19">
+            <a:extLst>
+              <a:ext uri="{FF2B5EF4-FFF2-40B4-BE49-F238E27FC236}">
+                <a16:creationId xmlns:a16="http://schemas.microsoft.com/office/drawing/2014/main" id="{06843744-A24A-F6CE-4502-B38116BB739A}"/>
+              </a:ext>
+            </a:extLst>
+          </p:cNvPr>
+          <p:cNvPicPr>
+            <a:picLocks noChangeAspect="1"/>
+          </p:cNvPicPr>
+          <p:nvPr/>
+        </p:nvPicPr>
+        <p:blipFill>
+          <a:blip r:embed="rId3">
+            <a:extLst>
+              <a:ext uri="{28A0092B-C50C-407E-A947-70E740481C1C}">
+                <a14:useLocalDpi xmlns:a14="http://schemas.microsoft.com/office/drawing/2010/main" val="0"/>
+              </a:ext>
+            </a:extLst>
+          </a:blip>
+          <a:srcRect b="2159"/>
+          <a:stretch/>
+        </p:blipFill>
+        <p:spPr>
+          <a:xfrm>
+            <a:off x="927648" y="1732284"/>
+            <a:ext cx="3526508" cy="5555955"/>
+          </a:xfrm>
+          <a:prstGeom prst="rect">
+            <a:avLst/>
+          </a:prstGeom>
+        </p:spPr>
+      </p:pic>
+      <p:sp>
+        <p:nvSpPr>
+          <p:cNvPr id="30" name="Rectangle 29">
+            <a:extLst>
+              <a:ext uri="{FF2B5EF4-FFF2-40B4-BE49-F238E27FC236}">
+                <a16:creationId xmlns:a16="http://schemas.microsoft.com/office/drawing/2014/main" id="{DB440211-E42F-5C57-0ECD-668B00DC1C5C}"/>
+              </a:ext>
+            </a:extLst>
+          </p:cNvPr>
+          <p:cNvSpPr/>
+          <p:nvPr/>
+        </p:nvSpPr>
+        <p:spPr>
+          <a:xfrm>
+            <a:off x="2429125" y="8445899"/>
+            <a:ext cx="1507935" cy="782302"/>
+          </a:xfrm>
+          <a:prstGeom prst="rect">
+            <a:avLst/>
+          </a:prstGeom>
+          <a:solidFill>
+            <a:schemeClr val="bg1"/>
+          </a:solidFill>
+          <a:ln>
+            <a:solidFill>
+              <a:schemeClr val="bg1"/>
+            </a:solidFill>
+          </a:ln>
+        </p:spPr>
+        <p:style>
+          <a:lnRef idx="2">
+            <a:schemeClr val="accent1">
+              <a:shade val="15000"/>
+            </a:schemeClr>
+          </a:lnRef>
+          <a:fillRef idx="1">
+            <a:schemeClr val="accent1"/>
+          </a:fillRef>
+          <a:effectRef idx="0">
+            <a:schemeClr val="accent1"/>
+          </a:effectRef>
+          <a:fontRef idx="minor">
+            <a:schemeClr val="lt1"/>
+          </a:fontRef>
+        </p:style>
+        <p:txBody>
+          <a:bodyPr rtlCol="0" anchor="ctr"/>
+          <a:lstStyle/>
+          <a:p>
+            <a:pPr algn="ctr"/>
+            <a:endParaRPr lang="en-US"/>
+          </a:p>
+        </p:txBody>
+      </p:sp>
+      <p:cxnSp>
+        <p:nvCxnSpPr>
+          <p:cNvPr id="8" name="Straight Connector 7">
+            <a:extLst>
+              <a:ext uri="{FF2B5EF4-FFF2-40B4-BE49-F238E27FC236}">
+                <a16:creationId xmlns:a16="http://schemas.microsoft.com/office/drawing/2014/main" id="{DB2FDF7C-0457-0DD8-11E8-F370FCE4C4B5}"/>
+              </a:ext>
+            </a:extLst>
+          </p:cNvPr>
+          <p:cNvCxnSpPr>
+            <a:cxnSpLocks/>
+          </p:cNvCxnSpPr>
+          <p:nvPr/>
+        </p:nvCxnSpPr>
+        <p:spPr>
+          <a:xfrm>
+            <a:off x="2123089" y="452127"/>
+            <a:ext cx="5659821" cy="22336"/>
+          </a:xfrm>
+          <a:prstGeom prst="line">
+            <a:avLst/>
+          </a:prstGeom>
+          <a:ln w="3175">
+            <a:solidFill>
+              <a:schemeClr val="accent2"/>
+            </a:solidFill>
+          </a:ln>
+        </p:spPr>
+        <p:style>
+          <a:lnRef idx="3">
+            <a:schemeClr val="dk1"/>
+          </a:lnRef>
+          <a:fillRef idx="0">
+            <a:schemeClr val="dk1"/>
+          </a:fillRef>
+          <a:effectRef idx="2">
+            <a:schemeClr val="dk1"/>
+          </a:effectRef>
+          <a:fontRef idx="minor">
+            <a:schemeClr val="tx1"/>
+          </a:fontRef>
+        </p:style>
+      </p:cxnSp>
+      <p:sp>
+        <p:nvSpPr>
+          <p:cNvPr id="12" name="TextBox 11">
+            <a:extLst>
+              <a:ext uri="{FF2B5EF4-FFF2-40B4-BE49-F238E27FC236}">
+                <a16:creationId xmlns:a16="http://schemas.microsoft.com/office/drawing/2014/main" id="{5EBAC017-514C-698E-93FB-44EF775F84F9}"/>
+              </a:ext>
+            </a:extLst>
+          </p:cNvPr>
+          <p:cNvSpPr txBox="1"/>
+          <p:nvPr/>
+        </p:nvSpPr>
+        <p:spPr>
+          <a:xfrm>
+            <a:off x="6347499" y="218716"/>
+            <a:ext cx="1977655" cy="246221"/>
+          </a:xfrm>
+          <a:prstGeom prst="rect">
+            <a:avLst/>
+          </a:prstGeom>
+          <a:noFill/>
+        </p:spPr>
+        <p:txBody>
+          <a:bodyPr wrap="square" rtlCol="0">
+            <a:spAutoFit/>
+          </a:bodyPr>
+          <a:lstStyle/>
+          <a:p>
+            <a:r>
+              <a:rPr lang="en-US" sz="1000" dirty="0">
+                <a:solidFill>
+                  <a:schemeClr val="tx1">
+                    <a:lumMod val="75000"/>
+                    <a:lumOff val="25000"/>
+                  </a:schemeClr>
+                </a:solidFill>
+                <a:latin typeface="Microsoft JhengHei Light" panose="020B0304030504040204" pitchFamily="34" charset="-120"/>
+                <a:ea typeface="Microsoft JhengHei Light" panose="020B0304030504040204" pitchFamily="34" charset="-120"/>
+              </a:rPr>
+              <a:t>Date : 19/09/2026</a:t>
+            </a:r>
+          </a:p>
+        </p:txBody>
+      </p:sp>
+      <p:sp>
+        <p:nvSpPr>
+          <p:cNvPr id="13" name="TextBox 12">
+            <a:extLst>
+              <a:ext uri="{FF2B5EF4-FFF2-40B4-BE49-F238E27FC236}">
+                <a16:creationId xmlns:a16="http://schemas.microsoft.com/office/drawing/2014/main" id="{A1F7BB5E-DC95-A12D-0FCE-188A866E0A71}"/>
+              </a:ext>
+            </a:extLst>
+          </p:cNvPr>
+          <p:cNvSpPr txBox="1"/>
+          <p:nvPr/>
+        </p:nvSpPr>
+        <p:spPr>
+          <a:xfrm>
+            <a:off x="4024299" y="500787"/>
+            <a:ext cx="3553148" cy="246221"/>
+          </a:xfrm>
+          <a:prstGeom prst="rect">
+            <a:avLst/>
+          </a:prstGeom>
+          <a:noFill/>
+        </p:spPr>
+        <p:txBody>
+          <a:bodyPr wrap="square" rtlCol="0">
+            <a:spAutoFit/>
+          </a:bodyPr>
+          <a:lstStyle/>
+          <a:p>
+            <a:pPr algn="r"/>
+            <a:r>
+              <a:rPr lang="en-US" sz="1000" dirty="0">
+                <a:solidFill>
+                  <a:schemeClr val="tx1">
+                    <a:lumMod val="75000"/>
+                    <a:lumOff val="25000"/>
+                  </a:schemeClr>
+                </a:solidFill>
+                <a:latin typeface="Microsoft JhengHei Light" panose="020B0304030504040204" pitchFamily="34" charset="-120"/>
+                <a:ea typeface="Microsoft JhengHei Light" panose="020B0304030504040204" pitchFamily="34" charset="-120"/>
+              </a:rPr>
+              <a:t>Customized Project : Divya Somani</a:t>
+            </a:r>
+          </a:p>
+        </p:txBody>
+      </p:sp>
+      <p:sp>
+        <p:nvSpPr>
+          <p:cNvPr id="17" name="TextBox 16">
+            <a:extLst>
+              <a:ext uri="{FF2B5EF4-FFF2-40B4-BE49-F238E27FC236}">
+                <a16:creationId xmlns:a16="http://schemas.microsoft.com/office/drawing/2014/main" id="{89E29410-FDCE-C6C2-5598-6CD44EB30349}"/>
+              </a:ext>
+            </a:extLst>
+          </p:cNvPr>
+          <p:cNvSpPr txBox="1"/>
+          <p:nvPr/>
+        </p:nvSpPr>
+        <p:spPr>
+          <a:xfrm>
+            <a:off x="3526797" y="10933749"/>
+            <a:ext cx="3750500" cy="246221"/>
+          </a:xfrm>
+          <a:prstGeom prst="rect">
+            <a:avLst/>
+          </a:prstGeom>
+          <a:noFill/>
+        </p:spPr>
+        <p:txBody>
+          <a:bodyPr wrap="square" rtlCol="0">
+            <a:spAutoFit/>
+          </a:bodyPr>
+          <a:lstStyle/>
+          <a:p>
+            <a:r>
+              <a:rPr lang="en-US" sz="1000" b="1" dirty="0">
+                <a:solidFill>
+                  <a:schemeClr val="tx1">
+                    <a:lumMod val="65000"/>
+                    <a:lumOff val="35000"/>
+                  </a:schemeClr>
+                </a:solidFill>
+                <a:latin typeface="Microsoft JhengHei Light" panose="020B0304030504040204" pitchFamily="34" charset="-120"/>
+                <a:ea typeface="Microsoft JhengHei Light" panose="020B0304030504040204" pitchFamily="34" charset="-120"/>
+              </a:rPr>
+              <a:t>Signature : ________________________________________________ </a:t>
+            </a:r>
+          </a:p>
+        </p:txBody>
+      </p:sp>
+      <p:sp>
+        <p:nvSpPr>
+          <p:cNvPr id="18" name="TextBox 17">
+            <a:extLst>
+              <a:ext uri="{FF2B5EF4-FFF2-40B4-BE49-F238E27FC236}">
+                <a16:creationId xmlns:a16="http://schemas.microsoft.com/office/drawing/2014/main" id="{DA815821-44A1-2E46-3CF3-9293F64B7AC2}"/>
+              </a:ext>
+            </a:extLst>
+          </p:cNvPr>
+          <p:cNvSpPr txBox="1"/>
+          <p:nvPr/>
+        </p:nvSpPr>
+        <p:spPr>
+          <a:xfrm>
+            <a:off x="3551067" y="11218889"/>
+            <a:ext cx="3612523" cy="246221"/>
+          </a:xfrm>
+          <a:prstGeom prst="rect">
+            <a:avLst/>
+          </a:prstGeom>
+          <a:noFill/>
+        </p:spPr>
+        <p:txBody>
+          <a:bodyPr wrap="square" rtlCol="0">
+            <a:spAutoFit/>
+          </a:bodyPr>
+          <a:lstStyle/>
+          <a:p>
+            <a:r>
+              <a:rPr lang="en-US" sz="1000" b="1" dirty="0">
+                <a:solidFill>
+                  <a:schemeClr val="tx1">
+                    <a:lumMod val="65000"/>
+                    <a:lumOff val="35000"/>
+                  </a:schemeClr>
+                </a:solidFill>
+                <a:latin typeface="Microsoft JhengHei Light" panose="020B0304030504040204" pitchFamily="34" charset="-120"/>
+                <a:ea typeface="Microsoft JhengHei Light" panose="020B0304030504040204" pitchFamily="34" charset="-120"/>
+              </a:rPr>
+              <a:t>Date of Approval :_________________________________________</a:t>
+            </a:r>
+          </a:p>
+        </p:txBody>
+      </p:sp>
+      <p:sp>
+        <p:nvSpPr>
+          <p:cNvPr id="19" name="TextBox 18">
+            <a:extLst>
+              <a:ext uri="{FF2B5EF4-FFF2-40B4-BE49-F238E27FC236}">
+                <a16:creationId xmlns:a16="http://schemas.microsoft.com/office/drawing/2014/main" id="{2FB24222-3401-4C8A-2632-4C860AEC655C}"/>
+              </a:ext>
+            </a:extLst>
+          </p:cNvPr>
+          <p:cNvSpPr txBox="1"/>
+          <p:nvPr/>
+        </p:nvSpPr>
+        <p:spPr>
+          <a:xfrm>
+            <a:off x="353921" y="8002863"/>
+            <a:ext cx="2419036" cy="1911998"/>
+          </a:xfrm>
+          <a:prstGeom prst="rect">
+            <a:avLst/>
+          </a:prstGeom>
+          <a:noFill/>
+        </p:spPr>
+        <p:txBody>
+          <a:bodyPr wrap="square" rtlCol="0">
+            <a:spAutoFit/>
+          </a:bodyPr>
+          <a:lstStyle/>
+          <a:p>
+            <a:pPr marR="0" algn="l" rtl="0">
+              <a:lnSpc>
+                <a:spcPts val="1300"/>
+              </a:lnSpc>
+            </a:pPr>
+            <a:r>
+              <a:rPr lang="en-US" sz="1400" i="0" u="none" strike="noStrike" baseline="30000" dirty="0">
+                <a:solidFill>
+                  <a:schemeClr val="tx1">
+                    <a:lumMod val="65000"/>
+                    <a:lumOff val="35000"/>
+                  </a:schemeClr>
+                </a:solidFill>
+                <a:latin typeface="Microsoft JhengHei Light" panose="020B0304030504040204" pitchFamily="34" charset="-120"/>
+                <a:ea typeface="Microsoft JhengHei Light" panose="020B0304030504040204" pitchFamily="34" charset="-120"/>
+                <a:cs typeface="Arial" panose="020B0604020202020204" pitchFamily="34" charset="0"/>
+              </a:rPr>
+              <a:t>SIZE </a:t>
+            </a:r>
+          </a:p>
+          <a:p>
+            <a:pPr marR="0" algn="l" rtl="0">
+              <a:lnSpc>
+                <a:spcPts val="1300"/>
+              </a:lnSpc>
+            </a:pPr>
+            <a:r>
+              <a:rPr lang="en-US" sz="1400" i="0" u="none" strike="noStrike" baseline="30000" dirty="0">
+                <a:solidFill>
+                  <a:schemeClr val="tx1">
+                    <a:lumMod val="65000"/>
+                    <a:lumOff val="35000"/>
+                  </a:schemeClr>
+                </a:solidFill>
+                <a:latin typeface="Microsoft JhengHei Light" panose="020B0304030504040204" pitchFamily="34" charset="-120"/>
+                <a:ea typeface="Microsoft JhengHei Light" panose="020B0304030504040204" pitchFamily="34" charset="-120"/>
+                <a:cs typeface="Arial" panose="020B0604020202020204" pitchFamily="34" charset="0"/>
+              </a:rPr>
+              <a:t>CUSTOMER METRICS  </a:t>
+            </a:r>
+          </a:p>
+          <a:p>
+            <a:pPr marR="0" algn="l" rtl="0">
+              <a:lnSpc>
+                <a:spcPts val="1300"/>
+              </a:lnSpc>
+            </a:pPr>
+            <a:r>
+              <a:rPr lang="en-US" sz="1400" i="0" u="none" strike="noStrike" baseline="30000" dirty="0">
+                <a:solidFill>
+                  <a:schemeClr val="tx1">
+                    <a:lumMod val="65000"/>
+                    <a:lumOff val="35000"/>
+                  </a:schemeClr>
+                </a:solidFill>
+                <a:latin typeface="Microsoft JhengHei Light" panose="020B0304030504040204" pitchFamily="34" charset="-120"/>
+                <a:ea typeface="Microsoft JhengHei Light" panose="020B0304030504040204" pitchFamily="34" charset="-120"/>
+                <a:cs typeface="Arial" panose="020B0604020202020204" pitchFamily="34" charset="0"/>
+              </a:rPr>
+              <a:t>SHAPE </a:t>
+            </a:r>
+          </a:p>
+          <a:p>
+            <a:pPr marR="0" algn="l" rtl="0">
+              <a:lnSpc>
+                <a:spcPts val="1300"/>
+              </a:lnSpc>
+            </a:pPr>
+            <a:r>
+              <a:rPr lang="en-US" sz="1400" i="0" u="none" strike="noStrike" baseline="30000" dirty="0">
+                <a:solidFill>
+                  <a:schemeClr val="tx1">
+                    <a:lumMod val="65000"/>
+                    <a:lumOff val="35000"/>
+                  </a:schemeClr>
+                </a:solidFill>
+                <a:latin typeface="Microsoft JhengHei Light" panose="020B0304030504040204" pitchFamily="34" charset="-120"/>
+                <a:ea typeface="Microsoft JhengHei Light" panose="020B0304030504040204" pitchFamily="34" charset="-120"/>
+                <a:cs typeface="Arial" panose="020B0604020202020204" pitchFamily="34" charset="0"/>
+              </a:rPr>
+              <a:t>RUG QUALITY  </a:t>
+            </a:r>
+          </a:p>
+          <a:p>
+            <a:pPr marR="0" algn="l" rtl="0">
+              <a:lnSpc>
+                <a:spcPts val="1300"/>
+              </a:lnSpc>
+            </a:pPr>
+            <a:r>
+              <a:rPr lang="en-US" sz="1400" i="0" u="none" strike="noStrike" baseline="30000" dirty="0">
+                <a:solidFill>
+                  <a:schemeClr val="tx1">
+                    <a:lumMod val="65000"/>
+                    <a:lumOff val="35000"/>
+                  </a:schemeClr>
+                </a:solidFill>
+                <a:latin typeface="Microsoft JhengHei Light" panose="020B0304030504040204" pitchFamily="34" charset="-120"/>
+                <a:ea typeface="Microsoft JhengHei Light" panose="020B0304030504040204" pitchFamily="34" charset="-120"/>
+                <a:cs typeface="Arial" panose="020B0604020202020204" pitchFamily="34" charset="0"/>
+              </a:rPr>
+              <a:t>FIBRE CONTENT  </a:t>
+            </a:r>
+          </a:p>
+          <a:p>
+            <a:pPr marR="0" algn="l" rtl="0">
+              <a:lnSpc>
+                <a:spcPts val="1300"/>
+              </a:lnSpc>
+            </a:pPr>
+            <a:r>
+              <a:rPr lang="en-US" sz="1400" i="0" u="none" strike="noStrike" baseline="30000" dirty="0">
+                <a:solidFill>
+                  <a:schemeClr val="tx1">
+                    <a:lumMod val="65000"/>
+                    <a:lumOff val="35000"/>
+                  </a:schemeClr>
+                </a:solidFill>
+                <a:latin typeface="Microsoft JhengHei Light" panose="020B0304030504040204" pitchFamily="34" charset="-120"/>
+                <a:ea typeface="Microsoft JhengHei Light" panose="020B0304030504040204" pitchFamily="34" charset="-120"/>
+                <a:cs typeface="Arial" panose="020B0604020202020204" pitchFamily="34" charset="0"/>
+              </a:rPr>
+              <a:t>DYEING TECHNIQUE </a:t>
+            </a:r>
+          </a:p>
+          <a:p>
+            <a:pPr marR="0" algn="l" rtl="0">
+              <a:lnSpc>
+                <a:spcPts val="1300"/>
+              </a:lnSpc>
+            </a:pPr>
+            <a:r>
+              <a:rPr lang="en-US" sz="1400" i="0" u="none" strike="noStrike" baseline="30000" dirty="0">
+                <a:solidFill>
+                  <a:schemeClr val="tx1">
+                    <a:lumMod val="65000"/>
+                    <a:lumOff val="35000"/>
+                  </a:schemeClr>
+                </a:solidFill>
+                <a:latin typeface="Microsoft JhengHei Light" panose="020B0304030504040204" pitchFamily="34" charset="-120"/>
+                <a:ea typeface="Microsoft JhengHei Light" panose="020B0304030504040204" pitchFamily="34" charset="-120"/>
+                <a:cs typeface="Arial" panose="020B0604020202020204" pitchFamily="34" charset="0"/>
+              </a:rPr>
+              <a:t>FINISH EDGE </a:t>
+            </a:r>
+          </a:p>
+          <a:p>
+            <a:pPr marR="0" algn="l" rtl="0">
+              <a:lnSpc>
+                <a:spcPts val="1300"/>
+              </a:lnSpc>
+            </a:pPr>
+            <a:r>
+              <a:rPr lang="en-US" sz="1400" i="0" u="none" strike="noStrike" baseline="30000" dirty="0">
+                <a:solidFill>
+                  <a:schemeClr val="tx1">
+                    <a:lumMod val="65000"/>
+                    <a:lumOff val="35000"/>
+                  </a:schemeClr>
+                </a:solidFill>
+                <a:latin typeface="Microsoft JhengHei Light" panose="020B0304030504040204" pitchFamily="34" charset="-120"/>
+                <a:ea typeface="Microsoft JhengHei Light" panose="020B0304030504040204" pitchFamily="34" charset="-120"/>
+                <a:cs typeface="Arial" panose="020B0604020202020204" pitchFamily="34" charset="0"/>
+              </a:rPr>
+              <a:t>FINISH PILE HEIGHT  </a:t>
+            </a:r>
+          </a:p>
+          <a:p>
+            <a:pPr marR="0" algn="l" rtl="0">
+              <a:lnSpc>
+                <a:spcPts val="1300"/>
+              </a:lnSpc>
+            </a:pPr>
+            <a:r>
+              <a:rPr lang="en-US" sz="1400" i="0" u="none" strike="noStrike" baseline="30000" dirty="0">
+                <a:solidFill>
+                  <a:schemeClr val="tx1">
+                    <a:lumMod val="65000"/>
+                    <a:lumOff val="35000"/>
+                  </a:schemeClr>
+                </a:solidFill>
+                <a:latin typeface="Microsoft JhengHei Light" panose="020B0304030504040204" pitchFamily="34" charset="-120"/>
+                <a:ea typeface="Microsoft JhengHei Light" panose="020B0304030504040204" pitchFamily="34" charset="-120"/>
+                <a:cs typeface="Arial" panose="020B0604020202020204" pitchFamily="34" charset="0"/>
+              </a:rPr>
+              <a:t>FINISH PILE TYPE </a:t>
+            </a:r>
+          </a:p>
+          <a:p>
+            <a:pPr marR="0" algn="l" rtl="0">
+              <a:lnSpc>
+                <a:spcPts val="1300"/>
+              </a:lnSpc>
+            </a:pPr>
+            <a:r>
+              <a:rPr lang="en-US" sz="1400" i="0" u="none" strike="noStrike" baseline="30000" dirty="0">
+                <a:solidFill>
+                  <a:schemeClr val="tx1">
+                    <a:lumMod val="65000"/>
+                    <a:lumOff val="35000"/>
+                  </a:schemeClr>
+                </a:solidFill>
+                <a:latin typeface="Microsoft JhengHei Light" panose="020B0304030504040204" pitchFamily="34" charset="-120"/>
+                <a:ea typeface="Microsoft JhengHei Light" panose="020B0304030504040204" pitchFamily="34" charset="-120"/>
+                <a:cs typeface="Arial" panose="020B0604020202020204" pitchFamily="34" charset="0"/>
+              </a:rPr>
+              <a:t>FINISH BACKING </a:t>
+            </a:r>
+          </a:p>
+          <a:p>
+            <a:pPr marR="0" algn="l" rtl="0">
+              <a:lnSpc>
+                <a:spcPts val="1300"/>
+              </a:lnSpc>
+            </a:pPr>
+            <a:r>
+              <a:rPr lang="en-US" sz="1400" baseline="30000" dirty="0">
+                <a:solidFill>
+                  <a:schemeClr val="tx1">
+                    <a:lumMod val="65000"/>
+                    <a:lumOff val="35000"/>
+                  </a:schemeClr>
+                </a:solidFill>
+                <a:latin typeface="Microsoft JhengHei Light" panose="020B0304030504040204" pitchFamily="34" charset="-120"/>
+                <a:ea typeface="Microsoft JhengHei Light" panose="020B0304030504040204" pitchFamily="34" charset="-120"/>
+                <a:cs typeface="Arial" panose="020B0604020202020204" pitchFamily="34" charset="0"/>
+              </a:rPr>
+              <a:t>FINISH WASH </a:t>
+            </a:r>
+            <a:endParaRPr lang="en-US" sz="1400" i="0" u="none" strike="noStrike" baseline="30000" dirty="0">
+              <a:solidFill>
+                <a:schemeClr val="tx1">
+                  <a:lumMod val="65000"/>
+                  <a:lumOff val="35000"/>
+                </a:schemeClr>
+              </a:solidFill>
+              <a:latin typeface="Microsoft JhengHei Light" panose="020B0304030504040204" pitchFamily="34" charset="-120"/>
+              <a:ea typeface="Microsoft JhengHei Light" panose="020B0304030504040204" pitchFamily="34" charset="-120"/>
+              <a:cs typeface="Arial" panose="020B0604020202020204" pitchFamily="34" charset="0"/>
+            </a:endParaRPr>
+          </a:p>
+        </p:txBody>
+      </p:sp>
+      <p:grpSp>
+        <p:nvGrpSpPr>
+          <p:cNvPr id="14" name="Group 13">
+            <a:extLst>
+              <a:ext uri="{FF2B5EF4-FFF2-40B4-BE49-F238E27FC236}">
+                <a16:creationId xmlns:a16="http://schemas.microsoft.com/office/drawing/2014/main" id="{34C7A1E9-24C3-BE44-C35E-3112841CAFDB}"/>
+              </a:ext>
+            </a:extLst>
+          </p:cNvPr>
+          <p:cNvGrpSpPr/>
+          <p:nvPr/>
+        </p:nvGrpSpPr>
+        <p:grpSpPr>
+          <a:xfrm>
+            <a:off x="896651" y="1675602"/>
+            <a:ext cx="3658415" cy="5652052"/>
+            <a:chOff x="251699" y="2183122"/>
+            <a:chExt cx="4789373" cy="3867260"/>
+          </a:xfrm>
+        </p:grpSpPr>
+        <p:cxnSp>
+          <p:nvCxnSpPr>
+            <p:cNvPr id="51" name="Straight Arrow Connector 50">
+              <a:extLst>
+                <a:ext uri="{FF2B5EF4-FFF2-40B4-BE49-F238E27FC236}">
+                  <a16:creationId xmlns:a16="http://schemas.microsoft.com/office/drawing/2014/main" id="{3B2A2DEA-E767-CEB0-84A3-8121CC401787}"/>
+                </a:ext>
+              </a:extLst>
+            </p:cNvPr>
+            <p:cNvCxnSpPr>
+              <a:cxnSpLocks/>
+            </p:cNvCxnSpPr>
+            <p:nvPr/>
+          </p:nvCxnSpPr>
+          <p:spPr>
+            <a:xfrm>
+              <a:off x="251699" y="6050382"/>
+              <a:ext cx="4684761" cy="0"/>
+            </a:xfrm>
+            <a:prstGeom prst="straightConnector1">
+              <a:avLst/>
+            </a:prstGeom>
+            <a:ln w="12700">
+              <a:solidFill>
+                <a:schemeClr val="tx1">
+                  <a:lumMod val="65000"/>
+                  <a:lumOff val="35000"/>
+                </a:schemeClr>
+              </a:solidFill>
+              <a:headEnd type="triangle"/>
+              <a:tailEnd type="triangle"/>
+            </a:ln>
+          </p:spPr>
+          <p:style>
+            <a:lnRef idx="1">
+              <a:schemeClr val="accent1"/>
+            </a:lnRef>
+            <a:fillRef idx="0">
+              <a:schemeClr val="accent1"/>
+            </a:fillRef>
+            <a:effectRef idx="0">
+              <a:schemeClr val="accent1"/>
+            </a:effectRef>
+            <a:fontRef idx="minor">
+              <a:schemeClr val="tx1"/>
+            </a:fontRef>
+          </p:style>
+        </p:cxnSp>
+        <p:cxnSp>
+          <p:nvCxnSpPr>
+            <p:cNvPr id="22" name="Straight Arrow Connector 21">
+              <a:extLst>
+                <a:ext uri="{FF2B5EF4-FFF2-40B4-BE49-F238E27FC236}">
+                  <a16:creationId xmlns:a16="http://schemas.microsoft.com/office/drawing/2014/main" id="{22713410-FBBA-99AB-AB3E-7DE6E9D79960}"/>
+                </a:ext>
+              </a:extLst>
+            </p:cNvPr>
+            <p:cNvCxnSpPr>
+              <a:cxnSpLocks/>
+            </p:cNvCxnSpPr>
+            <p:nvPr/>
+          </p:nvCxnSpPr>
+          <p:spPr>
+            <a:xfrm flipH="1">
+              <a:off x="5023105" y="2183122"/>
+              <a:ext cx="17967" cy="3824646"/>
+            </a:xfrm>
+            <a:prstGeom prst="straightConnector1">
+              <a:avLst/>
+            </a:prstGeom>
+            <a:ln w="12700">
+              <a:solidFill>
+                <a:schemeClr val="tx1">
+                  <a:lumMod val="65000"/>
+                  <a:lumOff val="35000"/>
+                </a:schemeClr>
+              </a:solidFill>
+              <a:headEnd type="triangle"/>
+              <a:tailEnd type="triangle"/>
+            </a:ln>
+          </p:spPr>
+          <p:style>
+            <a:lnRef idx="1">
+              <a:schemeClr val="accent1"/>
+            </a:lnRef>
+            <a:fillRef idx="0">
+              <a:schemeClr val="accent1"/>
+            </a:fillRef>
+            <a:effectRef idx="0">
+              <a:schemeClr val="accent1"/>
+            </a:effectRef>
+            <a:fontRef idx="minor">
+              <a:schemeClr val="tx1"/>
+            </a:fontRef>
+          </p:style>
+        </p:cxnSp>
+      </p:grpSp>
+      <p:sp>
+        <p:nvSpPr>
+          <p:cNvPr id="41" name="TextBox 40">
+            <a:extLst>
+              <a:ext uri="{FF2B5EF4-FFF2-40B4-BE49-F238E27FC236}">
+                <a16:creationId xmlns:a16="http://schemas.microsoft.com/office/drawing/2014/main" id="{6C8ACADF-DC93-E807-64B2-FAE32782CBAF}"/>
+              </a:ext>
+            </a:extLst>
+          </p:cNvPr>
+          <p:cNvSpPr txBox="1"/>
+          <p:nvPr/>
+        </p:nvSpPr>
+        <p:spPr>
+          <a:xfrm>
+            <a:off x="1793124" y="8002864"/>
+            <a:ext cx="2117540" cy="1911998"/>
+          </a:xfrm>
+          <a:prstGeom prst="rect">
+            <a:avLst/>
+          </a:prstGeom>
+          <a:noFill/>
+        </p:spPr>
+        <p:txBody>
+          <a:bodyPr wrap="square" rtlCol="0">
+            <a:spAutoFit/>
+          </a:bodyPr>
+          <a:lstStyle/>
+          <a:p>
+            <a:pPr marR="0" algn="l" rtl="0">
+              <a:lnSpc>
+                <a:spcPts val="1300"/>
+              </a:lnSpc>
+            </a:pPr>
+            <a:r>
+              <a:rPr lang="en-US" sz="1400" baseline="30000" dirty="0">
+                <a:solidFill>
+                  <a:schemeClr val="tx1">
+                    <a:lumMod val="65000"/>
+                    <a:lumOff val="35000"/>
+                  </a:schemeClr>
+                </a:solidFill>
+                <a:latin typeface="Microsoft JhengHei Light" panose="020B0304030504040204" pitchFamily="34" charset="-120"/>
+                <a:ea typeface="Microsoft JhengHei Light" panose="020B0304030504040204" pitchFamily="34" charset="-120"/>
+                <a:cs typeface="Arial" panose="020B0604020202020204" pitchFamily="34" charset="0"/>
+              </a:rPr>
+              <a:t>: 5’FEET X 8’FEET </a:t>
+            </a:r>
+            <a:br>
+              <a:rPr lang="en-US" sz="1400" baseline="30000" dirty="0">
+                <a:solidFill>
+                  <a:schemeClr val="tx1">
+                    <a:lumMod val="65000"/>
+                    <a:lumOff val="35000"/>
+                  </a:schemeClr>
+                </a:solidFill>
+                <a:latin typeface="Microsoft JhengHei Light" panose="020B0304030504040204" pitchFamily="34" charset="-120"/>
+                <a:ea typeface="Microsoft JhengHei Light" panose="020B0304030504040204" pitchFamily="34" charset="-120"/>
+                <a:cs typeface="Arial" panose="020B0604020202020204" pitchFamily="34" charset="0"/>
+              </a:rPr>
+            </a:br>
+            <a:r>
+              <a:rPr lang="en-US" sz="1400" baseline="30000" dirty="0">
+                <a:solidFill>
+                  <a:schemeClr val="tx1">
+                    <a:lumMod val="65000"/>
+                    <a:lumOff val="35000"/>
+                  </a:schemeClr>
+                </a:solidFill>
+                <a:latin typeface="Microsoft JhengHei Light" panose="020B0304030504040204" pitchFamily="34" charset="-120"/>
+                <a:ea typeface="Microsoft JhengHei Light" panose="020B0304030504040204" pitchFamily="34" charset="-120"/>
+                <a:cs typeface="Arial" panose="020B0604020202020204" pitchFamily="34" charset="0"/>
+              </a:rPr>
+              <a:t>: FEET</a:t>
+            </a:r>
+            <a:br>
+              <a:rPr lang="en-US" sz="1400" baseline="30000" dirty="0">
+                <a:solidFill>
+                  <a:schemeClr val="tx1">
+                    <a:lumMod val="65000"/>
+                    <a:lumOff val="35000"/>
+                  </a:schemeClr>
+                </a:solidFill>
+                <a:latin typeface="Microsoft JhengHei Light" panose="020B0304030504040204" pitchFamily="34" charset="-120"/>
+                <a:ea typeface="Microsoft JhengHei Light" panose="020B0304030504040204" pitchFamily="34" charset="-120"/>
+                <a:cs typeface="Arial" panose="020B0604020202020204" pitchFamily="34" charset="0"/>
+              </a:rPr>
+            </a:br>
+            <a:r>
+              <a:rPr lang="en-US" sz="1400" baseline="30000" dirty="0">
+                <a:solidFill>
+                  <a:schemeClr val="tx1">
+                    <a:lumMod val="65000"/>
+                    <a:lumOff val="35000"/>
+                  </a:schemeClr>
+                </a:solidFill>
+                <a:latin typeface="Microsoft JhengHei Light" panose="020B0304030504040204" pitchFamily="34" charset="-120"/>
+                <a:ea typeface="Microsoft JhengHei Light" panose="020B0304030504040204" pitchFamily="34" charset="-120"/>
+                <a:cs typeface="Arial" panose="020B0604020202020204" pitchFamily="34" charset="0"/>
+              </a:rPr>
+              <a:t>: RCT </a:t>
+            </a:r>
+            <a:br>
+              <a:rPr lang="en-US" sz="1400" baseline="30000" dirty="0">
+                <a:solidFill>
+                  <a:schemeClr val="tx1">
+                    <a:lumMod val="65000"/>
+                    <a:lumOff val="35000"/>
+                  </a:schemeClr>
+                </a:solidFill>
+                <a:latin typeface="Microsoft JhengHei Light" panose="020B0304030504040204" pitchFamily="34" charset="-120"/>
+                <a:ea typeface="Microsoft JhengHei Light" panose="020B0304030504040204" pitchFamily="34" charset="-120"/>
+                <a:cs typeface="Arial" panose="020B0604020202020204" pitchFamily="34" charset="0"/>
+              </a:rPr>
+            </a:br>
+            <a:r>
+              <a:rPr lang="en-US" sz="1400" baseline="30000" dirty="0">
+                <a:solidFill>
+                  <a:schemeClr val="tx1">
+                    <a:lumMod val="65000"/>
+                    <a:lumOff val="35000"/>
+                  </a:schemeClr>
+                </a:solidFill>
+                <a:latin typeface="Microsoft JhengHei Light" panose="020B0304030504040204" pitchFamily="34" charset="-120"/>
+                <a:ea typeface="Microsoft JhengHei Light" panose="020B0304030504040204" pitchFamily="34" charset="-120"/>
+                <a:cs typeface="Arial" panose="020B0604020202020204" pitchFamily="34" charset="0"/>
+              </a:rPr>
+              <a:t>: Hand Knotted 14/14 MS PS </a:t>
+            </a:r>
+            <a:br>
+              <a:rPr lang="en-US" sz="1400" baseline="30000" dirty="0">
+                <a:solidFill>
+                  <a:schemeClr val="tx1">
+                    <a:lumMod val="65000"/>
+                    <a:lumOff val="35000"/>
+                  </a:schemeClr>
+                </a:solidFill>
+                <a:latin typeface="Microsoft JhengHei Light" panose="020B0304030504040204" pitchFamily="34" charset="-120"/>
+                <a:ea typeface="Microsoft JhengHei Light" panose="020B0304030504040204" pitchFamily="34" charset="-120"/>
+                <a:cs typeface="Arial" panose="020B0604020202020204" pitchFamily="34" charset="0"/>
+              </a:rPr>
+            </a:br>
+            <a:r>
+              <a:rPr lang="en-US" sz="1400" baseline="30000" dirty="0">
+                <a:solidFill>
+                  <a:schemeClr val="tx1">
+                    <a:lumMod val="65000"/>
+                    <a:lumOff val="35000"/>
+                  </a:schemeClr>
+                </a:solidFill>
+                <a:latin typeface="Microsoft JhengHei Light" panose="020B0304030504040204" pitchFamily="34" charset="-120"/>
+                <a:ea typeface="Microsoft JhengHei Light" panose="020B0304030504040204" pitchFamily="34" charset="-120"/>
+                <a:cs typeface="Arial" panose="020B0604020202020204" pitchFamily="34" charset="0"/>
+              </a:rPr>
+              <a:t>: Silk</a:t>
+            </a:r>
+            <a:br>
+              <a:rPr lang="en-US" sz="1400" baseline="30000" dirty="0">
+                <a:solidFill>
+                  <a:schemeClr val="tx1">
+                    <a:lumMod val="65000"/>
+                    <a:lumOff val="35000"/>
+                  </a:schemeClr>
+                </a:solidFill>
+                <a:latin typeface="Microsoft JhengHei Light" panose="020B0304030504040204" pitchFamily="34" charset="-120"/>
+                <a:ea typeface="Microsoft JhengHei Light" panose="020B0304030504040204" pitchFamily="34" charset="-120"/>
+                <a:cs typeface="Arial" panose="020B0604020202020204" pitchFamily="34" charset="0"/>
+              </a:rPr>
+            </a:br>
+            <a:r>
+              <a:rPr lang="en-US" sz="1400" baseline="30000" dirty="0">
+                <a:solidFill>
+                  <a:schemeClr val="tx1">
+                    <a:lumMod val="65000"/>
+                    <a:lumOff val="35000"/>
+                  </a:schemeClr>
+                </a:solidFill>
+                <a:latin typeface="Microsoft JhengHei Light" panose="020B0304030504040204" pitchFamily="34" charset="-120"/>
+                <a:ea typeface="Microsoft JhengHei Light" panose="020B0304030504040204" pitchFamily="34" charset="-120"/>
+                <a:cs typeface="Arial" panose="020B0604020202020204" pitchFamily="34" charset="0"/>
+              </a:rPr>
+              <a:t>: </a:t>
+            </a:r>
+            <a:r>
+              <a:rPr lang="en-US" sz="1400" i="0" u="none" strike="noStrike" baseline="30000" dirty="0">
+                <a:solidFill>
+                  <a:schemeClr val="tx1">
+                    <a:lumMod val="65000"/>
+                    <a:lumOff val="35000"/>
+                  </a:schemeClr>
+                </a:solidFill>
+                <a:latin typeface="Microsoft JhengHei Light" panose="020B0304030504040204" pitchFamily="34" charset="-120"/>
+                <a:ea typeface="Microsoft JhengHei Light" panose="020B0304030504040204" pitchFamily="34" charset="-120"/>
+                <a:cs typeface="Arial" panose="020B0604020202020204" pitchFamily="34" charset="0"/>
+              </a:rPr>
+              <a:t>Standard</a:t>
+            </a:r>
+          </a:p>
+          <a:p>
+            <a:pPr marR="0" algn="l" rtl="0">
+              <a:lnSpc>
+                <a:spcPts val="1300"/>
+              </a:lnSpc>
+            </a:pPr>
+            <a:r>
+              <a:rPr lang="en-US" sz="1400" i="0" u="none" strike="noStrike" baseline="30000" dirty="0">
+                <a:solidFill>
+                  <a:schemeClr val="tx1">
+                    <a:lumMod val="65000"/>
+                    <a:lumOff val="35000"/>
+                  </a:schemeClr>
+                </a:solidFill>
+                <a:latin typeface="Microsoft JhengHei Light" panose="020B0304030504040204" pitchFamily="34" charset="-120"/>
+                <a:ea typeface="Microsoft JhengHei Light" panose="020B0304030504040204" pitchFamily="34" charset="-120"/>
+                <a:cs typeface="Arial" panose="020B0604020202020204" pitchFamily="34" charset="0"/>
+              </a:rPr>
+              <a:t>: 4 side binding </a:t>
+            </a:r>
+          </a:p>
+          <a:p>
+            <a:pPr marR="0" algn="l" rtl="0">
+              <a:lnSpc>
+                <a:spcPts val="1300"/>
+              </a:lnSpc>
+            </a:pPr>
+            <a:r>
+              <a:rPr lang="en-US" sz="1400" baseline="30000" dirty="0">
+                <a:solidFill>
+                  <a:schemeClr val="tx1">
+                    <a:lumMod val="65000"/>
+                    <a:lumOff val="35000"/>
+                  </a:schemeClr>
+                </a:solidFill>
+                <a:latin typeface="Microsoft JhengHei Light" panose="020B0304030504040204" pitchFamily="34" charset="-120"/>
+                <a:ea typeface="Microsoft JhengHei Light" panose="020B0304030504040204" pitchFamily="34" charset="-120"/>
+                <a:cs typeface="Arial" panose="020B0604020202020204" pitchFamily="34" charset="0"/>
+              </a:rPr>
+              <a:t>: Standard</a:t>
+            </a:r>
+            <a:endParaRPr lang="en-US" sz="1400" i="0" u="none" strike="noStrike" baseline="30000" dirty="0">
+              <a:solidFill>
+                <a:schemeClr val="tx1">
+                  <a:lumMod val="65000"/>
+                  <a:lumOff val="35000"/>
+                </a:schemeClr>
+              </a:solidFill>
+              <a:latin typeface="Microsoft JhengHei Light" panose="020B0304030504040204" pitchFamily="34" charset="-120"/>
+              <a:ea typeface="Microsoft JhengHei Light" panose="020B0304030504040204" pitchFamily="34" charset="-120"/>
+              <a:cs typeface="Arial" panose="020B0604020202020204" pitchFamily="34" charset="0"/>
+            </a:endParaRPr>
+          </a:p>
+          <a:p>
+            <a:pPr marR="0" algn="l" rtl="0">
+              <a:lnSpc>
+                <a:spcPts val="1300"/>
+              </a:lnSpc>
+            </a:pPr>
+            <a:r>
+              <a:rPr lang="en-US" sz="1400" i="0" u="none" strike="noStrike" baseline="30000" dirty="0">
+                <a:solidFill>
+                  <a:schemeClr val="tx1">
+                    <a:lumMod val="65000"/>
+                    <a:lumOff val="35000"/>
+                  </a:schemeClr>
+                </a:solidFill>
+                <a:latin typeface="Microsoft JhengHei Light" panose="020B0304030504040204" pitchFamily="34" charset="-120"/>
+                <a:ea typeface="Microsoft JhengHei Light" panose="020B0304030504040204" pitchFamily="34" charset="-120"/>
+                <a:cs typeface="Arial" panose="020B0604020202020204" pitchFamily="34" charset="0"/>
+              </a:rPr>
+              <a:t>: Cut Pile</a:t>
+            </a:r>
+            <a:br>
+              <a:rPr lang="en-US" sz="1400" baseline="30000" dirty="0">
+                <a:solidFill>
+                  <a:schemeClr val="tx1">
+                    <a:lumMod val="65000"/>
+                    <a:lumOff val="35000"/>
+                  </a:schemeClr>
+                </a:solidFill>
+                <a:latin typeface="Microsoft JhengHei Light" panose="020B0304030504040204" pitchFamily="34" charset="-120"/>
+                <a:ea typeface="Microsoft JhengHei Light" panose="020B0304030504040204" pitchFamily="34" charset="-120"/>
+                <a:cs typeface="Arial" panose="020B0604020202020204" pitchFamily="34" charset="0"/>
+              </a:rPr>
+            </a:br>
+            <a:r>
+              <a:rPr lang="en-US" sz="1400" baseline="30000" dirty="0">
+                <a:solidFill>
+                  <a:schemeClr val="tx1">
+                    <a:lumMod val="65000"/>
+                    <a:lumOff val="35000"/>
+                  </a:schemeClr>
+                </a:solidFill>
+                <a:latin typeface="Microsoft JhengHei Light" panose="020B0304030504040204" pitchFamily="34" charset="-120"/>
+                <a:ea typeface="Microsoft JhengHei Light" panose="020B0304030504040204" pitchFamily="34" charset="-120"/>
+                <a:cs typeface="Arial" panose="020B0604020202020204" pitchFamily="34" charset="0"/>
+              </a:rPr>
+              <a:t>: NO </a:t>
+            </a:r>
+            <a:r>
+              <a:rPr lang="en-US" sz="1400" i="0" u="none" strike="noStrike" baseline="30000" dirty="0">
+                <a:solidFill>
+                  <a:schemeClr val="tx1">
+                    <a:lumMod val="65000"/>
+                    <a:lumOff val="35000"/>
+                  </a:schemeClr>
+                </a:solidFill>
+                <a:latin typeface="Microsoft JhengHei Light" panose="020B0304030504040204" pitchFamily="34" charset="-120"/>
+                <a:ea typeface="Microsoft JhengHei Light" panose="020B0304030504040204" pitchFamily="34" charset="-120"/>
+                <a:cs typeface="Arial" panose="020B0604020202020204" pitchFamily="34" charset="0"/>
+              </a:rPr>
+              <a:t>Backing </a:t>
+            </a:r>
+          </a:p>
+          <a:p>
+            <a:pPr marR="0" algn="l" rtl="0">
+              <a:lnSpc>
+                <a:spcPts val="1300"/>
+              </a:lnSpc>
+            </a:pPr>
+            <a:r>
+              <a:rPr lang="en-US" sz="1400" i="0" u="none" strike="noStrike" baseline="30000" dirty="0">
+                <a:solidFill>
+                  <a:schemeClr val="tx1">
+                    <a:lumMod val="65000"/>
+                    <a:lumOff val="35000"/>
+                  </a:schemeClr>
+                </a:solidFill>
+                <a:latin typeface="Microsoft JhengHei Light" panose="020B0304030504040204" pitchFamily="34" charset="-120"/>
+                <a:ea typeface="Microsoft JhengHei Light" panose="020B0304030504040204" pitchFamily="34" charset="-120"/>
+                <a:cs typeface="Arial" panose="020B0604020202020204" pitchFamily="34" charset="0"/>
+              </a:rPr>
+              <a:t>: Standard</a:t>
+            </a:r>
+          </a:p>
+        </p:txBody>
+      </p:sp>
+      <p:pic>
+        <p:nvPicPr>
+          <p:cNvPr id="5" name="Picture 4">
+            <a:extLst>
+              <a:ext uri="{FF2B5EF4-FFF2-40B4-BE49-F238E27FC236}">
+                <a16:creationId xmlns:a16="http://schemas.microsoft.com/office/drawing/2014/main" id="{064B356A-45E5-0DE4-4838-737625A5B1B0}"/>
+              </a:ext>
+            </a:extLst>
+          </p:cNvPr>
+          <p:cNvPicPr>
+            <a:picLocks noChangeAspect="1"/>
+          </p:cNvPicPr>
+          <p:nvPr/>
+        </p:nvPicPr>
+        <p:blipFill rotWithShape="1">
+          <a:blip r:embed="rId4">
+            <a:extLst>
+              <a:ext uri="{28A0092B-C50C-407E-A947-70E740481C1C}">
+                <a14:useLocalDpi xmlns:a14="http://schemas.microsoft.com/office/drawing/2010/main" val="0"/>
+              </a:ext>
+            </a:extLst>
+          </a:blip>
+          <a:srcRect l="20526" t="48840" r="18681" b="45910"/>
+          <a:stretch/>
+        </p:blipFill>
+        <p:spPr>
+          <a:xfrm>
+            <a:off x="272504" y="206421"/>
+            <a:ext cx="2008477" cy="308444"/>
+          </a:xfrm>
+          <a:prstGeom prst="rect">
+            <a:avLst/>
+          </a:prstGeom>
+        </p:spPr>
+      </p:pic>
+      <p:cxnSp>
+        <p:nvCxnSpPr>
+          <p:cNvPr id="36" name="Straight Connector 35">
+            <a:extLst>
+              <a:ext uri="{FF2B5EF4-FFF2-40B4-BE49-F238E27FC236}">
+                <a16:creationId xmlns:a16="http://schemas.microsoft.com/office/drawing/2014/main" id="{F5471E22-08E4-B917-8EC7-A4BFDF528DF6}"/>
+              </a:ext>
+            </a:extLst>
+          </p:cNvPr>
+          <p:cNvCxnSpPr>
+            <a:cxnSpLocks/>
+          </p:cNvCxnSpPr>
+          <p:nvPr/>
+        </p:nvCxnSpPr>
+        <p:spPr>
+          <a:xfrm>
+            <a:off x="2123089" y="452127"/>
+            <a:ext cx="5659821" cy="22336"/>
+          </a:xfrm>
+          <a:prstGeom prst="line">
+            <a:avLst/>
+          </a:prstGeom>
+          <a:ln w="3175">
+            <a:solidFill>
+              <a:schemeClr val="accent2"/>
+            </a:solidFill>
+          </a:ln>
+        </p:spPr>
+        <p:style>
+          <a:lnRef idx="3">
+            <a:schemeClr val="dk1"/>
+          </a:lnRef>
+          <a:fillRef idx="0">
+            <a:schemeClr val="dk1"/>
+          </a:fillRef>
+          <a:effectRef idx="2">
+            <a:schemeClr val="dk1"/>
+          </a:effectRef>
+          <a:fontRef idx="minor">
+            <a:schemeClr val="tx1"/>
+          </a:fontRef>
+        </p:style>
+      </p:cxnSp>
+      <p:sp>
+        <p:nvSpPr>
+          <p:cNvPr id="37" name="TextBox 36">
+            <a:extLst>
+              <a:ext uri="{FF2B5EF4-FFF2-40B4-BE49-F238E27FC236}">
+                <a16:creationId xmlns:a16="http://schemas.microsoft.com/office/drawing/2014/main" id="{99D1BA4F-0754-8E9B-796C-7792974F3664}"/>
+              </a:ext>
+            </a:extLst>
+          </p:cNvPr>
+          <p:cNvSpPr txBox="1"/>
+          <p:nvPr/>
+        </p:nvSpPr>
+        <p:spPr>
+          <a:xfrm>
+            <a:off x="243953" y="775433"/>
+            <a:ext cx="5659821" cy="400110"/>
+          </a:xfrm>
+          <a:prstGeom prst="rect">
+            <a:avLst/>
+          </a:prstGeom>
+          <a:noFill/>
+        </p:spPr>
+        <p:txBody>
+          <a:bodyPr wrap="square" rtlCol="0">
+            <a:spAutoFit/>
+          </a:bodyPr>
+          <a:lstStyle/>
+          <a:p>
+            <a:r>
+              <a:rPr lang="en-US" sz="1000" b="1" u="sng" dirty="0">
+                <a:solidFill>
+                  <a:srgbClr val="C00000"/>
+                </a:solidFill>
+                <a:latin typeface="Microsoft JhengHei" panose="020B0604030504040204" pitchFamily="34" charset="-120"/>
+                <a:ea typeface="Microsoft JhengHei" panose="020B0604030504040204" pitchFamily="34" charset="-120"/>
+                <a:cs typeface="Arial" panose="020B0604020202020204" pitchFamily="34" charset="0"/>
+              </a:rPr>
+              <a:t>PD-14229-ASL-05 Apple Green 0201-15 Gold Brown 0502-15-Revision</a:t>
+            </a:r>
+          </a:p>
+          <a:p>
+            <a:r>
+              <a:rPr lang="en-US" sz="1000" b="1" u="sng" dirty="0">
+                <a:solidFill>
+                  <a:srgbClr val="C00000"/>
+                </a:solidFill>
+                <a:latin typeface="Microsoft JhengHei" panose="020B0604030504040204" pitchFamily="34" charset="-120"/>
+                <a:ea typeface="Microsoft JhengHei" panose="020B0604030504040204" pitchFamily="34" charset="-120"/>
+                <a:cs typeface="Arial" panose="020B0604020202020204" pitchFamily="34" charset="0"/>
+              </a:rPr>
+              <a:t>Option-2</a:t>
+            </a:r>
+          </a:p>
+        </p:txBody>
+      </p:sp>
+      <p:sp>
+        <p:nvSpPr>
+          <p:cNvPr id="38" name="TextBox 37">
+            <a:extLst>
+              <a:ext uri="{FF2B5EF4-FFF2-40B4-BE49-F238E27FC236}">
+                <a16:creationId xmlns:a16="http://schemas.microsoft.com/office/drawing/2014/main" id="{C9706048-ABAA-2C83-5B60-1CEA07E2B2AA}"/>
+              </a:ext>
+            </a:extLst>
+          </p:cNvPr>
+          <p:cNvSpPr txBox="1"/>
+          <p:nvPr/>
+        </p:nvSpPr>
+        <p:spPr>
+          <a:xfrm>
+            <a:off x="243953" y="522581"/>
+            <a:ext cx="4479052" cy="307777"/>
+          </a:xfrm>
+          <a:prstGeom prst="rect">
+            <a:avLst/>
+          </a:prstGeom>
+          <a:noFill/>
+        </p:spPr>
+        <p:txBody>
+          <a:bodyPr wrap="square" rtlCol="0">
+            <a:spAutoFit/>
+          </a:bodyPr>
+          <a:lstStyle/>
+          <a:p>
+            <a:r>
+              <a:rPr lang="en-US" sz="1400" b="1" u="sng" dirty="0">
+                <a:solidFill>
+                  <a:schemeClr val="tx1">
+                    <a:lumMod val="50000"/>
+                    <a:lumOff val="50000"/>
+                  </a:schemeClr>
+                </a:solidFill>
+                <a:latin typeface="Microsoft JhengHei Light" panose="020B0304030504040204" pitchFamily="34" charset="-120"/>
+                <a:ea typeface="Microsoft JhengHei Light" panose="020B0304030504040204" pitchFamily="34" charset="-120"/>
+              </a:rPr>
+              <a:t>Construction : Hand Knotted 14/14 MS PS</a:t>
+            </a:r>
+          </a:p>
+        </p:txBody>
+      </p:sp>
+      <p:sp>
+        <p:nvSpPr>
+          <p:cNvPr id="33" name="TextBox 32">
+            <a:extLst>
+              <a:ext uri="{FF2B5EF4-FFF2-40B4-BE49-F238E27FC236}">
+                <a16:creationId xmlns:a16="http://schemas.microsoft.com/office/drawing/2014/main" id="{EFD51E7B-EE92-EF6C-A025-7687F0EF173B}"/>
+              </a:ext>
+            </a:extLst>
+          </p:cNvPr>
+          <p:cNvSpPr txBox="1"/>
+          <p:nvPr/>
+        </p:nvSpPr>
+        <p:spPr>
+          <a:xfrm rot="16200000">
+            <a:off x="3785370" y="3803959"/>
+            <a:ext cx="1939846" cy="246221"/>
+          </a:xfrm>
+          <a:prstGeom prst="rect">
+            <a:avLst/>
+          </a:prstGeom>
+          <a:noFill/>
+        </p:spPr>
+        <p:txBody>
+          <a:bodyPr wrap="square" rtlCol="0">
+            <a:spAutoFit/>
+          </a:bodyPr>
+          <a:lstStyle/>
+          <a:p>
+            <a:r>
+              <a:rPr lang="en-US" sz="1000" dirty="0">
+                <a:solidFill>
+                  <a:schemeClr val="tx1">
+                    <a:lumMod val="65000"/>
+                    <a:lumOff val="35000"/>
+                  </a:schemeClr>
+                </a:solidFill>
+                <a:latin typeface="Microsoft JhengHei" panose="020B0604030504040204" pitchFamily="34" charset="-120"/>
+                <a:ea typeface="Microsoft JhengHei" panose="020B0604030504040204" pitchFamily="34" charset="-120"/>
+                <a:cs typeface="Arial" panose="020B0604020202020204" pitchFamily="34" charset="0"/>
+              </a:rPr>
+              <a:t>8’FEET</a:t>
+            </a:r>
+          </a:p>
+        </p:txBody>
+      </p:sp>
+      <p:sp>
+        <p:nvSpPr>
+          <p:cNvPr id="42" name="TextBox 41">
+            <a:extLst>
+              <a:ext uri="{FF2B5EF4-FFF2-40B4-BE49-F238E27FC236}">
+                <a16:creationId xmlns:a16="http://schemas.microsoft.com/office/drawing/2014/main" id="{71D9A8DA-F041-A815-3138-60E52030D9AF}"/>
+              </a:ext>
+            </a:extLst>
+          </p:cNvPr>
+          <p:cNvSpPr txBox="1"/>
+          <p:nvPr/>
+        </p:nvSpPr>
+        <p:spPr>
+          <a:xfrm>
+            <a:off x="2398814" y="7367070"/>
+            <a:ext cx="1939846" cy="246221"/>
+          </a:xfrm>
+          <a:prstGeom prst="rect">
+            <a:avLst/>
+          </a:prstGeom>
+          <a:noFill/>
+        </p:spPr>
+        <p:txBody>
+          <a:bodyPr wrap="square" rtlCol="0">
+            <a:spAutoFit/>
+          </a:bodyPr>
+          <a:lstStyle/>
+          <a:p>
+            <a:r>
+              <a:rPr lang="en-US" sz="1000" dirty="0">
+                <a:solidFill>
+                  <a:schemeClr val="tx1">
+                    <a:lumMod val="65000"/>
+                    <a:lumOff val="35000"/>
+                  </a:schemeClr>
+                </a:solidFill>
+                <a:latin typeface="Microsoft JhengHei" panose="020B0604030504040204" pitchFamily="34" charset="-120"/>
+                <a:ea typeface="Microsoft JhengHei" panose="020B0604030504040204" pitchFamily="34" charset="-120"/>
+                <a:cs typeface="Arial" panose="020B0604020202020204" pitchFamily="34" charset="0"/>
+              </a:rPr>
+              <a:t>5’FEET</a:t>
+            </a:r>
+          </a:p>
+        </p:txBody>
+      </p:sp>
+      <p:sp>
+        <p:nvSpPr>
+          <p:cNvPr id="43" name="Rectangle 42">
+            <a:extLst>
+              <a:ext uri="{FF2B5EF4-FFF2-40B4-BE49-F238E27FC236}">
+                <a16:creationId xmlns:a16="http://schemas.microsoft.com/office/drawing/2014/main" id="{3FE67FF7-9599-DFBB-9C05-DDBDCD2B6A4F}"/>
+              </a:ext>
+            </a:extLst>
+          </p:cNvPr>
+          <p:cNvSpPr/>
+          <p:nvPr/>
+        </p:nvSpPr>
+        <p:spPr>
+          <a:xfrm>
+            <a:off x="3304674" y="10843918"/>
+            <a:ext cx="4129847" cy="824565"/>
+          </a:xfrm>
+          <a:prstGeom prst="rect">
+            <a:avLst/>
+          </a:prstGeom>
+          <a:noFill/>
+          <a:ln>
+            <a:solidFill>
+              <a:schemeClr val="tx1">
+                <a:lumMod val="50000"/>
+                <a:lumOff val="50000"/>
+              </a:schemeClr>
+            </a:solidFill>
+          </a:ln>
+        </p:spPr>
+        <p:style>
+          <a:lnRef idx="2">
+            <a:schemeClr val="accent1">
+              <a:shade val="15000"/>
+            </a:schemeClr>
+          </a:lnRef>
+          <a:fillRef idx="1">
+            <a:schemeClr val="accent1"/>
+          </a:fillRef>
+          <a:effectRef idx="0">
+            <a:schemeClr val="accent1"/>
+          </a:effectRef>
+          <a:fontRef idx="minor">
+            <a:schemeClr val="lt1"/>
+          </a:fontRef>
+        </p:style>
+        <p:txBody>
+          <a:bodyPr rtlCol="0" anchor="ctr"/>
+          <a:lstStyle/>
+          <a:p>
+            <a:pPr algn="ctr"/>
+            <a:endParaRPr lang="en-US">
+              <a:solidFill>
+                <a:schemeClr val="tx1">
+                  <a:lumMod val="65000"/>
+                  <a:lumOff val="35000"/>
+                </a:schemeClr>
+              </a:solidFill>
+            </a:endParaRPr>
+          </a:p>
+        </p:txBody>
+      </p:sp>
+      <p:sp>
+        <p:nvSpPr>
+          <p:cNvPr id="44" name="TextBox 43">
+            <a:extLst>
+              <a:ext uri="{FF2B5EF4-FFF2-40B4-BE49-F238E27FC236}">
+                <a16:creationId xmlns:a16="http://schemas.microsoft.com/office/drawing/2014/main" id="{C89E6738-F38C-32C1-62F9-B649942C8375}"/>
+              </a:ext>
+            </a:extLst>
+          </p:cNvPr>
+          <p:cNvSpPr txBox="1"/>
+          <p:nvPr/>
+        </p:nvSpPr>
+        <p:spPr>
+          <a:xfrm>
+            <a:off x="3250904" y="10568810"/>
+            <a:ext cx="3750500" cy="246221"/>
+          </a:xfrm>
+          <a:prstGeom prst="rect">
+            <a:avLst/>
+          </a:prstGeom>
+          <a:noFill/>
+        </p:spPr>
+        <p:txBody>
+          <a:bodyPr wrap="square" rtlCol="0">
+            <a:spAutoFit/>
+          </a:bodyPr>
+          <a:lstStyle/>
+          <a:p>
+            <a:r>
+              <a:rPr lang="en-US" sz="1000" b="1" dirty="0">
+                <a:solidFill>
+                  <a:schemeClr val="tx1">
+                    <a:lumMod val="65000"/>
+                    <a:lumOff val="35000"/>
+                  </a:schemeClr>
+                </a:solidFill>
+                <a:latin typeface="Microsoft JhengHei Light" panose="020B0304030504040204" pitchFamily="34" charset="-120"/>
+                <a:ea typeface="Microsoft JhengHei Light" panose="020B0304030504040204" pitchFamily="34" charset="-120"/>
+              </a:rPr>
+              <a:t>Approval Box :-</a:t>
+            </a:r>
+          </a:p>
+        </p:txBody>
+      </p:sp>
+      <p:grpSp>
+        <p:nvGrpSpPr>
+          <p:cNvPr id="28" name="Group 27">
+            <a:extLst>
+              <a:ext uri="{FF2B5EF4-FFF2-40B4-BE49-F238E27FC236}">
+                <a16:creationId xmlns:a16="http://schemas.microsoft.com/office/drawing/2014/main" id="{FED7879B-315E-9CF3-B850-8919BA66CE3D}"/>
+              </a:ext>
+            </a:extLst>
+          </p:cNvPr>
+          <p:cNvGrpSpPr/>
+          <p:nvPr/>
+        </p:nvGrpSpPr>
+        <p:grpSpPr>
+          <a:xfrm>
+            <a:off x="5611362" y="7977051"/>
+            <a:ext cx="1923699" cy="1796084"/>
+            <a:chOff x="251699" y="2183122"/>
+            <a:chExt cx="4789373" cy="3867260"/>
+          </a:xfrm>
+        </p:grpSpPr>
+        <p:cxnSp>
+          <p:nvCxnSpPr>
+            <p:cNvPr id="29" name="Straight Arrow Connector 28">
+              <a:extLst>
+                <a:ext uri="{FF2B5EF4-FFF2-40B4-BE49-F238E27FC236}">
+                  <a16:creationId xmlns:a16="http://schemas.microsoft.com/office/drawing/2014/main" id="{D539C7CC-FACE-663F-CA1F-3E7208B65443}"/>
+                </a:ext>
+              </a:extLst>
+            </p:cNvPr>
+            <p:cNvCxnSpPr>
+              <a:cxnSpLocks/>
+            </p:cNvCxnSpPr>
+            <p:nvPr/>
+          </p:nvCxnSpPr>
+          <p:spPr>
+            <a:xfrm>
+              <a:off x="251699" y="6050382"/>
+              <a:ext cx="4684761" cy="0"/>
+            </a:xfrm>
+            <a:prstGeom prst="straightConnector1">
+              <a:avLst/>
+            </a:prstGeom>
+            <a:ln w="12700">
+              <a:solidFill>
+                <a:schemeClr val="tx1">
+                  <a:lumMod val="65000"/>
+                  <a:lumOff val="35000"/>
+                </a:schemeClr>
+              </a:solidFill>
+              <a:headEnd type="triangle"/>
+              <a:tailEnd type="triangle"/>
+            </a:ln>
+          </p:spPr>
+          <p:style>
+            <a:lnRef idx="1">
+              <a:schemeClr val="accent1"/>
+            </a:lnRef>
+            <a:fillRef idx="0">
+              <a:schemeClr val="accent1"/>
+            </a:fillRef>
+            <a:effectRef idx="0">
+              <a:schemeClr val="accent1"/>
+            </a:effectRef>
+            <a:fontRef idx="minor">
+              <a:schemeClr val="tx1"/>
+            </a:fontRef>
+          </p:style>
+        </p:cxnSp>
+        <p:cxnSp>
+          <p:nvCxnSpPr>
+            <p:cNvPr id="32" name="Straight Arrow Connector 31">
+              <a:extLst>
+                <a:ext uri="{FF2B5EF4-FFF2-40B4-BE49-F238E27FC236}">
+                  <a16:creationId xmlns:a16="http://schemas.microsoft.com/office/drawing/2014/main" id="{10876A46-E6BA-1BCB-F7AD-DA1887A5C58D}"/>
+                </a:ext>
+              </a:extLst>
+            </p:cNvPr>
+            <p:cNvCxnSpPr>
+              <a:cxnSpLocks/>
+            </p:cNvCxnSpPr>
+            <p:nvPr/>
+          </p:nvCxnSpPr>
+          <p:spPr>
+            <a:xfrm flipH="1">
+              <a:off x="5023105" y="2183122"/>
+              <a:ext cx="17967" cy="3824646"/>
+            </a:xfrm>
+            <a:prstGeom prst="straightConnector1">
+              <a:avLst/>
+            </a:prstGeom>
+            <a:ln w="12700">
+              <a:solidFill>
+                <a:schemeClr val="tx1">
+                  <a:lumMod val="65000"/>
+                  <a:lumOff val="35000"/>
+                </a:schemeClr>
+              </a:solidFill>
+              <a:headEnd type="triangle"/>
+              <a:tailEnd type="triangle"/>
+            </a:ln>
+          </p:spPr>
+          <p:style>
+            <a:lnRef idx="1">
+              <a:schemeClr val="accent1"/>
+            </a:lnRef>
+            <a:fillRef idx="0">
+              <a:schemeClr val="accent1"/>
+            </a:fillRef>
+            <a:effectRef idx="0">
+              <a:schemeClr val="accent1"/>
+            </a:effectRef>
+            <a:fontRef idx="minor">
+              <a:schemeClr val="tx1"/>
+            </a:fontRef>
+          </p:style>
+        </p:cxnSp>
+      </p:grpSp>
+      <p:sp>
+        <p:nvSpPr>
+          <p:cNvPr id="34" name="TextBox 33">
+            <a:extLst>
+              <a:ext uri="{FF2B5EF4-FFF2-40B4-BE49-F238E27FC236}">
+                <a16:creationId xmlns:a16="http://schemas.microsoft.com/office/drawing/2014/main" id="{6CF98B90-C9FE-53B7-7457-9110FE57A0C5}"/>
+              </a:ext>
+            </a:extLst>
+          </p:cNvPr>
+          <p:cNvSpPr txBox="1"/>
+          <p:nvPr/>
+        </p:nvSpPr>
+        <p:spPr>
+          <a:xfrm rot="16200000">
+            <a:off x="6685378" y="8141762"/>
+            <a:ext cx="1939846" cy="246221"/>
+          </a:xfrm>
+          <a:prstGeom prst="rect">
+            <a:avLst/>
+          </a:prstGeom>
+          <a:noFill/>
+        </p:spPr>
+        <p:txBody>
+          <a:bodyPr wrap="square" rtlCol="0">
+            <a:spAutoFit/>
+          </a:bodyPr>
+          <a:lstStyle/>
+          <a:p>
+            <a:r>
+              <a:rPr lang="en-US" sz="1000" dirty="0">
+                <a:solidFill>
+                  <a:schemeClr val="tx1">
+                    <a:lumMod val="65000"/>
+                    <a:lumOff val="35000"/>
+                  </a:schemeClr>
+                </a:solidFill>
+                <a:latin typeface="Microsoft JhengHei" panose="020B0604030504040204" pitchFamily="34" charset="-120"/>
+                <a:ea typeface="Microsoft JhengHei" panose="020B0604030504040204" pitchFamily="34" charset="-120"/>
+                <a:cs typeface="Arial" panose="020B0604020202020204" pitchFamily="34" charset="0"/>
+              </a:rPr>
+              <a:t>45 CMS </a:t>
+            </a:r>
+          </a:p>
+        </p:txBody>
+      </p:sp>
+      <p:sp>
+        <p:nvSpPr>
+          <p:cNvPr id="35" name="TextBox 34">
+            <a:extLst>
+              <a:ext uri="{FF2B5EF4-FFF2-40B4-BE49-F238E27FC236}">
+                <a16:creationId xmlns:a16="http://schemas.microsoft.com/office/drawing/2014/main" id="{D4497D57-0384-681F-1A58-1EF8C9A1BD29}"/>
+              </a:ext>
+            </a:extLst>
+          </p:cNvPr>
+          <p:cNvSpPr txBox="1"/>
+          <p:nvPr/>
+        </p:nvSpPr>
+        <p:spPr>
+          <a:xfrm>
+            <a:off x="6089898" y="9801579"/>
+            <a:ext cx="1939846" cy="246221"/>
+          </a:xfrm>
+          <a:prstGeom prst="rect">
+            <a:avLst/>
+          </a:prstGeom>
+          <a:noFill/>
+        </p:spPr>
+        <p:txBody>
+          <a:bodyPr wrap="square" rtlCol="0">
+            <a:spAutoFit/>
+          </a:bodyPr>
+          <a:lstStyle/>
+          <a:p>
+            <a:r>
+              <a:rPr lang="en-US" sz="1000" dirty="0">
+                <a:solidFill>
+                  <a:schemeClr val="tx1">
+                    <a:lumMod val="65000"/>
+                    <a:lumOff val="35000"/>
+                  </a:schemeClr>
+                </a:solidFill>
+                <a:latin typeface="Microsoft JhengHei" panose="020B0604030504040204" pitchFamily="34" charset="-120"/>
+                <a:ea typeface="Microsoft JhengHei" panose="020B0604030504040204" pitchFamily="34" charset="-120"/>
+                <a:cs typeface="Arial" panose="020B0604020202020204" pitchFamily="34" charset="0"/>
+              </a:rPr>
+              <a:t>45 CMS </a:t>
+            </a:r>
+          </a:p>
+        </p:txBody>
+      </p:sp>
+      <p:sp>
+        <p:nvSpPr>
+          <p:cNvPr id="4" name="TextBox 3">
+            <a:extLst>
+              <a:ext uri="{FF2B5EF4-FFF2-40B4-BE49-F238E27FC236}">
+                <a16:creationId xmlns:a16="http://schemas.microsoft.com/office/drawing/2014/main" id="{4A16059E-7F9A-A80E-16B4-D75473B31D6A}"/>
+              </a:ext>
+            </a:extLst>
+          </p:cNvPr>
+          <p:cNvSpPr txBox="1"/>
+          <p:nvPr/>
+        </p:nvSpPr>
+        <p:spPr>
+          <a:xfrm>
+            <a:off x="5328536" y="4558543"/>
+            <a:ext cx="2457171" cy="235962"/>
+          </a:xfrm>
+          <a:prstGeom prst="rect">
+            <a:avLst/>
+          </a:prstGeom>
+          <a:solidFill>
+            <a:srgbClr val="829697"/>
+          </a:solidFill>
+        </p:spPr>
+        <p:txBody>
+          <a:bodyPr wrap="square" rtlCol="0">
+            <a:spAutoFit/>
+          </a:bodyPr>
+          <a:lstStyle>
+            <a:defPPr>
+              <a:defRPr lang="en-US"/>
+            </a:defPPr>
+            <a:lvl1pPr>
+              <a:defRPr sz="1692" baseline="30000">
+                <a:latin typeface="Microsoft JhengHei" panose="020B0604030504040204" pitchFamily="34" charset="-120"/>
+                <a:ea typeface="Microsoft JhengHei" panose="020B0604030504040204" pitchFamily="34" charset="-120"/>
+              </a:defRPr>
+            </a:lvl1pPr>
+          </a:lstStyle>
+          <a:p>
+            <a:r>
+              <a:rPr lang="en-US" sz="1400" dirty="0">
+                <a:solidFill>
+                  <a:schemeClr val="bg1"/>
+                </a:solidFill>
+              </a:rPr>
+              <a:t>#11. 1112</a:t>
+            </a:r>
+            <a:r>
+              <a:rPr lang="en-US" sz="1400" baseline="30000" dirty="0">
+                <a:solidFill>
+                  <a:schemeClr val="bg1"/>
+                </a:solidFill>
+                <a:latin typeface="Microsoft JhengHei" panose="020B0604030504040204" pitchFamily="34" charset="-120"/>
+                <a:ea typeface="Microsoft JhengHei" panose="020B0604030504040204" pitchFamily="34" charset="-120"/>
+              </a:rPr>
+              <a:t>- Silk Cut Pile</a:t>
+            </a:r>
+          </a:p>
+        </p:txBody>
+      </p:sp>
+      <p:sp>
+        <p:nvSpPr>
+          <p:cNvPr id="11" name="TextBox 10">
+            <a:extLst>
+              <a:ext uri="{FF2B5EF4-FFF2-40B4-BE49-F238E27FC236}">
+                <a16:creationId xmlns:a16="http://schemas.microsoft.com/office/drawing/2014/main" id="{7C1E3F09-E553-8CF0-83D9-39B5F04B7713}"/>
+              </a:ext>
+            </a:extLst>
+          </p:cNvPr>
+          <p:cNvSpPr txBox="1"/>
+          <p:nvPr/>
+        </p:nvSpPr>
+        <p:spPr>
+          <a:xfrm>
+            <a:off x="5327219" y="4282203"/>
+            <a:ext cx="2457171" cy="235962"/>
+          </a:xfrm>
+          <a:prstGeom prst="rect">
+            <a:avLst/>
+          </a:prstGeom>
+          <a:solidFill>
+            <a:srgbClr val="914637"/>
+          </a:solidFill>
+        </p:spPr>
+        <p:txBody>
+          <a:bodyPr wrap="square" rtlCol="0">
+            <a:spAutoFit/>
+          </a:bodyPr>
+          <a:lstStyle/>
+          <a:p>
+            <a:r>
+              <a:rPr lang="en-US" sz="1400" baseline="30000" dirty="0">
+                <a:solidFill>
+                  <a:schemeClr val="bg1"/>
+                </a:solidFill>
+                <a:latin typeface="Microsoft JhengHei" panose="020B0604030504040204" pitchFamily="34" charset="-120"/>
+                <a:ea typeface="Microsoft JhengHei" panose="020B0604030504040204" pitchFamily="34" charset="-120"/>
+              </a:rPr>
+              <a:t>#10. 607- Silk Cut Pile</a:t>
+            </a:r>
+          </a:p>
+        </p:txBody>
+      </p:sp>
+      <p:sp>
+        <p:nvSpPr>
+          <p:cNvPr id="27" name="TextBox 26">
+            <a:extLst>
+              <a:ext uri="{FF2B5EF4-FFF2-40B4-BE49-F238E27FC236}">
+                <a16:creationId xmlns:a16="http://schemas.microsoft.com/office/drawing/2014/main" id="{8F248121-148C-D9D0-196D-AF1CEB6C907F}"/>
+              </a:ext>
+            </a:extLst>
+          </p:cNvPr>
+          <p:cNvSpPr txBox="1"/>
+          <p:nvPr/>
+        </p:nvSpPr>
+        <p:spPr>
+          <a:xfrm>
+            <a:off x="5368595" y="1337767"/>
+            <a:ext cx="2377054" cy="246221"/>
+          </a:xfrm>
+          <a:prstGeom prst="rect">
+            <a:avLst/>
+          </a:prstGeom>
+          <a:noFill/>
+        </p:spPr>
+        <p:txBody>
+          <a:bodyPr wrap="square" rtlCol="0">
+            <a:spAutoFit/>
+          </a:bodyPr>
+          <a:lstStyle/>
+          <a:p>
+            <a:pPr algn="ctr"/>
+            <a:r>
+              <a:rPr lang="en-US" sz="1000" dirty="0">
+                <a:solidFill>
+                  <a:schemeClr val="bg1"/>
+                </a:solidFill>
+                <a:highlight>
+                  <a:srgbClr val="000080"/>
+                </a:highlight>
+                <a:latin typeface="Microsoft JhengHei" panose="020B0604030504040204" pitchFamily="34" charset="-120"/>
+                <a:ea typeface="Microsoft JhengHei" panose="020B0604030504040204" pitchFamily="34" charset="-120"/>
+                <a:cs typeface="Arial" panose="020B0604020202020204" pitchFamily="34" charset="0"/>
+              </a:rPr>
+              <a:t>JRC +ARS  reference  </a:t>
+            </a:r>
+          </a:p>
+        </p:txBody>
+      </p:sp>
+      <p:sp>
+        <p:nvSpPr>
+          <p:cNvPr id="39" name="TextBox 38">
+            <a:extLst>
+              <a:ext uri="{FF2B5EF4-FFF2-40B4-BE49-F238E27FC236}">
+                <a16:creationId xmlns:a16="http://schemas.microsoft.com/office/drawing/2014/main" id="{3D9CB76F-3094-0D9F-1C16-5118AED9A1D4}"/>
+              </a:ext>
+            </a:extLst>
+          </p:cNvPr>
+          <p:cNvSpPr txBox="1"/>
+          <p:nvPr/>
+        </p:nvSpPr>
+        <p:spPr>
+          <a:xfrm>
+            <a:off x="5332431" y="1736392"/>
+            <a:ext cx="2457171" cy="235962"/>
+          </a:xfrm>
+          <a:prstGeom prst="rect">
+            <a:avLst/>
+          </a:prstGeom>
+          <a:solidFill>
+            <a:srgbClr val="666666"/>
+          </a:solidFill>
+        </p:spPr>
+        <p:txBody>
+          <a:bodyPr wrap="square" rtlCol="0">
+            <a:spAutoFit/>
+          </a:bodyPr>
+          <a:lstStyle/>
+          <a:p>
+            <a:r>
+              <a:rPr lang="en-US" sz="1400" baseline="30000" dirty="0">
+                <a:solidFill>
+                  <a:schemeClr val="bg1"/>
+                </a:solidFill>
+                <a:latin typeface="Microsoft JhengHei" panose="020B0604030504040204" pitchFamily="34" charset="-120"/>
+                <a:ea typeface="Microsoft JhengHei" panose="020B0604030504040204" pitchFamily="34" charset="-120"/>
+              </a:rPr>
+              <a:t>#1. 194- Silk Cut Pile</a:t>
+            </a:r>
+          </a:p>
+        </p:txBody>
+      </p:sp>
+      <p:sp>
+        <p:nvSpPr>
+          <p:cNvPr id="48" name="TextBox 47">
+            <a:extLst>
+              <a:ext uri="{FF2B5EF4-FFF2-40B4-BE49-F238E27FC236}">
+                <a16:creationId xmlns:a16="http://schemas.microsoft.com/office/drawing/2014/main" id="{FFBCB8AA-6DE7-E82E-32CE-12939BEAF80C}"/>
+              </a:ext>
+            </a:extLst>
+          </p:cNvPr>
+          <p:cNvSpPr txBox="1"/>
+          <p:nvPr/>
+        </p:nvSpPr>
+        <p:spPr>
+          <a:xfrm>
+            <a:off x="5377443" y="7081433"/>
+            <a:ext cx="1939846" cy="246221"/>
+          </a:xfrm>
+          <a:prstGeom prst="rect">
+            <a:avLst/>
+          </a:prstGeom>
+          <a:noFill/>
+        </p:spPr>
+        <p:txBody>
+          <a:bodyPr wrap="square" rtlCol="0">
+            <a:spAutoFit/>
+          </a:bodyPr>
+          <a:lstStyle/>
+          <a:p>
+            <a:r>
+              <a:rPr lang="en-US" sz="1000" b="1" u="sng" dirty="0">
+                <a:solidFill>
+                  <a:srgbClr val="C00000"/>
+                </a:solidFill>
+                <a:latin typeface="Microsoft JhengHei" panose="020B0604030504040204" pitchFamily="34" charset="-120"/>
+                <a:ea typeface="Microsoft JhengHei" panose="020B0604030504040204" pitchFamily="34" charset="-120"/>
+                <a:cs typeface="Arial" panose="020B0604020202020204" pitchFamily="34" charset="0"/>
+              </a:rPr>
+              <a:t>Pile height –7 MM -8 MM</a:t>
+            </a:r>
+          </a:p>
+        </p:txBody>
+      </p:sp>
+      <p:sp>
+        <p:nvSpPr>
+          <p:cNvPr id="50" name="TextBox 49">
+            <a:extLst>
+              <a:ext uri="{FF2B5EF4-FFF2-40B4-BE49-F238E27FC236}">
+                <a16:creationId xmlns:a16="http://schemas.microsoft.com/office/drawing/2014/main" id="{399BD836-FC4C-9BAF-ECEE-AE3B665250B0}"/>
+              </a:ext>
+            </a:extLst>
+          </p:cNvPr>
+          <p:cNvSpPr txBox="1"/>
+          <p:nvPr/>
+        </p:nvSpPr>
+        <p:spPr>
+          <a:xfrm>
+            <a:off x="5333748" y="2012732"/>
+            <a:ext cx="2457171" cy="235962"/>
+          </a:xfrm>
+          <a:prstGeom prst="rect">
+            <a:avLst/>
+          </a:prstGeom>
+          <a:solidFill>
+            <a:srgbClr val="B8A982"/>
+          </a:solidFill>
+        </p:spPr>
+        <p:txBody>
+          <a:bodyPr wrap="square" rtlCol="0">
+            <a:spAutoFit/>
+          </a:bodyPr>
+          <a:lstStyle>
+            <a:defPPr>
+              <a:defRPr lang="en-US"/>
+            </a:defPPr>
+            <a:lvl1pPr>
+              <a:defRPr sz="1692" baseline="30000">
+                <a:latin typeface="Microsoft JhengHei" panose="020B0604030504040204" pitchFamily="34" charset="-120"/>
+                <a:ea typeface="Microsoft JhengHei" panose="020B0604030504040204" pitchFamily="34" charset="-120"/>
+              </a:defRPr>
+            </a:lvl1pPr>
+          </a:lstStyle>
+          <a:p>
+            <a:r>
+              <a:rPr lang="en-US" sz="1400" dirty="0">
+                <a:solidFill>
+                  <a:schemeClr val="bg1"/>
+                </a:solidFill>
+              </a:rPr>
+              <a:t>#2. 804</a:t>
+            </a:r>
+            <a:r>
+              <a:rPr lang="en-US" sz="1400" baseline="30000" dirty="0">
+                <a:solidFill>
+                  <a:schemeClr val="bg1"/>
+                </a:solidFill>
+                <a:latin typeface="Microsoft JhengHei" panose="020B0604030504040204" pitchFamily="34" charset="-120"/>
+                <a:ea typeface="Microsoft JhengHei" panose="020B0604030504040204" pitchFamily="34" charset="-120"/>
+              </a:rPr>
+              <a:t>- Silk Cut Pile</a:t>
+            </a:r>
+          </a:p>
+        </p:txBody>
+      </p:sp>
+      <p:sp>
+        <p:nvSpPr>
+          <p:cNvPr id="53" name="TextBox 52">
+            <a:extLst>
+              <a:ext uri="{FF2B5EF4-FFF2-40B4-BE49-F238E27FC236}">
+                <a16:creationId xmlns:a16="http://schemas.microsoft.com/office/drawing/2014/main" id="{966A2C7C-86A4-17C2-205C-BE459A6A4F02}"/>
+              </a:ext>
+            </a:extLst>
+          </p:cNvPr>
+          <p:cNvSpPr txBox="1"/>
+          <p:nvPr/>
+        </p:nvSpPr>
+        <p:spPr>
+          <a:xfrm>
+            <a:off x="5330692" y="2289230"/>
+            <a:ext cx="2457171" cy="235962"/>
+          </a:xfrm>
+          <a:prstGeom prst="rect">
+            <a:avLst/>
+          </a:prstGeom>
+          <a:solidFill>
+            <a:srgbClr val="C9C4B3"/>
+          </a:solidFill>
+        </p:spPr>
+        <p:txBody>
+          <a:bodyPr wrap="square" rtlCol="0">
+            <a:spAutoFit/>
+          </a:bodyPr>
+          <a:lstStyle/>
+          <a:p>
+            <a:r>
+              <a:rPr lang="en-US" sz="1400" baseline="30000" dirty="0">
+                <a:solidFill>
+                  <a:schemeClr val="bg1"/>
+                </a:solidFill>
+                <a:latin typeface="Microsoft JhengHei" panose="020B0604030504040204" pitchFamily="34" charset="-120"/>
+                <a:ea typeface="Microsoft JhengHei" panose="020B0604030504040204" pitchFamily="34" charset="-120"/>
+              </a:rPr>
+              <a:t>#3. 911- Silk Cut Pile</a:t>
+            </a:r>
+          </a:p>
+        </p:txBody>
+      </p:sp>
+      <p:sp>
+        <p:nvSpPr>
+          <p:cNvPr id="55" name="TextBox 54">
+            <a:extLst>
+              <a:ext uri="{FF2B5EF4-FFF2-40B4-BE49-F238E27FC236}">
+                <a16:creationId xmlns:a16="http://schemas.microsoft.com/office/drawing/2014/main" id="{5C7F9DDA-D367-A166-FE38-C13050B2E8C5}"/>
+              </a:ext>
+            </a:extLst>
+          </p:cNvPr>
+          <p:cNvSpPr txBox="1"/>
+          <p:nvPr/>
+        </p:nvSpPr>
+        <p:spPr>
+          <a:xfrm>
+            <a:off x="5332009" y="2576587"/>
+            <a:ext cx="2457171" cy="235962"/>
+          </a:xfrm>
+          <a:prstGeom prst="rect">
+            <a:avLst/>
+          </a:prstGeom>
+          <a:solidFill>
+            <a:srgbClr val="D1B369"/>
+          </a:solidFill>
+        </p:spPr>
+        <p:txBody>
+          <a:bodyPr wrap="square" rtlCol="0">
+            <a:spAutoFit/>
+          </a:bodyPr>
+          <a:lstStyle>
+            <a:defPPr>
+              <a:defRPr lang="en-US"/>
+            </a:defPPr>
+            <a:lvl1pPr>
+              <a:defRPr sz="1692" baseline="30000">
+                <a:latin typeface="Microsoft JhengHei" panose="020B0604030504040204" pitchFamily="34" charset="-120"/>
+                <a:ea typeface="Microsoft JhengHei" panose="020B0604030504040204" pitchFamily="34" charset="-120"/>
+              </a:defRPr>
+            </a:lvl1pPr>
+          </a:lstStyle>
+          <a:p>
+            <a:r>
+              <a:rPr lang="en-US" sz="1400" dirty="0">
+                <a:solidFill>
+                  <a:schemeClr val="bg1"/>
+                </a:solidFill>
+              </a:rPr>
+              <a:t>#4. 809</a:t>
+            </a:r>
+            <a:r>
+              <a:rPr lang="en-US" sz="1400" baseline="30000" dirty="0">
+                <a:solidFill>
+                  <a:schemeClr val="bg1"/>
+                </a:solidFill>
+                <a:latin typeface="Microsoft JhengHei" panose="020B0604030504040204" pitchFamily="34" charset="-120"/>
+                <a:ea typeface="Microsoft JhengHei" panose="020B0604030504040204" pitchFamily="34" charset="-120"/>
+              </a:rPr>
+              <a:t>- Silk Cut Pile</a:t>
+            </a:r>
+          </a:p>
+        </p:txBody>
+      </p:sp>
+      <p:sp>
+        <p:nvSpPr>
+          <p:cNvPr id="59" name="TextBox 58">
+            <a:extLst>
+              <a:ext uri="{FF2B5EF4-FFF2-40B4-BE49-F238E27FC236}">
+                <a16:creationId xmlns:a16="http://schemas.microsoft.com/office/drawing/2014/main" id="{4CFA891E-AB98-A225-2DEA-A4BCDD623A44}"/>
+              </a:ext>
+            </a:extLst>
+          </p:cNvPr>
+          <p:cNvSpPr txBox="1"/>
+          <p:nvPr/>
+        </p:nvSpPr>
+        <p:spPr>
+          <a:xfrm>
+            <a:off x="5329234" y="2861954"/>
+            <a:ext cx="2457171" cy="235962"/>
+          </a:xfrm>
+          <a:prstGeom prst="rect">
+            <a:avLst/>
+          </a:prstGeom>
+          <a:solidFill>
+            <a:srgbClr val="B59143"/>
+          </a:solidFill>
+        </p:spPr>
+        <p:txBody>
+          <a:bodyPr wrap="square" rtlCol="0">
+            <a:spAutoFit/>
+          </a:bodyPr>
+          <a:lstStyle/>
+          <a:p>
+            <a:r>
+              <a:rPr lang="en-US" sz="1400" baseline="30000" dirty="0">
+                <a:solidFill>
+                  <a:schemeClr val="bg1"/>
+                </a:solidFill>
+                <a:latin typeface="Microsoft JhengHei" panose="020B0604030504040204" pitchFamily="34" charset="-120"/>
+                <a:ea typeface="Microsoft JhengHei" panose="020B0604030504040204" pitchFamily="34" charset="-120"/>
+              </a:rPr>
+              <a:t>#5. 754- Silk Cut Pile</a:t>
+            </a:r>
+          </a:p>
+        </p:txBody>
+      </p:sp>
+      <p:sp>
+        <p:nvSpPr>
+          <p:cNvPr id="61" name="TextBox 60">
+            <a:extLst>
+              <a:ext uri="{FF2B5EF4-FFF2-40B4-BE49-F238E27FC236}">
+                <a16:creationId xmlns:a16="http://schemas.microsoft.com/office/drawing/2014/main" id="{DD7DDE52-C211-BA27-7ABD-75B6DA94B71B}"/>
+              </a:ext>
+            </a:extLst>
+          </p:cNvPr>
+          <p:cNvSpPr txBox="1"/>
+          <p:nvPr/>
+        </p:nvSpPr>
+        <p:spPr>
+          <a:xfrm>
+            <a:off x="5330551" y="3149312"/>
+            <a:ext cx="2457171" cy="235962"/>
+          </a:xfrm>
+          <a:prstGeom prst="rect">
+            <a:avLst/>
+          </a:prstGeom>
+          <a:solidFill>
+            <a:srgbClr val="947A63"/>
+          </a:solidFill>
+        </p:spPr>
+        <p:txBody>
+          <a:bodyPr wrap="square" rtlCol="0">
+            <a:spAutoFit/>
+          </a:bodyPr>
+          <a:lstStyle>
+            <a:defPPr>
+              <a:defRPr lang="en-US"/>
+            </a:defPPr>
+            <a:lvl1pPr>
+              <a:defRPr sz="1692" baseline="30000">
+                <a:latin typeface="Microsoft JhengHei" panose="020B0604030504040204" pitchFamily="34" charset="-120"/>
+                <a:ea typeface="Microsoft JhengHei" panose="020B0604030504040204" pitchFamily="34" charset="-120"/>
+              </a:defRPr>
+            </a:lvl1pPr>
+          </a:lstStyle>
+          <a:p>
+            <a:r>
+              <a:rPr lang="en-US" sz="1400" dirty="0">
+                <a:solidFill>
+                  <a:schemeClr val="bg1"/>
+                </a:solidFill>
+              </a:rPr>
+              <a:t>#6. 511</a:t>
+            </a:r>
+            <a:r>
+              <a:rPr lang="en-US" sz="1400" baseline="30000" dirty="0">
+                <a:solidFill>
+                  <a:schemeClr val="bg1"/>
+                </a:solidFill>
+                <a:latin typeface="Microsoft JhengHei" panose="020B0604030504040204" pitchFamily="34" charset="-120"/>
+                <a:ea typeface="Microsoft JhengHei" panose="020B0604030504040204" pitchFamily="34" charset="-120"/>
+              </a:rPr>
+              <a:t>- Silk Cut Pile</a:t>
+            </a:r>
+          </a:p>
+        </p:txBody>
+      </p:sp>
+      <p:sp>
+        <p:nvSpPr>
+          <p:cNvPr id="63" name="TextBox 62">
+            <a:extLst>
+              <a:ext uri="{FF2B5EF4-FFF2-40B4-BE49-F238E27FC236}">
+                <a16:creationId xmlns:a16="http://schemas.microsoft.com/office/drawing/2014/main" id="{7D50E184-1A95-B886-3A5B-83D9C376F6C6}"/>
+              </a:ext>
+            </a:extLst>
+          </p:cNvPr>
+          <p:cNvSpPr txBox="1"/>
+          <p:nvPr/>
+        </p:nvSpPr>
+        <p:spPr>
+          <a:xfrm>
+            <a:off x="5327495" y="3436826"/>
+            <a:ext cx="2457171" cy="235962"/>
+          </a:xfrm>
+          <a:prstGeom prst="rect">
+            <a:avLst/>
+          </a:prstGeom>
+          <a:solidFill>
+            <a:srgbClr val="6E4B3C"/>
+          </a:solidFill>
+        </p:spPr>
+        <p:txBody>
+          <a:bodyPr wrap="square" rtlCol="0">
+            <a:spAutoFit/>
+          </a:bodyPr>
+          <a:lstStyle/>
+          <a:p>
+            <a:r>
+              <a:rPr lang="en-US" sz="1400" baseline="30000" dirty="0">
+                <a:solidFill>
+                  <a:schemeClr val="bg1"/>
+                </a:solidFill>
+                <a:latin typeface="Microsoft JhengHei" panose="020B0604030504040204" pitchFamily="34" charset="-120"/>
+                <a:ea typeface="Microsoft JhengHei" panose="020B0604030504040204" pitchFamily="34" charset="-120"/>
+              </a:rPr>
+              <a:t>#7. 510- Silk Cut Pile</a:t>
+            </a:r>
+          </a:p>
+        </p:txBody>
+      </p:sp>
+      <p:sp>
+        <p:nvSpPr>
+          <p:cNvPr id="65" name="TextBox 64">
+            <a:extLst>
+              <a:ext uri="{FF2B5EF4-FFF2-40B4-BE49-F238E27FC236}">
+                <a16:creationId xmlns:a16="http://schemas.microsoft.com/office/drawing/2014/main" id="{187B8665-4B13-6F14-9E1E-D67283040A06}"/>
+              </a:ext>
+            </a:extLst>
+          </p:cNvPr>
+          <p:cNvSpPr txBox="1"/>
+          <p:nvPr/>
+        </p:nvSpPr>
+        <p:spPr>
+          <a:xfrm>
+            <a:off x="5328812" y="3724183"/>
+            <a:ext cx="2457171" cy="235962"/>
+          </a:xfrm>
+          <a:prstGeom prst="rect">
+            <a:avLst/>
+          </a:prstGeom>
+          <a:solidFill>
+            <a:srgbClr val="BC8874"/>
+          </a:solidFill>
+        </p:spPr>
+        <p:txBody>
+          <a:bodyPr wrap="square" rtlCol="0">
+            <a:spAutoFit/>
+          </a:bodyPr>
+          <a:lstStyle>
+            <a:defPPr>
+              <a:defRPr lang="en-US"/>
+            </a:defPPr>
+            <a:lvl1pPr>
+              <a:defRPr sz="1692" baseline="30000">
+                <a:latin typeface="Microsoft JhengHei" panose="020B0604030504040204" pitchFamily="34" charset="-120"/>
+                <a:ea typeface="Microsoft JhengHei" panose="020B0604030504040204" pitchFamily="34" charset="-120"/>
+              </a:defRPr>
+            </a:lvl1pPr>
+          </a:lstStyle>
+          <a:p>
+            <a:r>
+              <a:rPr lang="en-US" sz="1400" dirty="0">
+                <a:solidFill>
+                  <a:schemeClr val="bg1"/>
+                </a:solidFill>
+              </a:rPr>
+              <a:t>#8. 2652</a:t>
+            </a:r>
+            <a:r>
+              <a:rPr lang="en-US" sz="1400" baseline="30000" dirty="0">
+                <a:solidFill>
+                  <a:schemeClr val="bg1"/>
+                </a:solidFill>
+                <a:latin typeface="Microsoft JhengHei" panose="020B0604030504040204" pitchFamily="34" charset="-120"/>
+                <a:ea typeface="Microsoft JhengHei" panose="020B0604030504040204" pitchFamily="34" charset="-120"/>
+              </a:rPr>
+              <a:t>- Silk Cut Pile</a:t>
+            </a:r>
+          </a:p>
+        </p:txBody>
+      </p:sp>
+      <p:sp>
+        <p:nvSpPr>
+          <p:cNvPr id="67" name="TextBox 66">
+            <a:extLst>
+              <a:ext uri="{FF2B5EF4-FFF2-40B4-BE49-F238E27FC236}">
+                <a16:creationId xmlns:a16="http://schemas.microsoft.com/office/drawing/2014/main" id="{6C662925-A53A-A893-BC34-5F2EB185BA28}"/>
+              </a:ext>
+            </a:extLst>
+          </p:cNvPr>
+          <p:cNvSpPr txBox="1"/>
+          <p:nvPr/>
+        </p:nvSpPr>
+        <p:spPr>
+          <a:xfrm>
+            <a:off x="5332269" y="4003049"/>
+            <a:ext cx="2457171" cy="235962"/>
+          </a:xfrm>
+          <a:prstGeom prst="rect">
+            <a:avLst/>
+          </a:prstGeom>
+          <a:solidFill>
+            <a:srgbClr val="A76350"/>
+          </a:solidFill>
+        </p:spPr>
+        <p:txBody>
+          <a:bodyPr wrap="square" rtlCol="0">
+            <a:spAutoFit/>
+          </a:bodyPr>
+          <a:lstStyle>
+            <a:defPPr>
+              <a:defRPr lang="en-US"/>
+            </a:defPPr>
+            <a:lvl1pPr>
+              <a:defRPr sz="1692" baseline="30000">
+                <a:latin typeface="Microsoft JhengHei" panose="020B0604030504040204" pitchFamily="34" charset="-120"/>
+                <a:ea typeface="Microsoft JhengHei" panose="020B0604030504040204" pitchFamily="34" charset="-120"/>
+              </a:defRPr>
+            </a:lvl1pPr>
+          </a:lstStyle>
+          <a:p>
+            <a:r>
+              <a:rPr lang="en-US" sz="1400" dirty="0">
+                <a:solidFill>
+                  <a:schemeClr val="bg1"/>
+                </a:solidFill>
+              </a:rPr>
+              <a:t>#9. 620</a:t>
+            </a:r>
+            <a:r>
+              <a:rPr lang="en-US" sz="1400" baseline="30000" dirty="0">
+                <a:solidFill>
+                  <a:schemeClr val="bg1"/>
+                </a:solidFill>
+                <a:latin typeface="Microsoft JhengHei" panose="020B0604030504040204" pitchFamily="34" charset="-120"/>
+                <a:ea typeface="Microsoft JhengHei" panose="020B0604030504040204" pitchFamily="34" charset="-120"/>
+              </a:rPr>
+              <a:t>- Silk Cut Pile</a:t>
+            </a:r>
+          </a:p>
+        </p:txBody>
+      </p:sp>
+      <p:sp>
+        <p:nvSpPr>
+          <p:cNvPr id="69" name="TextBox 68">
+            <a:extLst>
+              <a:ext uri="{FF2B5EF4-FFF2-40B4-BE49-F238E27FC236}">
+                <a16:creationId xmlns:a16="http://schemas.microsoft.com/office/drawing/2014/main" id="{2C143647-3B58-BF67-7393-6C84F6C8D065}"/>
+              </a:ext>
+            </a:extLst>
+          </p:cNvPr>
+          <p:cNvSpPr txBox="1"/>
+          <p:nvPr/>
+        </p:nvSpPr>
+        <p:spPr>
+          <a:xfrm>
+            <a:off x="3183308" y="7879459"/>
+            <a:ext cx="2377054" cy="230832"/>
+          </a:xfrm>
+          <a:prstGeom prst="rect">
+            <a:avLst/>
+          </a:prstGeom>
+          <a:noFill/>
+        </p:spPr>
+        <p:txBody>
+          <a:bodyPr wrap="square" rtlCol="0">
+            <a:spAutoFit/>
+          </a:bodyPr>
+          <a:lstStyle/>
+          <a:p>
+            <a:pPr algn="ctr"/>
+            <a:r>
+              <a:rPr lang="en-US" sz="900" dirty="0">
+                <a:solidFill>
+                  <a:schemeClr val="bg1"/>
+                </a:solidFill>
+                <a:highlight>
+                  <a:srgbClr val="000080"/>
+                </a:highlight>
+                <a:latin typeface="Microsoft JhengHei" panose="020B0604030504040204" pitchFamily="34" charset="-120"/>
+                <a:ea typeface="Microsoft JhengHei" panose="020B0604030504040204" pitchFamily="34" charset="-120"/>
+                <a:cs typeface="Arial" panose="020B0604020202020204" pitchFamily="34" charset="0"/>
+              </a:rPr>
+              <a:t>Rug Image / Design Intent</a:t>
+            </a:r>
+          </a:p>
+        </p:txBody>
+      </p:sp>
+      <p:sp>
+        <p:nvSpPr>
+          <p:cNvPr id="2" name="TextBox 1">
+            <a:extLst>
+              <a:ext uri="{FF2B5EF4-FFF2-40B4-BE49-F238E27FC236}">
+                <a16:creationId xmlns:a16="http://schemas.microsoft.com/office/drawing/2014/main" id="{5CC4BA9D-EBA1-B991-E400-87E492E15DD9}"/>
+              </a:ext>
+            </a:extLst>
+          </p:cNvPr>
+          <p:cNvSpPr txBox="1"/>
+          <p:nvPr/>
+        </p:nvSpPr>
+        <p:spPr>
+          <a:xfrm>
+            <a:off x="213386" y="10319944"/>
+            <a:ext cx="3037518" cy="1169551"/>
+          </a:xfrm>
+          <a:prstGeom prst="rect">
+            <a:avLst/>
+          </a:prstGeom>
+          <a:noFill/>
+        </p:spPr>
+        <p:txBody>
+          <a:bodyPr wrap="square" rtlCol="0">
+            <a:spAutoFit/>
+          </a:bodyPr>
+          <a:lstStyle/>
+          <a:p>
+            <a:r>
+              <a:rPr lang="en-US" sz="1000" b="1" u="sng" dirty="0">
+                <a:solidFill>
+                  <a:srgbClr val="C00000"/>
+                </a:solidFill>
+                <a:latin typeface="Microsoft JhengHei" panose="020B0604030504040204" pitchFamily="34" charset="-120"/>
+                <a:ea typeface="Microsoft JhengHei" panose="020B0604030504040204" pitchFamily="34" charset="-120"/>
+                <a:cs typeface="Arial" panose="020B0604020202020204" pitchFamily="34" charset="0"/>
+              </a:rPr>
+              <a:t>IMPORTANT: Jaipur Rugs renderings are provided to illustrate pattern and color placement only. Color should be evaluated using actual yarn samples, as digital renderings cannot accurately represent final dyed yarns or handmade production variations.</a:t>
+            </a:r>
+          </a:p>
+        </p:txBody>
+      </p:sp>
+      <p:pic>
+        <p:nvPicPr>
+          <p:cNvPr id="7" name="Picture 6">
+            <a:extLst>
+              <a:ext uri="{FF2B5EF4-FFF2-40B4-BE49-F238E27FC236}">
+                <a16:creationId xmlns:a16="http://schemas.microsoft.com/office/drawing/2014/main" id="{7777B0A8-FA7A-42E6-8CE5-E56C8A86A146}"/>
+              </a:ext>
+            </a:extLst>
+          </p:cNvPr>
+          <p:cNvPicPr>
+            <a:picLocks noChangeAspect="1"/>
+          </p:cNvPicPr>
+          <p:nvPr/>
+        </p:nvPicPr>
+        <p:blipFill>
+          <a:blip r:embed="rId5">
+            <a:extLst>
+              <a:ext uri="{28A0092B-C50C-407E-A947-70E740481C1C}">
+                <a14:useLocalDpi xmlns:a14="http://schemas.microsoft.com/office/drawing/2010/main" val="0"/>
+              </a:ext>
+            </a:extLst>
+          </a:blip>
+          <a:stretch>
+            <a:fillRect/>
+          </a:stretch>
+        </p:blipFill>
+        <p:spPr>
+          <a:xfrm>
+            <a:off x="3432980" y="8233696"/>
+            <a:ext cx="2227370" cy="1633405"/>
+          </a:xfrm>
+          <a:prstGeom prst="rect">
+            <a:avLst/>
+          </a:prstGeom>
+        </p:spPr>
+      </p:pic>
+      <p:sp>
+        <p:nvSpPr>
+          <p:cNvPr id="9" name="TextBox 8">
+            <a:extLst>
+              <a:ext uri="{FF2B5EF4-FFF2-40B4-BE49-F238E27FC236}">
+                <a16:creationId xmlns:a16="http://schemas.microsoft.com/office/drawing/2014/main" id="{2CA6DDFB-D05A-88AC-9AD0-ED569FE756DE}"/>
+              </a:ext>
+            </a:extLst>
+          </p:cNvPr>
+          <p:cNvSpPr txBox="1"/>
+          <p:nvPr/>
+        </p:nvSpPr>
+        <p:spPr>
+          <a:xfrm>
+            <a:off x="5328536" y="5671338"/>
+            <a:ext cx="2457171" cy="235962"/>
+          </a:xfrm>
+          <a:prstGeom prst="rect">
+            <a:avLst/>
+          </a:prstGeom>
+          <a:solidFill>
+            <a:srgbClr val="3C4425"/>
+          </a:solidFill>
+        </p:spPr>
+        <p:txBody>
+          <a:bodyPr wrap="square" rtlCol="0">
+            <a:spAutoFit/>
+          </a:bodyPr>
+          <a:lstStyle>
+            <a:defPPr>
+              <a:defRPr lang="en-US"/>
+            </a:defPPr>
+            <a:lvl1pPr>
+              <a:defRPr sz="1692" baseline="30000">
+                <a:latin typeface="Microsoft JhengHei" panose="020B0604030504040204" pitchFamily="34" charset="-120"/>
+                <a:ea typeface="Microsoft JhengHei" panose="020B0604030504040204" pitchFamily="34" charset="-120"/>
+              </a:defRPr>
+            </a:lvl1pPr>
+          </a:lstStyle>
+          <a:p>
+            <a:r>
+              <a:rPr lang="en-US" sz="1400" dirty="0">
+                <a:solidFill>
+                  <a:schemeClr val="bg1"/>
+                </a:solidFill>
+              </a:rPr>
+              <a:t>#15. 315</a:t>
+            </a:r>
+            <a:r>
+              <a:rPr lang="en-US" sz="1400" baseline="30000" dirty="0">
+                <a:solidFill>
+                  <a:schemeClr val="bg1"/>
+                </a:solidFill>
+                <a:latin typeface="Microsoft JhengHei" panose="020B0604030504040204" pitchFamily="34" charset="-120"/>
+                <a:ea typeface="Microsoft JhengHei" panose="020B0604030504040204" pitchFamily="34" charset="-120"/>
+              </a:rPr>
+              <a:t>- Silk Cut Pile</a:t>
+            </a:r>
+          </a:p>
+        </p:txBody>
+      </p:sp>
+      <p:sp>
+        <p:nvSpPr>
+          <p:cNvPr id="10" name="TextBox 9">
+            <a:extLst>
+              <a:ext uri="{FF2B5EF4-FFF2-40B4-BE49-F238E27FC236}">
+                <a16:creationId xmlns:a16="http://schemas.microsoft.com/office/drawing/2014/main" id="{5C4A8A69-5FF3-95BB-99AE-0C359BE945A3}"/>
+              </a:ext>
+            </a:extLst>
+          </p:cNvPr>
+          <p:cNvSpPr txBox="1"/>
+          <p:nvPr/>
+        </p:nvSpPr>
+        <p:spPr>
+          <a:xfrm>
+            <a:off x="5327219" y="5394998"/>
+            <a:ext cx="2457171" cy="235962"/>
+          </a:xfrm>
+          <a:prstGeom prst="rect">
+            <a:avLst/>
+          </a:prstGeom>
+          <a:solidFill>
+            <a:srgbClr val="888F57"/>
+          </a:solidFill>
+        </p:spPr>
+        <p:txBody>
+          <a:bodyPr wrap="square" rtlCol="0">
+            <a:spAutoFit/>
+          </a:bodyPr>
+          <a:lstStyle/>
+          <a:p>
+            <a:r>
+              <a:rPr lang="en-US" sz="1400" baseline="30000" dirty="0">
+                <a:solidFill>
+                  <a:schemeClr val="bg1"/>
+                </a:solidFill>
+                <a:latin typeface="Microsoft JhengHei" panose="020B0604030504040204" pitchFamily="34" charset="-120"/>
+                <a:ea typeface="Microsoft JhengHei" panose="020B0604030504040204" pitchFamily="34" charset="-120"/>
+              </a:rPr>
+              <a:t>#14. 202- Silk Cut Pile</a:t>
+            </a:r>
+          </a:p>
+        </p:txBody>
+      </p:sp>
+      <p:sp>
+        <p:nvSpPr>
+          <p:cNvPr id="15" name="TextBox 14">
+            <a:extLst>
+              <a:ext uri="{FF2B5EF4-FFF2-40B4-BE49-F238E27FC236}">
+                <a16:creationId xmlns:a16="http://schemas.microsoft.com/office/drawing/2014/main" id="{C9BDD40E-3F6F-0357-C551-300CFED2AEFD}"/>
+              </a:ext>
+            </a:extLst>
+          </p:cNvPr>
+          <p:cNvSpPr txBox="1"/>
+          <p:nvPr/>
+        </p:nvSpPr>
+        <p:spPr>
+          <a:xfrm>
+            <a:off x="5328812" y="4836978"/>
+            <a:ext cx="2457171" cy="235962"/>
+          </a:xfrm>
+          <a:prstGeom prst="rect">
+            <a:avLst/>
+          </a:prstGeom>
+          <a:solidFill>
+            <a:srgbClr val="3C5E7A"/>
+          </a:solidFill>
+        </p:spPr>
+        <p:txBody>
+          <a:bodyPr wrap="square" rtlCol="0">
+            <a:spAutoFit/>
+          </a:bodyPr>
+          <a:lstStyle>
+            <a:defPPr>
+              <a:defRPr lang="en-US"/>
+            </a:defPPr>
+            <a:lvl1pPr>
+              <a:defRPr sz="1692" baseline="30000">
+                <a:latin typeface="Microsoft JhengHei" panose="020B0604030504040204" pitchFamily="34" charset="-120"/>
+                <a:ea typeface="Microsoft JhengHei" panose="020B0604030504040204" pitchFamily="34" charset="-120"/>
+              </a:defRPr>
+            </a:lvl1pPr>
+          </a:lstStyle>
+          <a:p>
+            <a:r>
+              <a:rPr lang="en-US" sz="1400" dirty="0">
+                <a:solidFill>
+                  <a:schemeClr val="bg1"/>
+                </a:solidFill>
+              </a:rPr>
+              <a:t>#12. 2173-</a:t>
+            </a:r>
+            <a:r>
+              <a:rPr lang="en-US" sz="1400" baseline="30000" dirty="0">
+                <a:solidFill>
+                  <a:schemeClr val="bg1"/>
+                </a:solidFill>
+                <a:latin typeface="Microsoft JhengHei" panose="020B0604030504040204" pitchFamily="34" charset="-120"/>
+                <a:ea typeface="Microsoft JhengHei" panose="020B0604030504040204" pitchFamily="34" charset="-120"/>
+              </a:rPr>
+              <a:t> Silk Cut Pile</a:t>
+            </a:r>
+          </a:p>
+        </p:txBody>
+      </p:sp>
+      <p:sp>
+        <p:nvSpPr>
+          <p:cNvPr id="16" name="TextBox 15">
+            <a:extLst>
+              <a:ext uri="{FF2B5EF4-FFF2-40B4-BE49-F238E27FC236}">
+                <a16:creationId xmlns:a16="http://schemas.microsoft.com/office/drawing/2014/main" id="{C1D2CBBB-B76F-0F15-57F7-1D2467F419C7}"/>
+              </a:ext>
+            </a:extLst>
+          </p:cNvPr>
+          <p:cNvSpPr txBox="1"/>
+          <p:nvPr/>
+        </p:nvSpPr>
+        <p:spPr>
+          <a:xfrm>
+            <a:off x="5322744" y="5115844"/>
+            <a:ext cx="2457171" cy="235962"/>
+          </a:xfrm>
+          <a:prstGeom prst="rect">
+            <a:avLst/>
+          </a:prstGeom>
+          <a:solidFill>
+            <a:srgbClr val="6B4B61"/>
+          </a:solidFill>
+        </p:spPr>
+        <p:txBody>
+          <a:bodyPr wrap="square" rtlCol="0">
+            <a:spAutoFit/>
+          </a:bodyPr>
+          <a:lstStyle>
+            <a:defPPr>
+              <a:defRPr lang="en-US"/>
+            </a:defPPr>
+            <a:lvl1pPr>
+              <a:defRPr sz="1692" baseline="30000">
+                <a:latin typeface="Microsoft JhengHei" panose="020B0604030504040204" pitchFamily="34" charset="-120"/>
+                <a:ea typeface="Microsoft JhengHei" panose="020B0604030504040204" pitchFamily="34" charset="-120"/>
+              </a:defRPr>
+            </a:lvl1pPr>
+          </a:lstStyle>
+          <a:p>
+            <a:r>
+              <a:rPr lang="en-US" sz="1400" dirty="0">
+                <a:solidFill>
+                  <a:schemeClr val="bg1"/>
+                </a:solidFill>
+              </a:rPr>
+              <a:t>#13. 622</a:t>
+            </a:r>
+            <a:r>
+              <a:rPr lang="en-US" sz="1400" baseline="30000" dirty="0">
+                <a:solidFill>
+                  <a:schemeClr val="bg1"/>
+                </a:solidFill>
+                <a:latin typeface="Microsoft JhengHei" panose="020B0604030504040204" pitchFamily="34" charset="-120"/>
+                <a:ea typeface="Microsoft JhengHei" panose="020B0604030504040204" pitchFamily="34" charset="-120"/>
+              </a:rPr>
+              <a:t>- Silk Cut Pile</a:t>
+            </a:r>
+          </a:p>
+        </p:txBody>
+      </p:sp>
+    </p:spTree>
+    <p:extLst>
+      <p:ext uri="{BB962C8B-B14F-4D97-AF65-F5344CB8AC3E}">
+        <p14:creationId xmlns:p14="http://schemas.microsoft.com/office/powerpoint/2010/main" val="330423357"/>
+      </p:ext>
+    </p:extLst>
+  </p:cSld>
+  <p:clrMapOvr>
+    <a:masterClrMapping/>
+  </p:clrMapOvr>
+</p:sld>
+</file>
+
+<file path=ppt/slides/slide3.xml><?xml version="1.0" encoding="utf-8"?>
 <p:sld xmlns:a="http://schemas.openxmlformats.org/drawingml/2006/main" xmlns:r="http://schemas.openxmlformats.org/officeDocument/2006/relationships" xmlns:p="http://schemas.openxmlformats.org/presentationml/2006/main">
   <p:cSld>
     <p:spTree>
@@ -5732,7 +8991,7 @@
         <p:spPr>
           <a:xfrm>
             <a:off x="269812" y="958089"/>
-            <a:ext cx="6995842" cy="1672253"/>
+            <a:ext cx="6995842" cy="2435860"/>
           </a:xfrm>
           <a:prstGeom prst="rect">
             <a:avLst/>
@@ -5746,150 +9005,190 @@
           <a:lstStyle/>
           <a:p>
             <a:pPr marL="285750" indent="-285750">
+              <a:lnSpc>
+                <a:spcPct val="150000"/>
+              </a:lnSpc>
               <a:buFont typeface="Arial" panose="020B0604020202020204" pitchFamily="34" charset="0"/>
               <a:buChar char="•"/>
             </a:pPr>
             <a:r>
-              <a:rPr lang="en-US" sz="1400" b="0" i="0" u="none" strike="noStrike" baseline="30000" dirty="0">
+              <a:rPr lang="en-US" sz="1400" b="1" i="0" u="none" strike="noStrike" baseline="30000" dirty="0">
                 <a:solidFill>
                   <a:srgbClr val="000000"/>
                 </a:solidFill>
-                <a:latin typeface="Tw Cen MT" panose="020B0602020104020603" pitchFamily="34" charset="0"/>
+                <a:latin typeface="Microsoft JhengHei" panose="020B0604030504040204" pitchFamily="34" charset="-120"/>
+                <a:ea typeface="Microsoft JhengHei" panose="020B0604030504040204" pitchFamily="34" charset="-120"/>
               </a:rPr>
               <a:t> A custom rug is by nature a unique product. </a:t>
             </a:r>
           </a:p>
           <a:p>
             <a:pPr marL="285750" indent="-285750">
+              <a:lnSpc>
+                <a:spcPct val="150000"/>
+              </a:lnSpc>
               <a:buFont typeface="Arial" panose="020B0604020202020204" pitchFamily="34" charset="0"/>
               <a:buChar char="•"/>
             </a:pPr>
             <a:r>
-              <a:rPr lang="en-US" sz="1400" b="0" i="0" u="none" strike="noStrike" baseline="30000" dirty="0">
+              <a:rPr lang="en-US" sz="1400" b="1" i="0" u="none" strike="noStrike" baseline="30000" dirty="0">
                 <a:solidFill>
                   <a:srgbClr val="000000"/>
                 </a:solidFill>
-                <a:latin typeface="Tw Cen MT" panose="020B0602020104020603" pitchFamily="34" charset="0"/>
+                <a:latin typeface="Microsoft JhengHei" panose="020B0604030504040204" pitchFamily="34" charset="-120"/>
+                <a:ea typeface="Microsoft JhengHei" panose="020B0604030504040204" pitchFamily="34" charset="-120"/>
               </a:rPr>
               <a:t>Slight variations in color and size are normal.</a:t>
             </a:r>
           </a:p>
           <a:p>
             <a:pPr marL="285750" indent="-285750">
+              <a:lnSpc>
+                <a:spcPct val="150000"/>
+              </a:lnSpc>
               <a:buFont typeface="Arial" panose="020B0604020202020204" pitchFamily="34" charset="0"/>
               <a:buChar char="•"/>
             </a:pPr>
             <a:r>
-              <a:rPr lang="en-US" sz="1400" b="0" i="0" u="none" strike="noStrike" baseline="30000" dirty="0">
+              <a:rPr lang="en-US" sz="1400" b="1" i="0" u="none" strike="noStrike" baseline="30000" dirty="0">
                 <a:solidFill>
                   <a:srgbClr val="000000"/>
                 </a:solidFill>
-                <a:latin typeface="Tw Cen MT" panose="020B0602020104020603" pitchFamily="34" charset="0"/>
+                <a:latin typeface="Microsoft JhengHei" panose="020B0604030504040204" pitchFamily="34" charset="-120"/>
+                <a:ea typeface="Microsoft JhengHei" panose="020B0604030504040204" pitchFamily="34" charset="-120"/>
               </a:rPr>
               <a:t>Please note: all custom rugs can have a variance of +/- 3 inches.</a:t>
             </a:r>
           </a:p>
           <a:p>
             <a:pPr marL="285750" indent="-285750">
+              <a:lnSpc>
+                <a:spcPct val="150000"/>
+              </a:lnSpc>
               <a:buFont typeface="Arial" panose="020B0604020202020204" pitchFamily="34" charset="0"/>
               <a:buChar char="•"/>
             </a:pPr>
             <a:r>
-              <a:rPr lang="en-US" sz="1400" b="0" i="0" u="none" strike="noStrike" baseline="30000" dirty="0">
+              <a:rPr lang="en-US" sz="1400" b="1" i="0" u="none" strike="noStrike" baseline="30000" dirty="0">
                 <a:solidFill>
                   <a:srgbClr val="000000"/>
                 </a:solidFill>
-                <a:latin typeface="Tw Cen MT" panose="020B0602020104020603" pitchFamily="34" charset="0"/>
+                <a:latin typeface="Microsoft JhengHei" panose="020B0604030504040204" pitchFamily="34" charset="-120"/>
+                <a:ea typeface="Microsoft JhengHei" panose="020B0604030504040204" pitchFamily="34" charset="-120"/>
               </a:rPr>
               <a:t>No changes once order is placed.</a:t>
             </a:r>
           </a:p>
           <a:p>
             <a:pPr marL="285750" indent="-285750">
+              <a:lnSpc>
+                <a:spcPct val="150000"/>
+              </a:lnSpc>
               <a:buFont typeface="Arial" panose="020B0604020202020204" pitchFamily="34" charset="0"/>
               <a:buChar char="•"/>
             </a:pPr>
             <a:r>
-              <a:rPr lang="en-US" sz="1400" b="0" i="0" u="none" strike="noStrike" baseline="30000" dirty="0">
+              <a:rPr lang="en-US" sz="1400" b="1" i="0" u="none" strike="noStrike" baseline="30000" dirty="0">
                 <a:solidFill>
                   <a:srgbClr val="000000"/>
                 </a:solidFill>
-                <a:latin typeface="Tw Cen MT" panose="020B0602020104020603" pitchFamily="34" charset="0"/>
+                <a:latin typeface="Microsoft JhengHei" panose="020B0604030504040204" pitchFamily="34" charset="-120"/>
+                <a:ea typeface="Microsoft JhengHei" panose="020B0604030504040204" pitchFamily="34" charset="-120"/>
               </a:rPr>
               <a:t>No cancellations once items are in production.</a:t>
             </a:r>
           </a:p>
           <a:p>
             <a:pPr marL="285750" indent="-285750">
+              <a:lnSpc>
+                <a:spcPct val="150000"/>
+              </a:lnSpc>
               <a:buFont typeface="Arial" panose="020B0604020202020204" pitchFamily="34" charset="0"/>
               <a:buChar char="•"/>
             </a:pPr>
             <a:r>
-              <a:rPr lang="en-US" sz="1400" b="0" i="0" u="none" strike="noStrike" baseline="30000" dirty="0">
+              <a:rPr lang="en-US" sz="1400" b="1" i="0" u="none" strike="noStrike" baseline="30000" dirty="0">
                 <a:solidFill>
                   <a:srgbClr val="000000"/>
                 </a:solidFill>
-                <a:latin typeface="Tw Cen MT" panose="020B0602020104020603" pitchFamily="34" charset="0"/>
+                <a:latin typeface="Microsoft JhengHei" panose="020B0604030504040204" pitchFamily="34" charset="-120"/>
+                <a:ea typeface="Microsoft JhengHei" panose="020B0604030504040204" pitchFamily="34" charset="-120"/>
               </a:rPr>
               <a:t>You may cancel your custom rug order within 5 business days from the date of the order without penalty. If you wish to cancel standard customs after 5 business days, your deposit will be forfeited.</a:t>
             </a:r>
           </a:p>
           <a:p>
             <a:pPr marL="285750" indent="-285750">
+              <a:lnSpc>
+                <a:spcPct val="150000"/>
+              </a:lnSpc>
               <a:buFont typeface="Arial" panose="020B0604020202020204" pitchFamily="34" charset="0"/>
               <a:buChar char="•"/>
             </a:pPr>
             <a:r>
-              <a:rPr lang="en-US" sz="1400" b="0" i="0" u="none" strike="noStrike" baseline="30000" dirty="0">
+              <a:rPr lang="en-US" sz="1400" b="1" i="0" u="none" strike="noStrike" baseline="30000" dirty="0">
                 <a:solidFill>
                   <a:srgbClr val="000000"/>
                 </a:solidFill>
-                <a:latin typeface="Tw Cen MT" panose="020B0602020104020603" pitchFamily="34" charset="0"/>
+                <a:latin typeface="Microsoft JhengHei" panose="020B0604030504040204" pitchFamily="34" charset="-120"/>
+                <a:ea typeface="Microsoft JhengHei" panose="020B0604030504040204" pitchFamily="34" charset="-120"/>
               </a:rPr>
               <a:t> No returns/refunds of Custom Rug. </a:t>
             </a:r>
           </a:p>
           <a:p>
             <a:pPr marL="285750" indent="-285750">
+              <a:lnSpc>
+                <a:spcPct val="150000"/>
+              </a:lnSpc>
               <a:buFont typeface="Arial" panose="020B0604020202020204" pitchFamily="34" charset="0"/>
               <a:buChar char="•"/>
             </a:pPr>
             <a:r>
-              <a:rPr lang="en-US" sz="1400" b="0" i="0" u="none" strike="noStrike" baseline="30000" dirty="0">
+              <a:rPr lang="en-US" sz="1400" b="1" i="0" u="none" strike="noStrike" baseline="30000" dirty="0">
                 <a:solidFill>
                   <a:srgbClr val="000000"/>
                 </a:solidFill>
-                <a:latin typeface="Tw Cen MT" panose="020B0602020104020603" pitchFamily="34" charset="0"/>
+                <a:latin typeface="Microsoft JhengHei" panose="020B0604030504040204" pitchFamily="34" charset="-120"/>
+                <a:ea typeface="Microsoft JhengHei" panose="020B0604030504040204" pitchFamily="34" charset="-120"/>
               </a:rPr>
               <a:t>Size limitations vary between collections.</a:t>
             </a:r>
           </a:p>
           <a:p>
             <a:pPr marL="285750" indent="-285750">
+              <a:lnSpc>
+                <a:spcPct val="150000"/>
+              </a:lnSpc>
               <a:buFont typeface="Arial" panose="020B0604020202020204" pitchFamily="34" charset="0"/>
               <a:buChar char="•"/>
             </a:pPr>
             <a:r>
-              <a:rPr lang="en-US" sz="1400" b="0" i="0" u="none" strike="noStrike" baseline="30000" dirty="0">
+              <a:rPr lang="en-US" sz="1400" b="1" i="0" u="none" strike="noStrike" baseline="30000" dirty="0">
                 <a:solidFill>
                   <a:srgbClr val="000000"/>
                 </a:solidFill>
-                <a:latin typeface="Tw Cen MT" panose="020B0602020104020603" pitchFamily="34" charset="0"/>
+                <a:latin typeface="Microsoft JhengHei" panose="020B0604030504040204" pitchFamily="34" charset="-120"/>
+                <a:ea typeface="Microsoft JhengHei" panose="020B0604030504040204" pitchFamily="34" charset="-120"/>
               </a:rPr>
               <a:t> Production times are an estimate. All efforts will be made to produce in the time quoted.</a:t>
             </a:r>
           </a:p>
           <a:p>
             <a:pPr marL="285750" indent="-285750">
+              <a:lnSpc>
+                <a:spcPct val="150000"/>
+              </a:lnSpc>
               <a:buFont typeface="Arial" panose="020B0604020202020204" pitchFamily="34" charset="0"/>
               <a:buChar char="•"/>
             </a:pPr>
             <a:r>
-              <a:rPr lang="en-US" sz="1400" b="0" i="0" u="none" strike="noStrike" baseline="30000" dirty="0">
+              <a:rPr lang="en-US" sz="1400" b="1" i="0" u="none" strike="noStrike" baseline="30000" dirty="0">
                 <a:solidFill>
                   <a:srgbClr val="000000"/>
                 </a:solidFill>
-                <a:latin typeface="Tw Cen MT" panose="020B0602020104020603" pitchFamily="34" charset="0"/>
+                <a:latin typeface="Microsoft JhengHei" panose="020B0604030504040204" pitchFamily="34" charset="-120"/>
+                <a:ea typeface="Microsoft JhengHei" panose="020B0604030504040204" pitchFamily="34" charset="-120"/>
               </a:rPr>
               <a:t> Final delivery of your custom rug will vary  based on size, construction and shipping method.</a:t>
             </a:r>
@@ -5910,8 +9209,8 @@
         </p:nvSpPr>
         <p:spPr>
           <a:xfrm>
-            <a:off x="248547" y="681090"/>
-            <a:ext cx="1977655" cy="276999"/>
+            <a:off x="248547" y="568796"/>
+            <a:ext cx="1977655" cy="375872"/>
           </a:xfrm>
           <a:prstGeom prst="rect">
             <a:avLst/>
@@ -5924,61 +9223,23 @@
           </a:bodyPr>
           <a:lstStyle/>
           <a:p>
-            <a:r>
-              <a:rPr lang="en-US" sz="1200" b="1" dirty="0">
+            <a:pPr>
+              <a:lnSpc>
+                <a:spcPct val="150000"/>
+              </a:lnSpc>
+            </a:pPr>
+            <a:r>
+              <a:rPr lang="en-US" sz="1400" b="1" dirty="0">
                 <a:solidFill>
                   <a:schemeClr val="tx1">
                     <a:lumMod val="50000"/>
                     <a:lumOff val="50000"/>
                   </a:schemeClr>
                 </a:solidFill>
-                <a:latin typeface="Tw Cen MT" panose="020B0602020104020603" pitchFamily="34" charset="0"/>
+                <a:latin typeface="Microsoft JhengHei" panose="020B0604030504040204" pitchFamily="34" charset="-120"/>
+                <a:ea typeface="Microsoft JhengHei" panose="020B0604030504040204" pitchFamily="34" charset="-120"/>
               </a:rPr>
               <a:t>INFO SECTION</a:t>
-            </a:r>
-          </a:p>
-        </p:txBody>
-      </p:sp>
-      <p:sp>
-        <p:nvSpPr>
-          <p:cNvPr id="2" name="TextBox 1">
-            <a:extLst>
-              <a:ext uri="{FF2B5EF4-FFF2-40B4-BE49-F238E27FC236}">
-                <a16:creationId xmlns:a16="http://schemas.microsoft.com/office/drawing/2014/main" id="{665A7D09-8D5C-6F80-82A4-BFDBA4EB6F2F}"/>
-              </a:ext>
-            </a:extLst>
-          </p:cNvPr>
-          <p:cNvSpPr txBox="1"/>
-          <p:nvPr/>
-        </p:nvSpPr>
-        <p:spPr>
-          <a:xfrm>
-            <a:off x="6436251" y="420597"/>
-            <a:ext cx="1977655" cy="261610"/>
-          </a:xfrm>
-          <a:prstGeom prst="rect">
-            <a:avLst/>
-          </a:prstGeom>
-          <a:noFill/>
-        </p:spPr>
-        <p:txBody>
-          <a:bodyPr wrap="square" rtlCol="0">
-            <a:spAutoFit/>
-          </a:bodyPr>
-          <a:lstStyle/>
-          <a:p>
-            <a:r>
-              <a:rPr lang="en-US" sz="1100" b="1" dirty="0">
-                <a:solidFill>
-                  <a:schemeClr val="tx1">
-                    <a:lumMod val="50000"/>
-                    <a:lumOff val="50000"/>
-                  </a:schemeClr>
-                </a:solidFill>
-                <a:latin typeface="Microsoft Yi Baiti" panose="03000500000000000000" pitchFamily="66" charset="0"/>
-                <a:ea typeface="Microsoft Yi Baiti" panose="03000500000000000000" pitchFamily="66" charset="0"/>
-              </a:rPr>
-              <a:t>Customized Project</a:t>
             </a:r>
           </a:p>
         </p:txBody>
@@ -6145,6 +9406,50 @@
           </a:fontRef>
         </p:style>
       </p:cxnSp>
+      <p:sp>
+        <p:nvSpPr>
+          <p:cNvPr id="13" name="TextBox 12">
+            <a:extLst>
+              <a:ext uri="{FF2B5EF4-FFF2-40B4-BE49-F238E27FC236}">
+                <a16:creationId xmlns:a16="http://schemas.microsoft.com/office/drawing/2014/main" id="{2B54C10A-AAB6-FDF8-51A4-8D1C4CCAC7F7}"/>
+              </a:ext>
+            </a:extLst>
+          </p:cNvPr>
+          <p:cNvSpPr txBox="1"/>
+          <p:nvPr/>
+        </p:nvSpPr>
+        <p:spPr>
+          <a:xfrm>
+            <a:off x="6388125" y="468723"/>
+            <a:ext cx="1977655" cy="246221"/>
+          </a:xfrm>
+          <a:prstGeom prst="rect">
+            <a:avLst/>
+          </a:prstGeom>
+          <a:noFill/>
+        </p:spPr>
+        <p:txBody>
+          <a:bodyPr wrap="square" rtlCol="0">
+            <a:spAutoFit/>
+          </a:bodyPr>
+          <a:lstStyle/>
+          <a:p>
+            <a:r>
+              <a:rPr lang="en-US" sz="1000" dirty="0">
+                <a:solidFill>
+                  <a:schemeClr val="tx1">
+                    <a:lumMod val="50000"/>
+                    <a:lumOff val="50000"/>
+                  </a:schemeClr>
+                </a:solidFill>
+                <a:latin typeface="Microsoft JhengHei Light" panose="020B0304030504040204" pitchFamily="34" charset="-120"/>
+                <a:ea typeface="Microsoft JhengHei Light" panose="020B0304030504040204" pitchFamily="34" charset="-120"/>
+              </a:rPr>
+              <a:t>Customized Project</a:t>
+            </a:r>
+          </a:p>
+        </p:txBody>
+      </p:sp>
     </p:spTree>
     <p:extLst>
       <p:ext uri="{BB962C8B-B14F-4D97-AF65-F5344CB8AC3E}">
